--- a/output/wordlabs-grow-3day.pptx
+++ b/output/wordlabs-grow-3day.pptx
@@ -4279,7 +4279,7 @@
                 <a:ea typeface="Calibri" pitchFamily="34" charset="-122"/>
                 <a:cs typeface="Calibri" pitchFamily="34" charset="-120"/>
               </a:rPr>
-              <a:t>Origin: Old English: growan</a:t>
+              <a:t>Origin: Latin: crescere</a:t>
             </a:r>
             <a:endParaRPr lang="en-US" sz="1300" dirty="0"/>
           </a:p>
@@ -6102,7 +6102,7 @@
                 <a:ea typeface="Calibri" pitchFamily="34" charset="-122"/>
                 <a:cs typeface="Calibri" pitchFamily="34" charset="-120"/>
               </a:rPr>
-              <a:t> weeds were blocking the sunlight from reaching the young plants.</a:t>
+              <a:t> vines had spread across the entire fence.</a:t>
             </a:r>
             <a:endParaRPr lang="en-US" sz="1800" dirty="0"/>
           </a:p>
@@ -16475,7 +16475,7 @@
                 <a:ea typeface="Trebuchet MS" pitchFamily="34" charset="-122"/>
                 <a:cs typeface="Trebuchet MS" pitchFamily="34" charset="-120"/>
               </a:rPr>
-              <a:t>3</a:t>
+              <a:t>2</a:t>
             </a:r>
             <a:pPr algn="ctr" indent="0" marL="0">
               <a:buNone/>
@@ -16893,7 +16893,7 @@
                 <a:ea typeface="Calibri" pitchFamily="34" charset="-122"/>
                 <a:cs typeface="Calibri" pitchFamily="34" charset="-120"/>
               </a:rPr>
-              <a:t>The gardener explained that </a:t>
+              <a:t>After </a:t>
             </a:r>
             <a:pPr algn="l" indent="0" marL="0">
               <a:buNone/>
@@ -16910,7 +16910,7 @@
                 <a:ea typeface="Calibri" pitchFamily="34" charset="-122"/>
                 <a:cs typeface="Calibri" pitchFamily="34" charset="-120"/>
               </a:rPr>
-              <a:t>overgrown</a:t>
+              <a:t>regrowth</a:t>
             </a:r>
             <a:pPr algn="l" indent="0" marL="0">
               <a:buNone/>
@@ -16924,7 +16924,7 @@
                 <a:ea typeface="Calibri" pitchFamily="34" charset="-122"/>
                 <a:cs typeface="Calibri" pitchFamily="34" charset="-120"/>
               </a:rPr>
-              <a:t> hedges, fast-</a:t>
+              <a:t>, the </a:t>
             </a:r>
             <a:pPr algn="l" indent="0" marL="0">
               <a:buNone/>
@@ -16941,7 +16941,7 @@
                 <a:ea typeface="Calibri" pitchFamily="34" charset="-122"/>
                 <a:cs typeface="Calibri" pitchFamily="34" charset="-120"/>
               </a:rPr>
-              <a:t>growing</a:t>
+              <a:t>overgrown</a:t>
             </a:r>
             <a:pPr algn="l" indent="0" marL="0">
               <a:buNone/>
@@ -16955,7 +16955,7 @@
                 <a:ea typeface="Calibri" pitchFamily="34" charset="-122"/>
                 <a:cs typeface="Calibri" pitchFamily="34" charset="-120"/>
               </a:rPr>
-              <a:t> vines, and new </a:t>
+              <a:t> hedge looked healthy, but </a:t>
             </a:r>
             <a:pPr algn="l" indent="0" marL="0">
               <a:buNone/>
@@ -16972,7 +16972,7 @@
                 <a:ea typeface="Calibri" pitchFamily="34" charset="-122"/>
                 <a:cs typeface="Calibri" pitchFamily="34" charset="-120"/>
               </a:rPr>
-              <a:t>regrowth</a:t>
+              <a:t>growing</a:t>
             </a:r>
             <a:pPr algn="l" indent="0" marL="0">
               <a:buNone/>
@@ -16986,7 +16986,7 @@
                 <a:ea typeface="Calibri" pitchFamily="34" charset="-122"/>
                 <a:cs typeface="Calibri" pitchFamily="34" charset="-120"/>
               </a:rPr>
-              <a:t> all needed to be managed carefully.</a:t>
+              <a:t> it neatly took patience.</a:t>
             </a:r>
             <a:endParaRPr lang="en-US" sz="1800" dirty="0"/>
           </a:p>
@@ -17141,7 +17141,7 @@
                 <a:ea typeface="Trebuchet MS" pitchFamily="34" charset="-122"/>
                 <a:cs typeface="Trebuchet MS" pitchFamily="34" charset="-120"/>
               </a:rPr>
-              <a:t>overgrown</a:t>
+              <a:t>regrowth</a:t>
             </a:r>
             <a:endParaRPr lang="en-US" sz="1400" dirty="0"/>
           </a:p>
@@ -17269,7 +17269,7 @@
                 <a:ea typeface="Trebuchet MS" pitchFamily="34" charset="-122"/>
                 <a:cs typeface="Trebuchet MS" pitchFamily="34" charset="-120"/>
               </a:rPr>
-              <a:t>growing</a:t>
+              <a:t>overgrown</a:t>
             </a:r>
             <a:endParaRPr lang="en-US" sz="1400" dirty="0"/>
           </a:p>
@@ -17397,7 +17397,7 @@
                 <a:ea typeface="Trebuchet MS" pitchFamily="34" charset="-122"/>
                 <a:cs typeface="Trebuchet MS" pitchFamily="34" charset="-120"/>
               </a:rPr>
-              <a:t>regrowth</a:t>
+              <a:t>growing</a:t>
             </a:r>
             <a:endParaRPr lang="en-US" sz="1400" dirty="0"/>
           </a:p>
@@ -17867,7 +17867,7 @@
                 <a:ea typeface="Trebuchet MS" pitchFamily="34" charset="-122"/>
                 <a:cs typeface="Trebuchet MS" pitchFamily="34" charset="-120"/>
               </a:rPr>
-              <a:t>overgrown</a:t>
+              <a:t>regrowth</a:t>
             </a:r>
             <a:endParaRPr lang="en-US" sz="2800" dirty="0"/>
           </a:p>
@@ -18694,7 +18694,7 @@
                 <a:ea typeface="Trebuchet MS" pitchFamily="34" charset="-122"/>
                 <a:cs typeface="Trebuchet MS" pitchFamily="34" charset="-120"/>
               </a:rPr>
-              <a:t>overgrown</a:t>
+              <a:t>regrowth</a:t>
             </a:r>
             <a:endParaRPr lang="en-US" sz="2800" dirty="0"/>
           </a:p>
@@ -18833,7 +18833,7 @@
                 <a:ea typeface="Trebuchet MS" pitchFamily="34" charset="-122"/>
                 <a:cs typeface="Trebuchet MS" pitchFamily="34" charset="-120"/>
               </a:rPr>
-              <a:t>over</a:t>
+              <a:t>re</a:t>
             </a:r>
             <a:endParaRPr lang="en-US" sz="1300" dirty="0"/>
           </a:p>
@@ -18872,7 +18872,7 @@
                 <a:ea typeface="Calibri" pitchFamily="34" charset="-122"/>
                 <a:cs typeface="Calibri" pitchFamily="34" charset="-120"/>
               </a:rPr>
-              <a:t>too much or above</a:t>
+              <a:t>again</a:t>
             </a:r>
             <a:endParaRPr lang="en-US" sz="850" dirty="0"/>
           </a:p>
@@ -19057,7 +19057,7 @@
                 <a:ea typeface="Trebuchet MS" pitchFamily="34" charset="-122"/>
                 <a:cs typeface="Trebuchet MS" pitchFamily="34" charset="-120"/>
               </a:rPr>
-              <a:t>n</a:t>
+              <a:t>th</a:t>
             </a:r>
             <a:endParaRPr lang="en-US" sz="1300" dirty="0"/>
           </a:p>
@@ -19096,7 +19096,7 @@
                 <a:ea typeface="Calibri" pitchFamily="34" charset="-122"/>
                 <a:cs typeface="Calibri" pitchFamily="34" charset="-120"/>
               </a:rPr>
-              <a:t>past participle ending</a:t>
+              <a:t>state or process of</a:t>
             </a:r>
             <a:endParaRPr lang="en-US" sz="850" dirty="0"/>
           </a:p>
@@ -19791,7 +19791,7 @@
                 <a:ea typeface="Trebuchet MS" pitchFamily="34" charset="-122"/>
                 <a:cs typeface="Trebuchet MS" pitchFamily="34" charset="-120"/>
               </a:rPr>
-              <a:t>overgrown</a:t>
+              <a:t>regrowth</a:t>
             </a:r>
             <a:endParaRPr lang="en-US" sz="2800" dirty="0"/>
           </a:p>
@@ -19930,7 +19930,7 @@
                 <a:ea typeface="Trebuchet MS" pitchFamily="34" charset="-122"/>
                 <a:cs typeface="Trebuchet MS" pitchFamily="34" charset="-120"/>
               </a:rPr>
-              <a:t>over</a:t>
+              <a:t>re</a:t>
             </a:r>
             <a:endParaRPr lang="en-US" sz="1300" dirty="0"/>
           </a:p>
@@ -19969,7 +19969,7 @@
                 <a:ea typeface="Calibri" pitchFamily="34" charset="-122"/>
                 <a:cs typeface="Calibri" pitchFamily="34" charset="-120"/>
               </a:rPr>
-              <a:t>too much or above</a:t>
+              <a:t>again</a:t>
             </a:r>
             <a:endParaRPr lang="en-US" sz="850" dirty="0"/>
           </a:p>
@@ -20154,7 +20154,7 @@
                 <a:ea typeface="Trebuchet MS" pitchFamily="34" charset="-122"/>
                 <a:cs typeface="Trebuchet MS" pitchFamily="34" charset="-120"/>
               </a:rPr>
-              <a:t>n</a:t>
+              <a:t>th</a:t>
             </a:r>
             <a:endParaRPr lang="en-US" sz="1300" dirty="0"/>
           </a:p>
@@ -20193,7 +20193,7 @@
                 <a:ea typeface="Calibri" pitchFamily="34" charset="-122"/>
                 <a:cs typeface="Calibri" pitchFamily="34" charset="-120"/>
               </a:rPr>
-              <a:t>past participle ending</a:t>
+              <a:t>state or process of</a:t>
             </a:r>
             <a:endParaRPr lang="en-US" sz="850" dirty="0"/>
           </a:p>
@@ -20300,7 +20300,7 @@
         </p:nvSpPr>
         <p:spPr>
           <a:xfrm>
-            <a:off x="2313432" y="3364992"/>
+            <a:off x="2999232" y="3364992"/>
             <a:ext cx="1645920" cy="475488"/>
           </a:xfrm>
           <a:prstGeom prst="rect">
@@ -20327,7 +20327,7 @@
         </p:nvSpPr>
         <p:spPr>
           <a:xfrm>
-            <a:off x="2313432" y="3364992"/>
+            <a:off x="2999232" y="3364992"/>
             <a:ext cx="1645920" cy="475488"/>
           </a:xfrm>
           <a:prstGeom prst="rect">
@@ -20352,7 +20352,7 @@
                 <a:ea typeface="Trebuchet MS" pitchFamily="34" charset="-122"/>
                 <a:cs typeface="Trebuchet MS" pitchFamily="34" charset="-120"/>
               </a:rPr>
-              <a:t>o</a:t>
+              <a:t>re</a:t>
             </a:r>
             <a:endParaRPr lang="en-US" sz="1400" dirty="0"/>
           </a:p>
@@ -20366,8 +20366,8 @@
         </p:nvSpPr>
         <p:spPr>
           <a:xfrm>
-            <a:off x="3959352" y="3364992"/>
-            <a:ext cx="411480" cy="475488"/>
+            <a:off x="4645152" y="3364992"/>
+            <a:ext cx="1097280" cy="475488"/>
           </a:xfrm>
           <a:prstGeom prst="rect">
             <a:avLst/>
@@ -20405,7 +20405,7 @@
         </p:nvSpPr>
         <p:spPr>
           <a:xfrm>
-            <a:off x="4370832" y="3364992"/>
+            <a:off x="5742432" y="3364992"/>
             <a:ext cx="1645920" cy="475488"/>
           </a:xfrm>
           <a:prstGeom prst="rect">
@@ -20432,7 +20432,7 @@
         </p:nvSpPr>
         <p:spPr>
           <a:xfrm>
-            <a:off x="4370832" y="3364992"/>
+            <a:off x="5742432" y="3364992"/>
             <a:ext cx="1645920" cy="475488"/>
           </a:xfrm>
           <a:prstGeom prst="rect">
@@ -20457,7 +20457,7 @@
                 <a:ea typeface="Trebuchet MS" pitchFamily="34" charset="-122"/>
                 <a:cs typeface="Trebuchet MS" pitchFamily="34" charset="-120"/>
               </a:rPr>
-              <a:t>ver</a:t>
+              <a:t>growth</a:t>
             </a:r>
             <a:endParaRPr lang="en-US" sz="1400" dirty="0"/>
           </a:p>
@@ -20465,14 +20465,41 @@
       </p:sp>
       <p:sp>
         <p:nvSpPr>
-          <p:cNvPr id="33" name="Text 31"/>
-          <p:cNvSpPr/>
-          <p:nvPr/>
-        </p:nvSpPr>
-        <p:spPr>
-          <a:xfrm>
-            <a:off x="6016752" y="3364992"/>
-            <a:ext cx="411480" cy="475488"/>
+          <p:cNvPr id="33" name="Shape 31"/>
+          <p:cNvSpPr/>
+          <p:nvPr/>
+        </p:nvSpPr>
+        <p:spPr>
+          <a:xfrm>
+            <a:off x="365760" y="4096512"/>
+            <a:ext cx="1371600" cy="804672"/>
+          </a:xfrm>
+          <a:prstGeom prst="rect">
+            <a:avLst>
+              <a:gd name="adj" fmla="val 6818"/>
+            </a:avLst>
+          </a:prstGeom>
+          <a:solidFill>
+            <a:srgbClr val="E2E8F0"/>
+          </a:solidFill>
+          <a:ln w="12700">
+            <a:solidFill>
+              <a:srgbClr val="E2E8F0"/>
+            </a:solidFill>
+            <a:prstDash val="solid"/>
+          </a:ln>
+        </p:spPr>
+      </p:sp>
+      <p:sp>
+        <p:nvSpPr>
+          <p:cNvPr id="34" name="Text 32"/>
+          <p:cNvSpPr/>
+          <p:nvPr/>
+        </p:nvSpPr>
+        <p:spPr>
+          <a:xfrm>
+            <a:off x="365760" y="4096512"/>
+            <a:ext cx="1371600" cy="804672"/>
           </a:xfrm>
           <a:prstGeom prst="rect">
             <a:avLst/>
@@ -20488,96 +20515,30 @@
               <a:buNone/>
             </a:pPr>
             <a:r>
-              <a:rPr lang="en-US" sz="1600" b="1" dirty="0">
-                <a:solidFill>
-                  <a:srgbClr val="0D9488"/>
+              <a:rPr lang="en-US" sz="1100" b="1" dirty="0">
+                <a:solidFill>
+                  <a:srgbClr val="475569"/>
                 </a:solidFill>
                 <a:latin typeface="Trebuchet MS" pitchFamily="34" charset="0"/>
                 <a:ea typeface="Trebuchet MS" pitchFamily="34" charset="-122"/>
                 <a:cs typeface="Trebuchet MS" pitchFamily="34" charset="-120"/>
               </a:rPr>
-              <a:t>·</a:t>
-            </a:r>
-            <a:endParaRPr lang="en-US" sz="1600" dirty="0"/>
-          </a:p>
-        </p:txBody>
-      </p:sp>
-      <p:sp>
-        <p:nvSpPr>
-          <p:cNvPr id="34" name="Shape 32"/>
-          <p:cNvSpPr/>
-          <p:nvPr/>
-        </p:nvSpPr>
-        <p:spPr>
-          <a:xfrm>
-            <a:off x="6428232" y="3364992"/>
-            <a:ext cx="1645920" cy="475488"/>
-          </a:xfrm>
-          <a:prstGeom prst="rect">
-            <a:avLst>
-              <a:gd name="adj" fmla="val 9615"/>
-            </a:avLst>
-          </a:prstGeom>
-          <a:solidFill>
-            <a:srgbClr val="FFFFFF"/>
-          </a:solidFill>
-          <a:ln w="12700">
-            <a:solidFill>
-              <a:srgbClr val="0D9488"/>
-            </a:solidFill>
-            <a:prstDash val="solid"/>
-          </a:ln>
-        </p:spPr>
-      </p:sp>
-      <p:sp>
-        <p:nvSpPr>
-          <p:cNvPr id="35" name="Text 33"/>
-          <p:cNvSpPr/>
-          <p:nvPr/>
-        </p:nvSpPr>
-        <p:spPr>
-          <a:xfrm>
-            <a:off x="6428232" y="3364992"/>
-            <a:ext cx="1645920" cy="475488"/>
-          </a:xfrm>
-          <a:prstGeom prst="rect">
-            <a:avLst/>
-          </a:prstGeom>
-          <a:noFill/>
-          <a:ln/>
-        </p:spPr>
-        <p:txBody>
-          <a:bodyPr wrap="square" lIns="0" tIns="0" rIns="0" bIns="0" rtlCol="0" anchor="ctr"/>
-          <a:lstStyle/>
-          <a:p>
-            <a:pPr algn="ctr" indent="0" marL="0">
-              <a:buNone/>
-            </a:pPr>
-            <a:r>
-              <a:rPr lang="en-US" sz="1400" b="1" dirty="0">
-                <a:solidFill>
-                  <a:srgbClr val="0D9488"/>
-                </a:solidFill>
-                <a:latin typeface="Trebuchet MS" pitchFamily="34" charset="0"/>
-                <a:ea typeface="Trebuchet MS" pitchFamily="34" charset="-122"/>
-                <a:cs typeface="Trebuchet MS" pitchFamily="34" charset="-120"/>
-              </a:rPr>
-              <a:t>grown</a:t>
-            </a:r>
-            <a:endParaRPr lang="en-US" sz="1400" dirty="0"/>
-          </a:p>
-        </p:txBody>
-      </p:sp>
-      <p:sp>
-        <p:nvSpPr>
-          <p:cNvPr id="36" name="Shape 34"/>
-          <p:cNvSpPr/>
-          <p:nvPr/>
-        </p:nvSpPr>
-        <p:spPr>
-          <a:xfrm>
-            <a:off x="365760" y="4096512"/>
-            <a:ext cx="1371600" cy="804672"/>
+              <a:t>Phonemes</a:t>
+            </a:r>
+            <a:endParaRPr lang="en-US" sz="1100" dirty="0"/>
+          </a:p>
+        </p:txBody>
+      </p:sp>
+      <p:sp>
+        <p:nvSpPr>
+          <p:cNvPr id="35" name="Shape 33"/>
+          <p:cNvSpPr/>
+          <p:nvPr/>
+        </p:nvSpPr>
+        <p:spPr>
+          <a:xfrm>
+            <a:off x="1874520" y="4096512"/>
+            <a:ext cx="6903720" cy="804672"/>
           </a:xfrm>
           <a:prstGeom prst="rect">
             <a:avLst>
@@ -20585,85 +20546,19 @@
             </a:avLst>
           </a:prstGeom>
           <a:solidFill>
-            <a:srgbClr val="E2E8F0"/>
+            <a:srgbClr val="F8FAFC"/>
           </a:solidFill>
           <a:ln w="12700">
             <a:solidFill>
               <a:srgbClr val="E2E8F0"/>
             </a:solidFill>
-            <a:prstDash val="solid"/>
-          </a:ln>
-        </p:spPr>
-      </p:sp>
-      <p:sp>
-        <p:nvSpPr>
-          <p:cNvPr id="37" name="Text 35"/>
-          <p:cNvSpPr/>
-          <p:nvPr/>
-        </p:nvSpPr>
-        <p:spPr>
-          <a:xfrm>
-            <a:off x="365760" y="4096512"/>
-            <a:ext cx="1371600" cy="804672"/>
-          </a:xfrm>
-          <a:prstGeom prst="rect">
-            <a:avLst/>
-          </a:prstGeom>
-          <a:noFill/>
-          <a:ln/>
-        </p:spPr>
-        <p:txBody>
-          <a:bodyPr wrap="square" lIns="0" tIns="0" rIns="0" bIns="0" rtlCol="0" anchor="ctr"/>
-          <a:lstStyle/>
-          <a:p>
-            <a:pPr algn="ctr" indent="0" marL="0">
-              <a:buNone/>
-            </a:pPr>
-            <a:r>
-              <a:rPr lang="en-US" sz="1100" b="1" dirty="0">
-                <a:solidFill>
-                  <a:srgbClr val="475569"/>
-                </a:solidFill>
-                <a:latin typeface="Trebuchet MS" pitchFamily="34" charset="0"/>
-                <a:ea typeface="Trebuchet MS" pitchFamily="34" charset="-122"/>
-                <a:cs typeface="Trebuchet MS" pitchFamily="34" charset="-120"/>
-              </a:rPr>
-              <a:t>Phonemes</a:t>
-            </a:r>
-            <a:endParaRPr lang="en-US" sz="1100" dirty="0"/>
-          </a:p>
-        </p:txBody>
-      </p:sp>
-      <p:sp>
-        <p:nvSpPr>
-          <p:cNvPr id="38" name="Shape 36"/>
-          <p:cNvSpPr/>
-          <p:nvPr/>
-        </p:nvSpPr>
-        <p:spPr>
-          <a:xfrm>
-            <a:off x="1874520" y="4096512"/>
-            <a:ext cx="6903720" cy="804672"/>
-          </a:xfrm>
-          <a:prstGeom prst="rect">
-            <a:avLst>
-              <a:gd name="adj" fmla="val 6818"/>
-            </a:avLst>
-          </a:prstGeom>
-          <a:solidFill>
-            <a:srgbClr val="F8FAFC"/>
-          </a:solidFill>
-          <a:ln w="12700">
-            <a:solidFill>
-              <a:srgbClr val="E2E8F0"/>
-            </a:solidFill>
             <a:prstDash val="dash"/>
           </a:ln>
         </p:spPr>
       </p:sp>
       <p:sp>
         <p:nvSpPr>
-          <p:cNvPr id="39" name="Text 37"/>
+          <p:cNvPr id="36" name="Text 34"/>
           <p:cNvSpPr/>
           <p:nvPr/>
         </p:nvSpPr>
@@ -21125,7 +21020,7 @@
                 <a:ea typeface="Trebuchet MS" pitchFamily="34" charset="-122"/>
                 <a:cs typeface="Trebuchet MS" pitchFamily="34" charset="-120"/>
               </a:rPr>
-              <a:t>overgrown</a:t>
+              <a:t>regrowth</a:t>
             </a:r>
             <a:endParaRPr lang="en-US" sz="2800" dirty="0"/>
           </a:p>
@@ -21264,7 +21159,7 @@
                 <a:ea typeface="Trebuchet MS" pitchFamily="34" charset="-122"/>
                 <a:cs typeface="Trebuchet MS" pitchFamily="34" charset="-120"/>
               </a:rPr>
-              <a:t>over</a:t>
+              <a:t>re</a:t>
             </a:r>
             <a:endParaRPr lang="en-US" sz="1300" dirty="0"/>
           </a:p>
@@ -21303,7 +21198,7 @@
                 <a:ea typeface="Calibri" pitchFamily="34" charset="-122"/>
                 <a:cs typeface="Calibri" pitchFamily="34" charset="-120"/>
               </a:rPr>
-              <a:t>too much or above</a:t>
+              <a:t>again</a:t>
             </a:r>
             <a:endParaRPr lang="en-US" sz="850" dirty="0"/>
           </a:p>
@@ -21488,7 +21383,7 @@
                 <a:ea typeface="Trebuchet MS" pitchFamily="34" charset="-122"/>
                 <a:cs typeface="Trebuchet MS" pitchFamily="34" charset="-120"/>
               </a:rPr>
-              <a:t>n</a:t>
+              <a:t>th</a:t>
             </a:r>
             <a:endParaRPr lang="en-US" sz="1300" dirty="0"/>
           </a:p>
@@ -21527,7 +21422,7 @@
                 <a:ea typeface="Calibri" pitchFamily="34" charset="-122"/>
                 <a:cs typeface="Calibri" pitchFamily="34" charset="-120"/>
               </a:rPr>
-              <a:t>past participle ending</a:t>
+              <a:t>state or process of</a:t>
             </a:r>
             <a:endParaRPr lang="en-US" sz="850" dirty="0"/>
           </a:p>
@@ -21634,7 +21529,7 @@
         </p:nvSpPr>
         <p:spPr>
           <a:xfrm>
-            <a:off x="2313432" y="3364992"/>
+            <a:off x="2999232" y="3364992"/>
             <a:ext cx="1645920" cy="475488"/>
           </a:xfrm>
           <a:prstGeom prst="rect">
@@ -21661,7 +21556,7 @@
         </p:nvSpPr>
         <p:spPr>
           <a:xfrm>
-            <a:off x="2313432" y="3364992"/>
+            <a:off x="2999232" y="3364992"/>
             <a:ext cx="1645920" cy="475488"/>
           </a:xfrm>
           <a:prstGeom prst="rect">
@@ -21686,7 +21581,7 @@
                 <a:ea typeface="Trebuchet MS" pitchFamily="34" charset="-122"/>
                 <a:cs typeface="Trebuchet MS" pitchFamily="34" charset="-120"/>
               </a:rPr>
-              <a:t>o</a:t>
+              <a:t>re</a:t>
             </a:r>
             <a:endParaRPr lang="en-US" sz="1400" dirty="0"/>
           </a:p>
@@ -21700,8 +21595,8 @@
         </p:nvSpPr>
         <p:spPr>
           <a:xfrm>
-            <a:off x="3959352" y="3364992"/>
-            <a:ext cx="411480" cy="475488"/>
+            <a:off x="4645152" y="3364992"/>
+            <a:ext cx="1097280" cy="475488"/>
           </a:xfrm>
           <a:prstGeom prst="rect">
             <a:avLst/>
@@ -21739,7 +21634,7 @@
         </p:nvSpPr>
         <p:spPr>
           <a:xfrm>
-            <a:off x="4370832" y="3364992"/>
+            <a:off x="5742432" y="3364992"/>
             <a:ext cx="1645920" cy="475488"/>
           </a:xfrm>
           <a:prstGeom prst="rect">
@@ -21766,7 +21661,7 @@
         </p:nvSpPr>
         <p:spPr>
           <a:xfrm>
-            <a:off x="4370832" y="3364992"/>
+            <a:off x="5742432" y="3364992"/>
             <a:ext cx="1645920" cy="475488"/>
           </a:xfrm>
           <a:prstGeom prst="rect">
@@ -21791,7 +21686,7 @@
                 <a:ea typeface="Trebuchet MS" pitchFamily="34" charset="-122"/>
                 <a:cs typeface="Trebuchet MS" pitchFamily="34" charset="-120"/>
               </a:rPr>
-              <a:t>ver</a:t>
+              <a:t>growth</a:t>
             </a:r>
             <a:endParaRPr lang="en-US" sz="1400" dirty="0"/>
           </a:p>
@@ -21799,14 +21694,41 @@
       </p:sp>
       <p:sp>
         <p:nvSpPr>
-          <p:cNvPr id="33" name="Text 31"/>
-          <p:cNvSpPr/>
-          <p:nvPr/>
-        </p:nvSpPr>
-        <p:spPr>
-          <a:xfrm>
-            <a:off x="6016752" y="3364992"/>
-            <a:ext cx="411480" cy="475488"/>
+          <p:cNvPr id="33" name="Shape 31"/>
+          <p:cNvSpPr/>
+          <p:nvPr/>
+        </p:nvSpPr>
+        <p:spPr>
+          <a:xfrm>
+            <a:off x="365760" y="4096512"/>
+            <a:ext cx="1371600" cy="804672"/>
+          </a:xfrm>
+          <a:prstGeom prst="rect">
+            <a:avLst>
+              <a:gd name="adj" fmla="val 6818"/>
+            </a:avLst>
+          </a:prstGeom>
+          <a:solidFill>
+            <a:srgbClr val="E2E8F0"/>
+          </a:solidFill>
+          <a:ln w="12700">
+            <a:solidFill>
+              <a:srgbClr val="E2E8F0"/>
+            </a:solidFill>
+            <a:prstDash val="solid"/>
+          </a:ln>
+        </p:spPr>
+      </p:sp>
+      <p:sp>
+        <p:nvSpPr>
+          <p:cNvPr id="34" name="Text 32"/>
+          <p:cNvSpPr/>
+          <p:nvPr/>
+        </p:nvSpPr>
+        <p:spPr>
+          <a:xfrm>
+            <a:off x="365760" y="4096512"/>
+            <a:ext cx="1371600" cy="804672"/>
           </a:xfrm>
           <a:prstGeom prst="rect">
             <a:avLst/>
@@ -21822,57 +21744,84 @@
               <a:buNone/>
             </a:pPr>
             <a:r>
-              <a:rPr lang="en-US" sz="1600" b="1" dirty="0">
-                <a:solidFill>
-                  <a:srgbClr val="0D9488"/>
+              <a:rPr lang="en-US" sz="1100" b="1" dirty="0">
+                <a:solidFill>
+                  <a:srgbClr val="475569"/>
                 </a:solidFill>
                 <a:latin typeface="Trebuchet MS" pitchFamily="34" charset="0"/>
                 <a:ea typeface="Trebuchet MS" pitchFamily="34" charset="-122"/>
                 <a:cs typeface="Trebuchet MS" pitchFamily="34" charset="-120"/>
               </a:rPr>
-              <a:t>·</a:t>
-            </a:r>
-            <a:endParaRPr lang="en-US" sz="1600" dirty="0"/>
-          </a:p>
-        </p:txBody>
-      </p:sp>
-      <p:sp>
-        <p:nvSpPr>
-          <p:cNvPr id="34" name="Shape 32"/>
-          <p:cNvSpPr/>
-          <p:nvPr/>
-        </p:nvSpPr>
-        <p:spPr>
-          <a:xfrm>
-            <a:off x="6428232" y="3364992"/>
-            <a:ext cx="1645920" cy="475488"/>
+              <a:t>Phonemes</a:t>
+            </a:r>
+            <a:endParaRPr lang="en-US" sz="1100" dirty="0"/>
+          </a:p>
+        </p:txBody>
+      </p:sp>
+      <p:sp>
+        <p:nvSpPr>
+          <p:cNvPr id="35" name="Shape 33"/>
+          <p:cNvSpPr/>
+          <p:nvPr/>
+        </p:nvSpPr>
+        <p:spPr>
+          <a:xfrm>
+            <a:off x="1874520" y="4096512"/>
+            <a:ext cx="6903720" cy="658368"/>
           </a:xfrm>
           <a:prstGeom prst="rect">
             <a:avLst>
-              <a:gd name="adj" fmla="val 9615"/>
+              <a:gd name="adj" fmla="val 8333"/>
             </a:avLst>
           </a:prstGeom>
           <a:solidFill>
+            <a:srgbClr val="FCE7F3"/>
+          </a:solidFill>
+          <a:ln w="12700">
+            <a:solidFill>
+              <a:srgbClr val="DB2777"/>
+            </a:solidFill>
+            <a:prstDash val="solid"/>
+          </a:ln>
+        </p:spPr>
+      </p:sp>
+      <p:sp>
+        <p:nvSpPr>
+          <p:cNvPr id="36" name="Shape 34"/>
+          <p:cNvSpPr/>
+          <p:nvPr/>
+        </p:nvSpPr>
+        <p:spPr>
+          <a:xfrm>
+            <a:off x="2427732" y="4169664"/>
+            <a:ext cx="685800" cy="475488"/>
+          </a:xfrm>
+          <a:prstGeom prst="rect">
+            <a:avLst>
+              <a:gd name="adj" fmla="val 7692"/>
+            </a:avLst>
+          </a:prstGeom>
+          <a:solidFill>
             <a:srgbClr val="FFFFFF"/>
           </a:solidFill>
           <a:ln w="12700">
             <a:solidFill>
-              <a:srgbClr val="0D9488"/>
-            </a:solidFill>
-            <a:prstDash val="solid"/>
-          </a:ln>
-        </p:spPr>
-      </p:sp>
-      <p:sp>
-        <p:nvSpPr>
-          <p:cNvPr id="35" name="Text 33"/>
-          <p:cNvSpPr/>
-          <p:nvPr/>
-        </p:nvSpPr>
-        <p:spPr>
-          <a:xfrm>
-            <a:off x="6428232" y="3364992"/>
-            <a:ext cx="1645920" cy="475488"/>
+              <a:srgbClr val="DB2777"/>
+            </a:solidFill>
+            <a:prstDash val="solid"/>
+          </a:ln>
+        </p:spPr>
+      </p:sp>
+      <p:sp>
+        <p:nvSpPr>
+          <p:cNvPr id="37" name="Text 35"/>
+          <p:cNvSpPr/>
+          <p:nvPr/>
+        </p:nvSpPr>
+        <p:spPr>
+          <a:xfrm>
+            <a:off x="2427732" y="4169664"/>
+            <a:ext cx="685800" cy="475488"/>
           </a:xfrm>
           <a:prstGeom prst="rect">
             <a:avLst/>
@@ -21888,57 +21837,57 @@
               <a:buNone/>
             </a:pPr>
             <a:r>
-              <a:rPr lang="en-US" sz="1400" b="1" dirty="0">
-                <a:solidFill>
-                  <a:srgbClr val="0D9488"/>
+              <a:rPr lang="en-US" sz="900" b="1" dirty="0">
+                <a:solidFill>
+                  <a:srgbClr val="9D174D"/>
                 </a:solidFill>
                 <a:latin typeface="Trebuchet MS" pitchFamily="34" charset="0"/>
                 <a:ea typeface="Trebuchet MS" pitchFamily="34" charset="-122"/>
                 <a:cs typeface="Trebuchet MS" pitchFamily="34" charset="-120"/>
               </a:rPr>
-              <a:t>grown</a:t>
-            </a:r>
-            <a:endParaRPr lang="en-US" sz="1400" dirty="0"/>
-          </a:p>
-        </p:txBody>
-      </p:sp>
-      <p:sp>
-        <p:nvSpPr>
-          <p:cNvPr id="36" name="Shape 34"/>
-          <p:cNvSpPr/>
-          <p:nvPr/>
-        </p:nvSpPr>
-        <p:spPr>
-          <a:xfrm>
-            <a:off x="365760" y="4096512"/>
-            <a:ext cx="1371600" cy="804672"/>
+              <a:t>r</a:t>
+            </a:r>
+            <a:endParaRPr lang="en-US" sz="900" dirty="0"/>
+          </a:p>
+        </p:txBody>
+      </p:sp>
+      <p:sp>
+        <p:nvSpPr>
+          <p:cNvPr id="38" name="Shape 36"/>
+          <p:cNvSpPr/>
+          <p:nvPr/>
+        </p:nvSpPr>
+        <p:spPr>
+          <a:xfrm>
+            <a:off x="3639312" y="4169664"/>
+            <a:ext cx="685800" cy="475488"/>
           </a:xfrm>
           <a:prstGeom prst="rect">
             <a:avLst>
-              <a:gd name="adj" fmla="val 6818"/>
+              <a:gd name="adj" fmla="val 7692"/>
             </a:avLst>
           </a:prstGeom>
           <a:solidFill>
-            <a:srgbClr val="E2E8F0"/>
-          </a:solidFill>
-          <a:ln w="12700">
-            <a:solidFill>
-              <a:srgbClr val="E2E8F0"/>
-            </a:solidFill>
-            <a:prstDash val="solid"/>
-          </a:ln>
-        </p:spPr>
-      </p:sp>
-      <p:sp>
-        <p:nvSpPr>
-          <p:cNvPr id="37" name="Text 35"/>
-          <p:cNvSpPr/>
-          <p:nvPr/>
-        </p:nvSpPr>
-        <p:spPr>
-          <a:xfrm>
-            <a:off x="365760" y="4096512"/>
-            <a:ext cx="1371600" cy="804672"/>
+            <a:srgbClr val="FFFFFF"/>
+          </a:solidFill>
+          <a:ln w="12700">
+            <a:solidFill>
+              <a:srgbClr val="DB2777"/>
+            </a:solidFill>
+            <a:prstDash val="solid"/>
+          </a:ln>
+        </p:spPr>
+      </p:sp>
+      <p:sp>
+        <p:nvSpPr>
+          <p:cNvPr id="39" name="Text 37"/>
+          <p:cNvSpPr/>
+          <p:nvPr/>
+        </p:nvSpPr>
+        <p:spPr>
+          <a:xfrm>
+            <a:off x="3639312" y="4169664"/>
+            <a:ext cx="685800" cy="475488"/>
           </a:xfrm>
           <a:prstGeom prst="rect">
             <a:avLst/>
@@ -21954,56 +21903,29 @@
               <a:buNone/>
             </a:pPr>
             <a:r>
-              <a:rPr lang="en-US" sz="1100" b="1" dirty="0">
-                <a:solidFill>
-                  <a:srgbClr val="475569"/>
+              <a:rPr lang="en-US" sz="900" b="1" dirty="0">
+                <a:solidFill>
+                  <a:srgbClr val="9D174D"/>
                 </a:solidFill>
                 <a:latin typeface="Trebuchet MS" pitchFamily="34" charset="0"/>
                 <a:ea typeface="Trebuchet MS" pitchFamily="34" charset="-122"/>
                 <a:cs typeface="Trebuchet MS" pitchFamily="34" charset="-120"/>
               </a:rPr>
-              <a:t>Phonemes</a:t>
-            </a:r>
-            <a:endParaRPr lang="en-US" sz="1100" dirty="0"/>
-          </a:p>
-        </p:txBody>
-      </p:sp>
-      <p:sp>
-        <p:nvSpPr>
-          <p:cNvPr id="38" name="Shape 36"/>
-          <p:cNvSpPr/>
-          <p:nvPr/>
-        </p:nvSpPr>
-        <p:spPr>
-          <a:xfrm>
-            <a:off x="1874520" y="4096512"/>
-            <a:ext cx="6903720" cy="658368"/>
-          </a:xfrm>
-          <a:prstGeom prst="rect">
-            <a:avLst>
-              <a:gd name="adj" fmla="val 8333"/>
-            </a:avLst>
-          </a:prstGeom>
-          <a:solidFill>
-            <a:srgbClr val="FCE7F3"/>
-          </a:solidFill>
-          <a:ln w="12700">
-            <a:solidFill>
-              <a:srgbClr val="DB2777"/>
-            </a:solidFill>
-            <a:prstDash val="solid"/>
-          </a:ln>
-        </p:spPr>
-      </p:sp>
-      <p:sp>
-        <p:nvSpPr>
-          <p:cNvPr id="39" name="Shape 37"/>
-          <p:cNvSpPr/>
-          <p:nvPr/>
-        </p:nvSpPr>
-        <p:spPr>
-          <a:xfrm>
-            <a:off x="2254649" y="4169664"/>
+              <a:t>e</a:t>
+            </a:r>
+            <a:endParaRPr lang="en-US" sz="900" dirty="0"/>
+          </a:p>
+        </p:txBody>
+      </p:sp>
+      <p:sp>
+        <p:nvSpPr>
+          <p:cNvPr id="40" name="Shape 38"/>
+          <p:cNvSpPr/>
+          <p:nvPr/>
+        </p:nvSpPr>
+        <p:spPr>
+          <a:xfrm>
+            <a:off x="4850892" y="4169664"/>
             <a:ext cx="685800" cy="475488"/>
           </a:xfrm>
           <a:prstGeom prst="rect">
@@ -22024,13 +21946,13 @@
       </p:sp>
       <p:sp>
         <p:nvSpPr>
-          <p:cNvPr id="40" name="Text 38"/>
-          <p:cNvSpPr/>
-          <p:nvPr/>
-        </p:nvSpPr>
-        <p:spPr>
-          <a:xfrm>
-            <a:off x="2254649" y="4169664"/>
+          <p:cNvPr id="41" name="Text 39"/>
+          <p:cNvSpPr/>
+          <p:nvPr/>
+        </p:nvSpPr>
+        <p:spPr>
+          <a:xfrm>
+            <a:off x="4850892" y="4169664"/>
             <a:ext cx="685800" cy="475488"/>
           </a:xfrm>
           <a:prstGeom prst="rect">
@@ -22055,7 +21977,7 @@
                 <a:ea typeface="Trebuchet MS" pitchFamily="34" charset="-122"/>
                 <a:cs typeface="Trebuchet MS" pitchFamily="34" charset="-120"/>
               </a:rPr>
-              <a:t>o</a:t>
+              <a:t>gr</a:t>
             </a:r>
             <a:endParaRPr lang="en-US" sz="900" dirty="0"/>
           </a:p>
@@ -22063,13 +21985,13 @@
       </p:sp>
       <p:sp>
         <p:nvSpPr>
-          <p:cNvPr id="41" name="Shape 39"/>
-          <p:cNvSpPr/>
-          <p:nvPr/>
-        </p:nvSpPr>
-        <p:spPr>
-          <a:xfrm>
-            <a:off x="3293146" y="4169664"/>
+          <p:cNvPr id="42" name="Shape 40"/>
+          <p:cNvSpPr/>
+          <p:nvPr/>
+        </p:nvSpPr>
+        <p:spPr>
+          <a:xfrm>
+            <a:off x="6062472" y="4169664"/>
             <a:ext cx="685800" cy="475488"/>
           </a:xfrm>
           <a:prstGeom prst="rect">
@@ -22090,13 +22012,13 @@
       </p:sp>
       <p:sp>
         <p:nvSpPr>
-          <p:cNvPr id="42" name="Text 40"/>
-          <p:cNvSpPr/>
-          <p:nvPr/>
-        </p:nvSpPr>
-        <p:spPr>
-          <a:xfrm>
-            <a:off x="3293146" y="4169664"/>
+          <p:cNvPr id="43" name="Text 41"/>
+          <p:cNvSpPr/>
+          <p:nvPr/>
+        </p:nvSpPr>
+        <p:spPr>
+          <a:xfrm>
+            <a:off x="6062472" y="4169664"/>
             <a:ext cx="685800" cy="475488"/>
           </a:xfrm>
           <a:prstGeom prst="rect">
@@ -22121,7 +22043,7 @@
                 <a:ea typeface="Trebuchet MS" pitchFamily="34" charset="-122"/>
                 <a:cs typeface="Trebuchet MS" pitchFamily="34" charset="-120"/>
               </a:rPr>
-              <a:t>v</a:t>
+              <a:t>ow</a:t>
             </a:r>
             <a:endParaRPr lang="en-US" sz="900" dirty="0"/>
           </a:p>
@@ -22129,13 +22051,13 @@
       </p:sp>
       <p:sp>
         <p:nvSpPr>
-          <p:cNvPr id="43" name="Shape 41"/>
-          <p:cNvSpPr/>
-          <p:nvPr/>
-        </p:nvSpPr>
-        <p:spPr>
-          <a:xfrm>
-            <a:off x="4331643" y="4169664"/>
+          <p:cNvPr id="44" name="Shape 42"/>
+          <p:cNvSpPr/>
+          <p:nvPr/>
+        </p:nvSpPr>
+        <p:spPr>
+          <a:xfrm>
+            <a:off x="7274052" y="4169664"/>
             <a:ext cx="685800" cy="475488"/>
           </a:xfrm>
           <a:prstGeom prst="rect">
@@ -22156,13 +22078,13 @@
       </p:sp>
       <p:sp>
         <p:nvSpPr>
-          <p:cNvPr id="44" name="Text 42"/>
-          <p:cNvSpPr/>
-          <p:nvPr/>
-        </p:nvSpPr>
-        <p:spPr>
-          <a:xfrm>
-            <a:off x="4331643" y="4169664"/>
+          <p:cNvPr id="45" name="Text 43"/>
+          <p:cNvSpPr/>
+          <p:nvPr/>
+        </p:nvSpPr>
+        <p:spPr>
+          <a:xfrm>
+            <a:off x="7274052" y="4169664"/>
             <a:ext cx="685800" cy="475488"/>
           </a:xfrm>
           <a:prstGeom prst="rect">
@@ -22187,205 +22109,7 @@
                 <a:ea typeface="Trebuchet MS" pitchFamily="34" charset="-122"/>
                 <a:cs typeface="Trebuchet MS" pitchFamily="34" charset="-120"/>
               </a:rPr>
-              <a:t>er</a:t>
-            </a:r>
-            <a:endParaRPr lang="en-US" sz="900" dirty="0"/>
-          </a:p>
-        </p:txBody>
-      </p:sp>
-      <p:sp>
-        <p:nvSpPr>
-          <p:cNvPr id="45" name="Shape 43"/>
-          <p:cNvSpPr/>
-          <p:nvPr/>
-        </p:nvSpPr>
-        <p:spPr>
-          <a:xfrm>
-            <a:off x="5370141" y="4169664"/>
-            <a:ext cx="685800" cy="475488"/>
-          </a:xfrm>
-          <a:prstGeom prst="rect">
-            <a:avLst>
-              <a:gd name="adj" fmla="val 7692"/>
-            </a:avLst>
-          </a:prstGeom>
-          <a:solidFill>
-            <a:srgbClr val="FFFFFF"/>
-          </a:solidFill>
-          <a:ln w="12700">
-            <a:solidFill>
-              <a:srgbClr val="DB2777"/>
-            </a:solidFill>
-            <a:prstDash val="solid"/>
-          </a:ln>
-        </p:spPr>
-      </p:sp>
-      <p:sp>
-        <p:nvSpPr>
-          <p:cNvPr id="46" name="Text 44"/>
-          <p:cNvSpPr/>
-          <p:nvPr/>
-        </p:nvSpPr>
-        <p:spPr>
-          <a:xfrm>
-            <a:off x="5370141" y="4169664"/>
-            <a:ext cx="685800" cy="475488"/>
-          </a:xfrm>
-          <a:prstGeom prst="rect">
-            <a:avLst/>
-          </a:prstGeom>
-          <a:noFill/>
-          <a:ln/>
-        </p:spPr>
-        <p:txBody>
-          <a:bodyPr wrap="square" lIns="0" tIns="0" rIns="0" bIns="0" rtlCol="0" anchor="ctr"/>
-          <a:lstStyle/>
-          <a:p>
-            <a:pPr algn="ctr" indent="0" marL="0">
-              <a:buNone/>
-            </a:pPr>
-            <a:r>
-              <a:rPr lang="en-US" sz="900" b="1" dirty="0">
-                <a:solidFill>
-                  <a:srgbClr val="9D174D"/>
-                </a:solidFill>
-                <a:latin typeface="Trebuchet MS" pitchFamily="34" charset="0"/>
-                <a:ea typeface="Trebuchet MS" pitchFamily="34" charset="-122"/>
-                <a:cs typeface="Trebuchet MS" pitchFamily="34" charset="-120"/>
-              </a:rPr>
-              <a:t>gr</a:t>
-            </a:r>
-            <a:endParaRPr lang="en-US" sz="900" dirty="0"/>
-          </a:p>
-        </p:txBody>
-      </p:sp>
-      <p:sp>
-        <p:nvSpPr>
-          <p:cNvPr id="47" name="Shape 45"/>
-          <p:cNvSpPr/>
-          <p:nvPr/>
-        </p:nvSpPr>
-        <p:spPr>
-          <a:xfrm>
-            <a:off x="6408638" y="4169664"/>
-            <a:ext cx="685800" cy="475488"/>
-          </a:xfrm>
-          <a:prstGeom prst="rect">
-            <a:avLst>
-              <a:gd name="adj" fmla="val 7692"/>
-            </a:avLst>
-          </a:prstGeom>
-          <a:solidFill>
-            <a:srgbClr val="FFFFFF"/>
-          </a:solidFill>
-          <a:ln w="12700">
-            <a:solidFill>
-              <a:srgbClr val="DB2777"/>
-            </a:solidFill>
-            <a:prstDash val="solid"/>
-          </a:ln>
-        </p:spPr>
-      </p:sp>
-      <p:sp>
-        <p:nvSpPr>
-          <p:cNvPr id="48" name="Text 46"/>
-          <p:cNvSpPr/>
-          <p:nvPr/>
-        </p:nvSpPr>
-        <p:spPr>
-          <a:xfrm>
-            <a:off x="6408638" y="4169664"/>
-            <a:ext cx="685800" cy="475488"/>
-          </a:xfrm>
-          <a:prstGeom prst="rect">
-            <a:avLst/>
-          </a:prstGeom>
-          <a:noFill/>
-          <a:ln/>
-        </p:spPr>
-        <p:txBody>
-          <a:bodyPr wrap="square" lIns="0" tIns="0" rIns="0" bIns="0" rtlCol="0" anchor="ctr"/>
-          <a:lstStyle/>
-          <a:p>
-            <a:pPr algn="ctr" indent="0" marL="0">
-              <a:buNone/>
-            </a:pPr>
-            <a:r>
-              <a:rPr lang="en-US" sz="900" b="1" dirty="0">
-                <a:solidFill>
-                  <a:srgbClr val="9D174D"/>
-                </a:solidFill>
-                <a:latin typeface="Trebuchet MS" pitchFamily="34" charset="0"/>
-                <a:ea typeface="Trebuchet MS" pitchFamily="34" charset="-122"/>
-                <a:cs typeface="Trebuchet MS" pitchFamily="34" charset="-120"/>
-              </a:rPr>
-              <a:t>ow</a:t>
-            </a:r>
-            <a:endParaRPr lang="en-US" sz="900" dirty="0"/>
-          </a:p>
-        </p:txBody>
-      </p:sp>
-      <p:sp>
-        <p:nvSpPr>
-          <p:cNvPr id="49" name="Shape 47"/>
-          <p:cNvSpPr/>
-          <p:nvPr/>
-        </p:nvSpPr>
-        <p:spPr>
-          <a:xfrm>
-            <a:off x="7447135" y="4169664"/>
-            <a:ext cx="685800" cy="475488"/>
-          </a:xfrm>
-          <a:prstGeom prst="rect">
-            <a:avLst>
-              <a:gd name="adj" fmla="val 7692"/>
-            </a:avLst>
-          </a:prstGeom>
-          <a:solidFill>
-            <a:srgbClr val="FFFFFF"/>
-          </a:solidFill>
-          <a:ln w="12700">
-            <a:solidFill>
-              <a:srgbClr val="DB2777"/>
-            </a:solidFill>
-            <a:prstDash val="solid"/>
-          </a:ln>
-        </p:spPr>
-      </p:sp>
-      <p:sp>
-        <p:nvSpPr>
-          <p:cNvPr id="50" name="Text 48"/>
-          <p:cNvSpPr/>
-          <p:nvPr/>
-        </p:nvSpPr>
-        <p:spPr>
-          <a:xfrm>
-            <a:off x="7447135" y="4169664"/>
-            <a:ext cx="685800" cy="475488"/>
-          </a:xfrm>
-          <a:prstGeom prst="rect">
-            <a:avLst/>
-          </a:prstGeom>
-          <a:noFill/>
-          <a:ln/>
-        </p:spPr>
-        <p:txBody>
-          <a:bodyPr wrap="square" lIns="0" tIns="0" rIns="0" bIns="0" rtlCol="0" anchor="ctr"/>
-          <a:lstStyle/>
-          <a:p>
-            <a:pPr algn="ctr" indent="0" marL="0">
-              <a:buNone/>
-            </a:pPr>
-            <a:r>
-              <a:rPr lang="en-US" sz="900" b="1" dirty="0">
-                <a:solidFill>
-                  <a:srgbClr val="9D174D"/>
-                </a:solidFill>
-                <a:latin typeface="Trebuchet MS" pitchFamily="34" charset="0"/>
-                <a:ea typeface="Trebuchet MS" pitchFamily="34" charset="-122"/>
-                <a:cs typeface="Trebuchet MS" pitchFamily="34" charset="-120"/>
-              </a:rPr>
-              <a:t>n</a:t>
+              <a:t>th</a:t>
             </a:r>
             <a:endParaRPr lang="en-US" sz="900" dirty="0"/>
           </a:p>
@@ -22816,7 +22540,7 @@
                 <a:ea typeface="Trebuchet MS" pitchFamily="34" charset="-122"/>
                 <a:cs typeface="Trebuchet MS" pitchFamily="34" charset="-120"/>
               </a:rPr>
-              <a:t>growing</a:t>
+              <a:t>overgrown</a:t>
             </a:r>
             <a:endParaRPr lang="en-US" sz="2800" dirty="0"/>
           </a:p>
@@ -23643,7 +23367,7 @@
                 <a:ea typeface="Trebuchet MS" pitchFamily="34" charset="-122"/>
                 <a:cs typeface="Trebuchet MS" pitchFamily="34" charset="-120"/>
               </a:rPr>
-              <a:t>growing</a:t>
+              <a:t>overgrown</a:t>
             </a:r>
             <a:endParaRPr lang="en-US" sz="2800" dirty="0"/>
           </a:p>
@@ -23723,7 +23447,7 @@
         </p:nvSpPr>
         <p:spPr>
           <a:xfrm>
-            <a:off x="2938272" y="2258568"/>
+            <a:off x="2221992" y="2258568"/>
             <a:ext cx="1828800" cy="292608"/>
           </a:xfrm>
           <a:prstGeom prst="rect">
@@ -23732,11 +23456,11 @@
             </a:avLst>
           </a:prstGeom>
           <a:solidFill>
-            <a:srgbClr val="CCFBF1"/>
+            <a:srgbClr val="DDD6FE"/>
           </a:solidFill>
           <a:ln w="19050">
             <a:solidFill>
-              <a:srgbClr val="0D9488"/>
+              <a:srgbClr val="7C3AED"/>
             </a:solidFill>
             <a:prstDash val="solid"/>
           </a:ln>
@@ -23757,7 +23481,7 @@
         </p:nvSpPr>
         <p:spPr>
           <a:xfrm>
-            <a:off x="2938272" y="2258568"/>
+            <a:off x="2221992" y="2258568"/>
             <a:ext cx="1828800" cy="292608"/>
           </a:xfrm>
           <a:prstGeom prst="rect">
@@ -23776,13 +23500,13 @@
             <a:r>
               <a:rPr lang="en-US" sz="1300" b="1" dirty="0">
                 <a:solidFill>
-                  <a:srgbClr val="0F766E"/>
+                  <a:srgbClr val="4C1D95"/>
                 </a:solidFill>
                 <a:latin typeface="Trebuchet MS" pitchFamily="34" charset="0"/>
                 <a:ea typeface="Trebuchet MS" pitchFamily="34" charset="-122"/>
                 <a:cs typeface="Trebuchet MS" pitchFamily="34" charset="-120"/>
               </a:rPr>
-              <a:t>grow</a:t>
+              <a:t>over</a:t>
             </a:r>
             <a:endParaRPr lang="en-US" sz="1300" dirty="0"/>
           </a:p>
@@ -23796,7 +23520,7 @@
         </p:nvSpPr>
         <p:spPr>
           <a:xfrm>
-            <a:off x="2938272" y="2569464"/>
+            <a:off x="2221992" y="2569464"/>
             <a:ext cx="1828800" cy="201168"/>
           </a:xfrm>
           <a:prstGeom prst="rect">
@@ -23821,7 +23545,7 @@
                 <a:ea typeface="Calibri" pitchFamily="34" charset="-122"/>
                 <a:cs typeface="Calibri" pitchFamily="34" charset="-120"/>
               </a:rPr>
-              <a:t>to increase in size</a:t>
+              <a:t>too much or above</a:t>
             </a:r>
             <a:endParaRPr lang="en-US" sz="850" dirty="0"/>
           </a:p>
@@ -23835,7 +23559,7 @@
         </p:nvSpPr>
         <p:spPr>
           <a:xfrm>
-            <a:off x="5803392" y="2258568"/>
+            <a:off x="4370832" y="2258568"/>
             <a:ext cx="1828800" cy="292608"/>
           </a:xfrm>
           <a:prstGeom prst="rect">
@@ -23844,11 +23568,11 @@
             </a:avLst>
           </a:prstGeom>
           <a:solidFill>
-            <a:srgbClr val="FCE7F3"/>
+            <a:srgbClr val="CCFBF1"/>
           </a:solidFill>
           <a:ln w="19050">
             <a:solidFill>
-              <a:srgbClr val="DB2777"/>
+              <a:srgbClr val="0D9488"/>
             </a:solidFill>
             <a:prstDash val="solid"/>
           </a:ln>
@@ -23869,7 +23593,7 @@
         </p:nvSpPr>
         <p:spPr>
           <a:xfrm>
-            <a:off x="5803392" y="2258568"/>
+            <a:off x="4370832" y="2258568"/>
             <a:ext cx="1828800" cy="292608"/>
           </a:xfrm>
           <a:prstGeom prst="rect">
@@ -23888,13 +23612,13 @@
             <a:r>
               <a:rPr lang="en-US" sz="1300" b="1" dirty="0">
                 <a:solidFill>
-                  <a:srgbClr val="9D174D"/>
+                  <a:srgbClr val="0F766E"/>
                 </a:solidFill>
                 <a:latin typeface="Trebuchet MS" pitchFamily="34" charset="0"/>
                 <a:ea typeface="Trebuchet MS" pitchFamily="34" charset="-122"/>
                 <a:cs typeface="Trebuchet MS" pitchFamily="34" charset="-120"/>
               </a:rPr>
-              <a:t>ing</a:t>
+              <a:t>grow</a:t>
             </a:r>
             <a:endParaRPr lang="en-US" sz="1300" dirty="0"/>
           </a:p>
@@ -23908,7 +23632,7 @@
         </p:nvSpPr>
         <p:spPr>
           <a:xfrm>
-            <a:off x="5803392" y="2569464"/>
+            <a:off x="4370832" y="2569464"/>
             <a:ext cx="1828800" cy="201168"/>
           </a:xfrm>
           <a:prstGeom prst="rect">
@@ -23933,7 +23657,7 @@
                 <a:ea typeface="Calibri" pitchFamily="34" charset="-122"/>
                 <a:cs typeface="Calibri" pitchFamily="34" charset="-120"/>
               </a:rPr>
-              <a:t>happening right now</a:t>
+              <a:t>to increase in size</a:t>
             </a:r>
             <a:endParaRPr lang="en-US" sz="850" dirty="0"/>
           </a:p>
@@ -23942,6 +23666,118 @@
       <p:sp>
         <p:nvSpPr>
           <p:cNvPr id="22" name="Shape 20"/>
+          <p:cNvSpPr/>
+          <p:nvPr/>
+        </p:nvSpPr>
+        <p:spPr>
+          <a:xfrm>
+            <a:off x="6519672" y="2258568"/>
+            <a:ext cx="1828800" cy="292608"/>
+          </a:xfrm>
+          <a:prstGeom prst="rect">
+            <a:avLst>
+              <a:gd name="adj" fmla="val 25000"/>
+            </a:avLst>
+          </a:prstGeom>
+          <a:solidFill>
+            <a:srgbClr val="FCE7F3"/>
+          </a:solidFill>
+          <a:ln w="19050">
+            <a:solidFill>
+              <a:srgbClr val="DB2777"/>
+            </a:solidFill>
+            <a:prstDash val="solid"/>
+          </a:ln>
+          <a:effectLst>
+            <a:outerShdw sx="100000" sy="100000" kx="0" ky="0" algn="bl" rotWithShape="0" blurRad="101600" dist="38100" dir="8100000">
+              <a:srgbClr val="000000">
+                <a:alpha val="12000"/>
+              </a:srgbClr>
+            </a:outerShdw>
+          </a:effectLst>
+        </p:spPr>
+      </p:sp>
+      <p:sp>
+        <p:nvSpPr>
+          <p:cNvPr id="23" name="Text 21"/>
+          <p:cNvSpPr/>
+          <p:nvPr/>
+        </p:nvSpPr>
+        <p:spPr>
+          <a:xfrm>
+            <a:off x="6519672" y="2258568"/>
+            <a:ext cx="1828800" cy="292608"/>
+          </a:xfrm>
+          <a:prstGeom prst="rect">
+            <a:avLst/>
+          </a:prstGeom>
+          <a:noFill/>
+          <a:ln/>
+        </p:spPr>
+        <p:txBody>
+          <a:bodyPr wrap="square" lIns="0" tIns="0" rIns="0" bIns="0" rtlCol="0" anchor="ctr"/>
+          <a:lstStyle/>
+          <a:p>
+            <a:pPr algn="ctr" indent="0" marL="0">
+              <a:buNone/>
+            </a:pPr>
+            <a:r>
+              <a:rPr lang="en-US" sz="1300" b="1" dirty="0">
+                <a:solidFill>
+                  <a:srgbClr val="9D174D"/>
+                </a:solidFill>
+                <a:latin typeface="Trebuchet MS" pitchFamily="34" charset="0"/>
+                <a:ea typeface="Trebuchet MS" pitchFamily="34" charset="-122"/>
+                <a:cs typeface="Trebuchet MS" pitchFamily="34" charset="-120"/>
+              </a:rPr>
+              <a:t>n</a:t>
+            </a:r>
+            <a:endParaRPr lang="en-US" sz="1300" dirty="0"/>
+          </a:p>
+        </p:txBody>
+      </p:sp>
+      <p:sp>
+        <p:nvSpPr>
+          <p:cNvPr id="24" name="Text 22"/>
+          <p:cNvSpPr/>
+          <p:nvPr/>
+        </p:nvSpPr>
+        <p:spPr>
+          <a:xfrm>
+            <a:off x="6519672" y="2569464"/>
+            <a:ext cx="1828800" cy="201168"/>
+          </a:xfrm>
+          <a:prstGeom prst="rect">
+            <a:avLst/>
+          </a:prstGeom>
+          <a:noFill/>
+          <a:ln/>
+        </p:spPr>
+        <p:txBody>
+          <a:bodyPr wrap="square" lIns="0" tIns="0" rIns="0" bIns="0" rtlCol="0" anchor="t"/>
+          <a:lstStyle/>
+          <a:p>
+            <a:pPr algn="ctr" indent="0" marL="0">
+              <a:buNone/>
+            </a:pPr>
+            <a:r>
+              <a:rPr lang="en-US" sz="850" dirty="0">
+                <a:solidFill>
+                  <a:srgbClr val="475569"/>
+                </a:solidFill>
+                <a:latin typeface="Calibri" pitchFamily="34" charset="0"/>
+                <a:ea typeface="Calibri" pitchFamily="34" charset="-122"/>
+                <a:cs typeface="Calibri" pitchFamily="34" charset="-120"/>
+              </a:rPr>
+              <a:t>past participle ending</a:t>
+            </a:r>
+            <a:endParaRPr lang="en-US" sz="850" dirty="0"/>
+          </a:p>
+        </p:txBody>
+      </p:sp>
+      <p:sp>
+        <p:nvSpPr>
+          <p:cNvPr id="25" name="Shape 23"/>
           <p:cNvSpPr/>
           <p:nvPr/>
         </p:nvSpPr>
@@ -23968,7 +23804,7 @@
       </p:sp>
       <p:sp>
         <p:nvSpPr>
-          <p:cNvPr id="23" name="Text 21"/>
+          <p:cNvPr id="26" name="Text 24"/>
           <p:cNvSpPr/>
           <p:nvPr/>
         </p:nvSpPr>
@@ -24007,7 +23843,7 @@
       </p:sp>
       <p:sp>
         <p:nvSpPr>
-          <p:cNvPr id="24" name="Shape 22"/>
+          <p:cNvPr id="27" name="Shape 25"/>
           <p:cNvSpPr/>
           <p:nvPr/>
         </p:nvSpPr>
@@ -24034,7 +23870,7 @@
       </p:sp>
       <p:sp>
         <p:nvSpPr>
-          <p:cNvPr id="25" name="Text 23"/>
+          <p:cNvPr id="28" name="Text 26"/>
           <p:cNvSpPr/>
           <p:nvPr/>
         </p:nvSpPr>
@@ -24073,7 +23909,7 @@
       </p:sp>
       <p:sp>
         <p:nvSpPr>
-          <p:cNvPr id="26" name="Shape 24"/>
+          <p:cNvPr id="29" name="Shape 27"/>
           <p:cNvSpPr/>
           <p:nvPr/>
         </p:nvSpPr>
@@ -24100,7 +23936,7 @@
       </p:sp>
       <p:sp>
         <p:nvSpPr>
-          <p:cNvPr id="27" name="Text 25"/>
+          <p:cNvPr id="30" name="Text 28"/>
           <p:cNvSpPr/>
           <p:nvPr/>
         </p:nvSpPr>
@@ -24139,7 +23975,7 @@
       </p:sp>
       <p:sp>
         <p:nvSpPr>
-          <p:cNvPr id="28" name="Shape 26"/>
+          <p:cNvPr id="31" name="Shape 29"/>
           <p:cNvSpPr/>
           <p:nvPr/>
         </p:nvSpPr>
@@ -24166,7 +24002,7 @@
       </p:sp>
       <p:sp>
         <p:nvSpPr>
-          <p:cNvPr id="29" name="Text 27"/>
+          <p:cNvPr id="32" name="Text 30"/>
           <p:cNvSpPr/>
           <p:nvPr/>
         </p:nvSpPr>
@@ -25347,7 +25183,7 @@
                 <a:ea typeface="Trebuchet MS" pitchFamily="34" charset="-122"/>
                 <a:cs typeface="Trebuchet MS" pitchFamily="34" charset="-120"/>
               </a:rPr>
-              <a:t>growing</a:t>
+              <a:t>overgrown</a:t>
             </a:r>
             <a:endParaRPr lang="en-US" sz="2800" dirty="0"/>
           </a:p>
@@ -25427,7 +25263,7 @@
         </p:nvSpPr>
         <p:spPr>
           <a:xfrm>
-            <a:off x="2938272" y="2258568"/>
+            <a:off x="2221992" y="2258568"/>
             <a:ext cx="1828800" cy="292608"/>
           </a:xfrm>
           <a:prstGeom prst="rect">
@@ -25436,11 +25272,11 @@
             </a:avLst>
           </a:prstGeom>
           <a:solidFill>
-            <a:srgbClr val="CCFBF1"/>
+            <a:srgbClr val="DDD6FE"/>
           </a:solidFill>
           <a:ln w="19050">
             <a:solidFill>
-              <a:srgbClr val="0D9488"/>
+              <a:srgbClr val="7C3AED"/>
             </a:solidFill>
             <a:prstDash val="solid"/>
           </a:ln>
@@ -25461,7 +25297,7 @@
         </p:nvSpPr>
         <p:spPr>
           <a:xfrm>
-            <a:off x="2938272" y="2258568"/>
+            <a:off x="2221992" y="2258568"/>
             <a:ext cx="1828800" cy="292608"/>
           </a:xfrm>
           <a:prstGeom prst="rect">
@@ -25480,13 +25316,13 @@
             <a:r>
               <a:rPr lang="en-US" sz="1300" b="1" dirty="0">
                 <a:solidFill>
-                  <a:srgbClr val="0F766E"/>
+                  <a:srgbClr val="4C1D95"/>
                 </a:solidFill>
                 <a:latin typeface="Trebuchet MS" pitchFamily="34" charset="0"/>
                 <a:ea typeface="Trebuchet MS" pitchFamily="34" charset="-122"/>
                 <a:cs typeface="Trebuchet MS" pitchFamily="34" charset="-120"/>
               </a:rPr>
-              <a:t>grow</a:t>
+              <a:t>over</a:t>
             </a:r>
             <a:endParaRPr lang="en-US" sz="1300" dirty="0"/>
           </a:p>
@@ -25500,7 +25336,7 @@
         </p:nvSpPr>
         <p:spPr>
           <a:xfrm>
-            <a:off x="2938272" y="2569464"/>
+            <a:off x="2221992" y="2569464"/>
             <a:ext cx="1828800" cy="201168"/>
           </a:xfrm>
           <a:prstGeom prst="rect">
@@ -25525,7 +25361,7 @@
                 <a:ea typeface="Calibri" pitchFamily="34" charset="-122"/>
                 <a:cs typeface="Calibri" pitchFamily="34" charset="-120"/>
               </a:rPr>
-              <a:t>to increase in size</a:t>
+              <a:t>too much or above</a:t>
             </a:r>
             <a:endParaRPr lang="en-US" sz="850" dirty="0"/>
           </a:p>
@@ -25539,7 +25375,7 @@
         </p:nvSpPr>
         <p:spPr>
           <a:xfrm>
-            <a:off x="5803392" y="2258568"/>
+            <a:off x="4370832" y="2258568"/>
             <a:ext cx="1828800" cy="292608"/>
           </a:xfrm>
           <a:prstGeom prst="rect">
@@ -25548,11 +25384,11 @@
             </a:avLst>
           </a:prstGeom>
           <a:solidFill>
-            <a:srgbClr val="FCE7F3"/>
+            <a:srgbClr val="CCFBF1"/>
           </a:solidFill>
           <a:ln w="19050">
             <a:solidFill>
-              <a:srgbClr val="DB2777"/>
+              <a:srgbClr val="0D9488"/>
             </a:solidFill>
             <a:prstDash val="solid"/>
           </a:ln>
@@ -25573,7 +25409,7 @@
         </p:nvSpPr>
         <p:spPr>
           <a:xfrm>
-            <a:off x="5803392" y="2258568"/>
+            <a:off x="4370832" y="2258568"/>
             <a:ext cx="1828800" cy="292608"/>
           </a:xfrm>
           <a:prstGeom prst="rect">
@@ -25592,13 +25428,13 @@
             <a:r>
               <a:rPr lang="en-US" sz="1300" b="1" dirty="0">
                 <a:solidFill>
-                  <a:srgbClr val="9D174D"/>
+                  <a:srgbClr val="0F766E"/>
                 </a:solidFill>
                 <a:latin typeface="Trebuchet MS" pitchFamily="34" charset="0"/>
                 <a:ea typeface="Trebuchet MS" pitchFamily="34" charset="-122"/>
                 <a:cs typeface="Trebuchet MS" pitchFamily="34" charset="-120"/>
               </a:rPr>
-              <a:t>ing</a:t>
+              <a:t>grow</a:t>
             </a:r>
             <a:endParaRPr lang="en-US" sz="1300" dirty="0"/>
           </a:p>
@@ -25612,7 +25448,7 @@
         </p:nvSpPr>
         <p:spPr>
           <a:xfrm>
-            <a:off x="5803392" y="2569464"/>
+            <a:off x="4370832" y="2569464"/>
             <a:ext cx="1828800" cy="201168"/>
           </a:xfrm>
           <a:prstGeom prst="rect">
@@ -25637,7 +25473,7 @@
                 <a:ea typeface="Calibri" pitchFamily="34" charset="-122"/>
                 <a:cs typeface="Calibri" pitchFamily="34" charset="-120"/>
               </a:rPr>
-              <a:t>happening right now</a:t>
+              <a:t>to increase in size</a:t>
             </a:r>
             <a:endParaRPr lang="en-US" sz="850" dirty="0"/>
           </a:p>
@@ -25646,6 +25482,118 @@
       <p:sp>
         <p:nvSpPr>
           <p:cNvPr id="22" name="Shape 20"/>
+          <p:cNvSpPr/>
+          <p:nvPr/>
+        </p:nvSpPr>
+        <p:spPr>
+          <a:xfrm>
+            <a:off x="6519672" y="2258568"/>
+            <a:ext cx="1828800" cy="292608"/>
+          </a:xfrm>
+          <a:prstGeom prst="rect">
+            <a:avLst>
+              <a:gd name="adj" fmla="val 25000"/>
+            </a:avLst>
+          </a:prstGeom>
+          <a:solidFill>
+            <a:srgbClr val="FCE7F3"/>
+          </a:solidFill>
+          <a:ln w="19050">
+            <a:solidFill>
+              <a:srgbClr val="DB2777"/>
+            </a:solidFill>
+            <a:prstDash val="solid"/>
+          </a:ln>
+          <a:effectLst>
+            <a:outerShdw sx="100000" sy="100000" kx="0" ky="0" algn="bl" rotWithShape="0" blurRad="101600" dist="38100" dir="8100000">
+              <a:srgbClr val="000000">
+                <a:alpha val="12000"/>
+              </a:srgbClr>
+            </a:outerShdw>
+          </a:effectLst>
+        </p:spPr>
+      </p:sp>
+      <p:sp>
+        <p:nvSpPr>
+          <p:cNvPr id="23" name="Text 21"/>
+          <p:cNvSpPr/>
+          <p:nvPr/>
+        </p:nvSpPr>
+        <p:spPr>
+          <a:xfrm>
+            <a:off x="6519672" y="2258568"/>
+            <a:ext cx="1828800" cy="292608"/>
+          </a:xfrm>
+          <a:prstGeom prst="rect">
+            <a:avLst/>
+          </a:prstGeom>
+          <a:noFill/>
+          <a:ln/>
+        </p:spPr>
+        <p:txBody>
+          <a:bodyPr wrap="square" lIns="0" tIns="0" rIns="0" bIns="0" rtlCol="0" anchor="ctr"/>
+          <a:lstStyle/>
+          <a:p>
+            <a:pPr algn="ctr" indent="0" marL="0">
+              <a:buNone/>
+            </a:pPr>
+            <a:r>
+              <a:rPr lang="en-US" sz="1300" b="1" dirty="0">
+                <a:solidFill>
+                  <a:srgbClr val="9D174D"/>
+                </a:solidFill>
+                <a:latin typeface="Trebuchet MS" pitchFamily="34" charset="0"/>
+                <a:ea typeface="Trebuchet MS" pitchFamily="34" charset="-122"/>
+                <a:cs typeface="Trebuchet MS" pitchFamily="34" charset="-120"/>
+              </a:rPr>
+              <a:t>n</a:t>
+            </a:r>
+            <a:endParaRPr lang="en-US" sz="1300" dirty="0"/>
+          </a:p>
+        </p:txBody>
+      </p:sp>
+      <p:sp>
+        <p:nvSpPr>
+          <p:cNvPr id="24" name="Text 22"/>
+          <p:cNvSpPr/>
+          <p:nvPr/>
+        </p:nvSpPr>
+        <p:spPr>
+          <a:xfrm>
+            <a:off x="6519672" y="2569464"/>
+            <a:ext cx="1828800" cy="201168"/>
+          </a:xfrm>
+          <a:prstGeom prst="rect">
+            <a:avLst/>
+          </a:prstGeom>
+          <a:noFill/>
+          <a:ln/>
+        </p:spPr>
+        <p:txBody>
+          <a:bodyPr wrap="square" lIns="0" tIns="0" rIns="0" bIns="0" rtlCol="0" anchor="t"/>
+          <a:lstStyle/>
+          <a:p>
+            <a:pPr algn="ctr" indent="0" marL="0">
+              <a:buNone/>
+            </a:pPr>
+            <a:r>
+              <a:rPr lang="en-US" sz="850" dirty="0">
+                <a:solidFill>
+                  <a:srgbClr val="475569"/>
+                </a:solidFill>
+                <a:latin typeface="Calibri" pitchFamily="34" charset="0"/>
+                <a:ea typeface="Calibri" pitchFamily="34" charset="-122"/>
+                <a:cs typeface="Calibri" pitchFamily="34" charset="-120"/>
+              </a:rPr>
+              <a:t>past participle ending</a:t>
+            </a:r>
+            <a:endParaRPr lang="en-US" sz="850" dirty="0"/>
+          </a:p>
+        </p:txBody>
+      </p:sp>
+      <p:sp>
+        <p:nvSpPr>
+          <p:cNvPr id="25" name="Shape 23"/>
           <p:cNvSpPr/>
           <p:nvPr/>
         </p:nvSpPr>
@@ -25672,7 +25620,7 @@
       </p:sp>
       <p:sp>
         <p:nvSpPr>
-          <p:cNvPr id="23" name="Text 21"/>
+          <p:cNvPr id="26" name="Text 24"/>
           <p:cNvSpPr/>
           <p:nvPr/>
         </p:nvSpPr>
@@ -25711,7 +25659,7 @@
       </p:sp>
       <p:sp>
         <p:nvSpPr>
-          <p:cNvPr id="24" name="Shape 22"/>
+          <p:cNvPr id="27" name="Shape 25"/>
           <p:cNvSpPr/>
           <p:nvPr/>
         </p:nvSpPr>
@@ -25738,13 +25686,13 @@
       </p:sp>
       <p:sp>
         <p:nvSpPr>
-          <p:cNvPr id="25" name="Shape 23"/>
-          <p:cNvSpPr/>
-          <p:nvPr/>
-        </p:nvSpPr>
-        <p:spPr>
-          <a:xfrm>
-            <a:off x="2999232" y="3364992"/>
+          <p:cNvPr id="28" name="Shape 26"/>
+          <p:cNvSpPr/>
+          <p:nvPr/>
+        </p:nvSpPr>
+        <p:spPr>
+          <a:xfrm>
+            <a:off x="2313432" y="3364992"/>
             <a:ext cx="1645920" cy="475488"/>
           </a:xfrm>
           <a:prstGeom prst="rect">
@@ -25765,13 +25713,13 @@
       </p:sp>
       <p:sp>
         <p:nvSpPr>
-          <p:cNvPr id="26" name="Text 24"/>
-          <p:cNvSpPr/>
-          <p:nvPr/>
-        </p:nvSpPr>
-        <p:spPr>
-          <a:xfrm>
-            <a:off x="2999232" y="3364992"/>
+          <p:cNvPr id="29" name="Text 27"/>
+          <p:cNvSpPr/>
+          <p:nvPr/>
+        </p:nvSpPr>
+        <p:spPr>
+          <a:xfrm>
+            <a:off x="2313432" y="3364992"/>
             <a:ext cx="1645920" cy="475488"/>
           </a:xfrm>
           <a:prstGeom prst="rect">
@@ -25796,7 +25744,7 @@
                 <a:ea typeface="Trebuchet MS" pitchFamily="34" charset="-122"/>
                 <a:cs typeface="Trebuchet MS" pitchFamily="34" charset="-120"/>
               </a:rPr>
-              <a:t>grow</a:t>
+              <a:t>o</a:t>
             </a:r>
             <a:endParaRPr lang="en-US" sz="1400" dirty="0"/>
           </a:p>
@@ -25804,14 +25752,14 @@
       </p:sp>
       <p:sp>
         <p:nvSpPr>
-          <p:cNvPr id="27" name="Text 25"/>
-          <p:cNvSpPr/>
-          <p:nvPr/>
-        </p:nvSpPr>
-        <p:spPr>
-          <a:xfrm>
-            <a:off x="4645152" y="3364992"/>
-            <a:ext cx="1097280" cy="475488"/>
+          <p:cNvPr id="30" name="Text 28"/>
+          <p:cNvSpPr/>
+          <p:nvPr/>
+        </p:nvSpPr>
+        <p:spPr>
+          <a:xfrm>
+            <a:off x="3959352" y="3364992"/>
+            <a:ext cx="411480" cy="475488"/>
           </a:xfrm>
           <a:prstGeom prst="rect">
             <a:avLst/>
@@ -25843,13 +25791,13 @@
       </p:sp>
       <p:sp>
         <p:nvSpPr>
-          <p:cNvPr id="28" name="Shape 26"/>
-          <p:cNvSpPr/>
-          <p:nvPr/>
-        </p:nvSpPr>
-        <p:spPr>
-          <a:xfrm>
-            <a:off x="5742432" y="3364992"/>
+          <p:cNvPr id="31" name="Shape 29"/>
+          <p:cNvSpPr/>
+          <p:nvPr/>
+        </p:nvSpPr>
+        <p:spPr>
+          <a:xfrm>
+            <a:off x="4370832" y="3364992"/>
             <a:ext cx="1645920" cy="475488"/>
           </a:xfrm>
           <a:prstGeom prst="rect">
@@ -25870,13 +25818,13 @@
       </p:sp>
       <p:sp>
         <p:nvSpPr>
-          <p:cNvPr id="29" name="Text 27"/>
-          <p:cNvSpPr/>
-          <p:nvPr/>
-        </p:nvSpPr>
-        <p:spPr>
-          <a:xfrm>
-            <a:off x="5742432" y="3364992"/>
+          <p:cNvPr id="32" name="Text 30"/>
+          <p:cNvSpPr/>
+          <p:nvPr/>
+        </p:nvSpPr>
+        <p:spPr>
+          <a:xfrm>
+            <a:off x="4370832" y="3364992"/>
             <a:ext cx="1645920" cy="475488"/>
           </a:xfrm>
           <a:prstGeom prst="rect">
@@ -25901,7 +25849,7 @@
                 <a:ea typeface="Trebuchet MS" pitchFamily="34" charset="-122"/>
                 <a:cs typeface="Trebuchet MS" pitchFamily="34" charset="-120"/>
               </a:rPr>
-              <a:t>ing</a:t>
+              <a:t>ver</a:t>
             </a:r>
             <a:endParaRPr lang="en-US" sz="1400" dirty="0"/>
           </a:p>
@@ -25909,7 +25857,112 @@
       </p:sp>
       <p:sp>
         <p:nvSpPr>
-          <p:cNvPr id="30" name="Shape 28"/>
+          <p:cNvPr id="33" name="Text 31"/>
+          <p:cNvSpPr/>
+          <p:nvPr/>
+        </p:nvSpPr>
+        <p:spPr>
+          <a:xfrm>
+            <a:off x="6016752" y="3364992"/>
+            <a:ext cx="411480" cy="475488"/>
+          </a:xfrm>
+          <a:prstGeom prst="rect">
+            <a:avLst/>
+          </a:prstGeom>
+          <a:noFill/>
+          <a:ln/>
+        </p:spPr>
+        <p:txBody>
+          <a:bodyPr wrap="square" lIns="0" tIns="0" rIns="0" bIns="0" rtlCol="0" anchor="ctr"/>
+          <a:lstStyle/>
+          <a:p>
+            <a:pPr algn="ctr" indent="0" marL="0">
+              <a:buNone/>
+            </a:pPr>
+            <a:r>
+              <a:rPr lang="en-US" sz="1600" b="1" dirty="0">
+                <a:solidFill>
+                  <a:srgbClr val="0D9488"/>
+                </a:solidFill>
+                <a:latin typeface="Trebuchet MS" pitchFamily="34" charset="0"/>
+                <a:ea typeface="Trebuchet MS" pitchFamily="34" charset="-122"/>
+                <a:cs typeface="Trebuchet MS" pitchFamily="34" charset="-120"/>
+              </a:rPr>
+              <a:t>·</a:t>
+            </a:r>
+            <a:endParaRPr lang="en-US" sz="1600" dirty="0"/>
+          </a:p>
+        </p:txBody>
+      </p:sp>
+      <p:sp>
+        <p:nvSpPr>
+          <p:cNvPr id="34" name="Shape 32"/>
+          <p:cNvSpPr/>
+          <p:nvPr/>
+        </p:nvSpPr>
+        <p:spPr>
+          <a:xfrm>
+            <a:off x="6428232" y="3364992"/>
+            <a:ext cx="1645920" cy="475488"/>
+          </a:xfrm>
+          <a:prstGeom prst="rect">
+            <a:avLst>
+              <a:gd name="adj" fmla="val 9615"/>
+            </a:avLst>
+          </a:prstGeom>
+          <a:solidFill>
+            <a:srgbClr val="FFFFFF"/>
+          </a:solidFill>
+          <a:ln w="12700">
+            <a:solidFill>
+              <a:srgbClr val="0D9488"/>
+            </a:solidFill>
+            <a:prstDash val="solid"/>
+          </a:ln>
+        </p:spPr>
+      </p:sp>
+      <p:sp>
+        <p:nvSpPr>
+          <p:cNvPr id="35" name="Text 33"/>
+          <p:cNvSpPr/>
+          <p:nvPr/>
+        </p:nvSpPr>
+        <p:spPr>
+          <a:xfrm>
+            <a:off x="6428232" y="3364992"/>
+            <a:ext cx="1645920" cy="475488"/>
+          </a:xfrm>
+          <a:prstGeom prst="rect">
+            <a:avLst/>
+          </a:prstGeom>
+          <a:noFill/>
+          <a:ln/>
+        </p:spPr>
+        <p:txBody>
+          <a:bodyPr wrap="square" lIns="0" tIns="0" rIns="0" bIns="0" rtlCol="0" anchor="ctr"/>
+          <a:lstStyle/>
+          <a:p>
+            <a:pPr algn="ctr" indent="0" marL="0">
+              <a:buNone/>
+            </a:pPr>
+            <a:r>
+              <a:rPr lang="en-US" sz="1400" b="1" dirty="0">
+                <a:solidFill>
+                  <a:srgbClr val="0D9488"/>
+                </a:solidFill>
+                <a:latin typeface="Trebuchet MS" pitchFamily="34" charset="0"/>
+                <a:ea typeface="Trebuchet MS" pitchFamily="34" charset="-122"/>
+                <a:cs typeface="Trebuchet MS" pitchFamily="34" charset="-120"/>
+              </a:rPr>
+              <a:t>grown</a:t>
+            </a:r>
+            <a:endParaRPr lang="en-US" sz="1400" dirty="0"/>
+          </a:p>
+        </p:txBody>
+      </p:sp>
+      <p:sp>
+        <p:nvSpPr>
+          <p:cNvPr id="36" name="Shape 34"/>
           <p:cNvSpPr/>
           <p:nvPr/>
         </p:nvSpPr>
@@ -25936,7 +25989,7 @@
       </p:sp>
       <p:sp>
         <p:nvSpPr>
-          <p:cNvPr id="31" name="Text 29"/>
+          <p:cNvPr id="37" name="Text 35"/>
           <p:cNvSpPr/>
           <p:nvPr/>
         </p:nvSpPr>
@@ -25975,7 +26028,7 @@
       </p:sp>
       <p:sp>
         <p:nvSpPr>
-          <p:cNvPr id="32" name="Shape 30"/>
+          <p:cNvPr id="38" name="Shape 36"/>
           <p:cNvSpPr/>
           <p:nvPr/>
         </p:nvSpPr>
@@ -26002,7 +26055,7 @@
       </p:sp>
       <p:sp>
         <p:nvSpPr>
-          <p:cNvPr id="33" name="Text 31"/>
+          <p:cNvPr id="39" name="Text 37"/>
           <p:cNvSpPr/>
           <p:nvPr/>
         </p:nvSpPr>
@@ -26464,7 +26517,7 @@
                 <a:ea typeface="Trebuchet MS" pitchFamily="34" charset="-122"/>
                 <a:cs typeface="Trebuchet MS" pitchFamily="34" charset="-120"/>
               </a:rPr>
-              <a:t>growing</a:t>
+              <a:t>overgrown</a:t>
             </a:r>
             <a:endParaRPr lang="en-US" sz="2800" dirty="0"/>
           </a:p>
@@ -26544,7 +26597,7 @@
         </p:nvSpPr>
         <p:spPr>
           <a:xfrm>
-            <a:off x="2938272" y="2258568"/>
+            <a:off x="2221992" y="2258568"/>
             <a:ext cx="1828800" cy="292608"/>
           </a:xfrm>
           <a:prstGeom prst="rect">
@@ -26553,11 +26606,11 @@
             </a:avLst>
           </a:prstGeom>
           <a:solidFill>
-            <a:srgbClr val="CCFBF1"/>
+            <a:srgbClr val="DDD6FE"/>
           </a:solidFill>
           <a:ln w="19050">
             <a:solidFill>
-              <a:srgbClr val="0D9488"/>
+              <a:srgbClr val="7C3AED"/>
             </a:solidFill>
             <a:prstDash val="solid"/>
           </a:ln>
@@ -26578,7 +26631,7 @@
         </p:nvSpPr>
         <p:spPr>
           <a:xfrm>
-            <a:off x="2938272" y="2258568"/>
+            <a:off x="2221992" y="2258568"/>
             <a:ext cx="1828800" cy="292608"/>
           </a:xfrm>
           <a:prstGeom prst="rect">
@@ -26597,13 +26650,13 @@
             <a:r>
               <a:rPr lang="en-US" sz="1300" b="1" dirty="0">
                 <a:solidFill>
-                  <a:srgbClr val="0F766E"/>
+                  <a:srgbClr val="4C1D95"/>
                 </a:solidFill>
                 <a:latin typeface="Trebuchet MS" pitchFamily="34" charset="0"/>
                 <a:ea typeface="Trebuchet MS" pitchFamily="34" charset="-122"/>
                 <a:cs typeface="Trebuchet MS" pitchFamily="34" charset="-120"/>
               </a:rPr>
-              <a:t>grow</a:t>
+              <a:t>over</a:t>
             </a:r>
             <a:endParaRPr lang="en-US" sz="1300" dirty="0"/>
           </a:p>
@@ -26617,7 +26670,7 @@
         </p:nvSpPr>
         <p:spPr>
           <a:xfrm>
-            <a:off x="2938272" y="2569464"/>
+            <a:off x="2221992" y="2569464"/>
             <a:ext cx="1828800" cy="201168"/>
           </a:xfrm>
           <a:prstGeom prst="rect">
@@ -26642,7 +26695,7 @@
                 <a:ea typeface="Calibri" pitchFamily="34" charset="-122"/>
                 <a:cs typeface="Calibri" pitchFamily="34" charset="-120"/>
               </a:rPr>
-              <a:t>to increase in size</a:t>
+              <a:t>too much or above</a:t>
             </a:r>
             <a:endParaRPr lang="en-US" sz="850" dirty="0"/>
           </a:p>
@@ -26656,7 +26709,7 @@
         </p:nvSpPr>
         <p:spPr>
           <a:xfrm>
-            <a:off x="5803392" y="2258568"/>
+            <a:off x="4370832" y="2258568"/>
             <a:ext cx="1828800" cy="292608"/>
           </a:xfrm>
           <a:prstGeom prst="rect">
@@ -26665,11 +26718,11 @@
             </a:avLst>
           </a:prstGeom>
           <a:solidFill>
-            <a:srgbClr val="FCE7F3"/>
+            <a:srgbClr val="CCFBF1"/>
           </a:solidFill>
           <a:ln w="19050">
             <a:solidFill>
-              <a:srgbClr val="DB2777"/>
+              <a:srgbClr val="0D9488"/>
             </a:solidFill>
             <a:prstDash val="solid"/>
           </a:ln>
@@ -26690,7 +26743,7 @@
         </p:nvSpPr>
         <p:spPr>
           <a:xfrm>
-            <a:off x="5803392" y="2258568"/>
+            <a:off x="4370832" y="2258568"/>
             <a:ext cx="1828800" cy="292608"/>
           </a:xfrm>
           <a:prstGeom prst="rect">
@@ -26709,13 +26762,13 @@
             <a:r>
               <a:rPr lang="en-US" sz="1300" b="1" dirty="0">
                 <a:solidFill>
-                  <a:srgbClr val="9D174D"/>
+                  <a:srgbClr val="0F766E"/>
                 </a:solidFill>
                 <a:latin typeface="Trebuchet MS" pitchFamily="34" charset="0"/>
                 <a:ea typeface="Trebuchet MS" pitchFamily="34" charset="-122"/>
                 <a:cs typeface="Trebuchet MS" pitchFamily="34" charset="-120"/>
               </a:rPr>
-              <a:t>ing</a:t>
+              <a:t>grow</a:t>
             </a:r>
             <a:endParaRPr lang="en-US" sz="1300" dirty="0"/>
           </a:p>
@@ -26729,7 +26782,7 @@
         </p:nvSpPr>
         <p:spPr>
           <a:xfrm>
-            <a:off x="5803392" y="2569464"/>
+            <a:off x="4370832" y="2569464"/>
             <a:ext cx="1828800" cy="201168"/>
           </a:xfrm>
           <a:prstGeom prst="rect">
@@ -26754,7 +26807,7 @@
                 <a:ea typeface="Calibri" pitchFamily="34" charset="-122"/>
                 <a:cs typeface="Calibri" pitchFamily="34" charset="-120"/>
               </a:rPr>
-              <a:t>happening right now</a:t>
+              <a:t>to increase in size</a:t>
             </a:r>
             <a:endParaRPr lang="en-US" sz="850" dirty="0"/>
           </a:p>
@@ -26763,6 +26816,118 @@
       <p:sp>
         <p:nvSpPr>
           <p:cNvPr id="22" name="Shape 20"/>
+          <p:cNvSpPr/>
+          <p:nvPr/>
+        </p:nvSpPr>
+        <p:spPr>
+          <a:xfrm>
+            <a:off x="6519672" y="2258568"/>
+            <a:ext cx="1828800" cy="292608"/>
+          </a:xfrm>
+          <a:prstGeom prst="rect">
+            <a:avLst>
+              <a:gd name="adj" fmla="val 25000"/>
+            </a:avLst>
+          </a:prstGeom>
+          <a:solidFill>
+            <a:srgbClr val="FCE7F3"/>
+          </a:solidFill>
+          <a:ln w="19050">
+            <a:solidFill>
+              <a:srgbClr val="DB2777"/>
+            </a:solidFill>
+            <a:prstDash val="solid"/>
+          </a:ln>
+          <a:effectLst>
+            <a:outerShdw sx="100000" sy="100000" kx="0" ky="0" algn="bl" rotWithShape="0" blurRad="101600" dist="38100" dir="8100000">
+              <a:srgbClr val="000000">
+                <a:alpha val="12000"/>
+              </a:srgbClr>
+            </a:outerShdw>
+          </a:effectLst>
+        </p:spPr>
+      </p:sp>
+      <p:sp>
+        <p:nvSpPr>
+          <p:cNvPr id="23" name="Text 21"/>
+          <p:cNvSpPr/>
+          <p:nvPr/>
+        </p:nvSpPr>
+        <p:spPr>
+          <a:xfrm>
+            <a:off x="6519672" y="2258568"/>
+            <a:ext cx="1828800" cy="292608"/>
+          </a:xfrm>
+          <a:prstGeom prst="rect">
+            <a:avLst/>
+          </a:prstGeom>
+          <a:noFill/>
+          <a:ln/>
+        </p:spPr>
+        <p:txBody>
+          <a:bodyPr wrap="square" lIns="0" tIns="0" rIns="0" bIns="0" rtlCol="0" anchor="ctr"/>
+          <a:lstStyle/>
+          <a:p>
+            <a:pPr algn="ctr" indent="0" marL="0">
+              <a:buNone/>
+            </a:pPr>
+            <a:r>
+              <a:rPr lang="en-US" sz="1300" b="1" dirty="0">
+                <a:solidFill>
+                  <a:srgbClr val="9D174D"/>
+                </a:solidFill>
+                <a:latin typeface="Trebuchet MS" pitchFamily="34" charset="0"/>
+                <a:ea typeface="Trebuchet MS" pitchFamily="34" charset="-122"/>
+                <a:cs typeface="Trebuchet MS" pitchFamily="34" charset="-120"/>
+              </a:rPr>
+              <a:t>n</a:t>
+            </a:r>
+            <a:endParaRPr lang="en-US" sz="1300" dirty="0"/>
+          </a:p>
+        </p:txBody>
+      </p:sp>
+      <p:sp>
+        <p:nvSpPr>
+          <p:cNvPr id="24" name="Text 22"/>
+          <p:cNvSpPr/>
+          <p:nvPr/>
+        </p:nvSpPr>
+        <p:spPr>
+          <a:xfrm>
+            <a:off x="6519672" y="2569464"/>
+            <a:ext cx="1828800" cy="201168"/>
+          </a:xfrm>
+          <a:prstGeom prst="rect">
+            <a:avLst/>
+          </a:prstGeom>
+          <a:noFill/>
+          <a:ln/>
+        </p:spPr>
+        <p:txBody>
+          <a:bodyPr wrap="square" lIns="0" tIns="0" rIns="0" bIns="0" rtlCol="0" anchor="t"/>
+          <a:lstStyle/>
+          <a:p>
+            <a:pPr algn="ctr" indent="0" marL="0">
+              <a:buNone/>
+            </a:pPr>
+            <a:r>
+              <a:rPr lang="en-US" sz="850" dirty="0">
+                <a:solidFill>
+                  <a:srgbClr val="475569"/>
+                </a:solidFill>
+                <a:latin typeface="Calibri" pitchFamily="34" charset="0"/>
+                <a:ea typeface="Calibri" pitchFamily="34" charset="-122"/>
+                <a:cs typeface="Calibri" pitchFamily="34" charset="-120"/>
+              </a:rPr>
+              <a:t>past participle ending</a:t>
+            </a:r>
+            <a:endParaRPr lang="en-US" sz="850" dirty="0"/>
+          </a:p>
+        </p:txBody>
+      </p:sp>
+      <p:sp>
+        <p:nvSpPr>
+          <p:cNvPr id="25" name="Shape 23"/>
           <p:cNvSpPr/>
           <p:nvPr/>
         </p:nvSpPr>
@@ -26789,7 +26954,7 @@
       </p:sp>
       <p:sp>
         <p:nvSpPr>
-          <p:cNvPr id="23" name="Text 21"/>
+          <p:cNvPr id="26" name="Text 24"/>
           <p:cNvSpPr/>
           <p:nvPr/>
         </p:nvSpPr>
@@ -26828,7 +26993,7 @@
       </p:sp>
       <p:sp>
         <p:nvSpPr>
-          <p:cNvPr id="24" name="Shape 22"/>
+          <p:cNvPr id="27" name="Shape 25"/>
           <p:cNvSpPr/>
           <p:nvPr/>
         </p:nvSpPr>
@@ -26855,13 +27020,13 @@
       </p:sp>
       <p:sp>
         <p:nvSpPr>
-          <p:cNvPr id="25" name="Shape 23"/>
-          <p:cNvSpPr/>
-          <p:nvPr/>
-        </p:nvSpPr>
-        <p:spPr>
-          <a:xfrm>
-            <a:off x="2999232" y="3364992"/>
+          <p:cNvPr id="28" name="Shape 26"/>
+          <p:cNvSpPr/>
+          <p:nvPr/>
+        </p:nvSpPr>
+        <p:spPr>
+          <a:xfrm>
+            <a:off x="2313432" y="3364992"/>
             <a:ext cx="1645920" cy="475488"/>
           </a:xfrm>
           <a:prstGeom prst="rect">
@@ -26882,13 +27047,13 @@
       </p:sp>
       <p:sp>
         <p:nvSpPr>
-          <p:cNvPr id="26" name="Text 24"/>
-          <p:cNvSpPr/>
-          <p:nvPr/>
-        </p:nvSpPr>
-        <p:spPr>
-          <a:xfrm>
-            <a:off x="2999232" y="3364992"/>
+          <p:cNvPr id="29" name="Text 27"/>
+          <p:cNvSpPr/>
+          <p:nvPr/>
+        </p:nvSpPr>
+        <p:spPr>
+          <a:xfrm>
+            <a:off x="2313432" y="3364992"/>
             <a:ext cx="1645920" cy="475488"/>
           </a:xfrm>
           <a:prstGeom prst="rect">
@@ -26913,7 +27078,7 @@
                 <a:ea typeface="Trebuchet MS" pitchFamily="34" charset="-122"/>
                 <a:cs typeface="Trebuchet MS" pitchFamily="34" charset="-120"/>
               </a:rPr>
-              <a:t>grow</a:t>
+              <a:t>o</a:t>
             </a:r>
             <a:endParaRPr lang="en-US" sz="1400" dirty="0"/>
           </a:p>
@@ -26921,14 +27086,14 @@
       </p:sp>
       <p:sp>
         <p:nvSpPr>
-          <p:cNvPr id="27" name="Text 25"/>
-          <p:cNvSpPr/>
-          <p:nvPr/>
-        </p:nvSpPr>
-        <p:spPr>
-          <a:xfrm>
-            <a:off x="4645152" y="3364992"/>
-            <a:ext cx="1097280" cy="475488"/>
+          <p:cNvPr id="30" name="Text 28"/>
+          <p:cNvSpPr/>
+          <p:nvPr/>
+        </p:nvSpPr>
+        <p:spPr>
+          <a:xfrm>
+            <a:off x="3959352" y="3364992"/>
+            <a:ext cx="411480" cy="475488"/>
           </a:xfrm>
           <a:prstGeom prst="rect">
             <a:avLst/>
@@ -26960,13 +27125,13 @@
       </p:sp>
       <p:sp>
         <p:nvSpPr>
-          <p:cNvPr id="28" name="Shape 26"/>
-          <p:cNvSpPr/>
-          <p:nvPr/>
-        </p:nvSpPr>
-        <p:spPr>
-          <a:xfrm>
-            <a:off x="5742432" y="3364992"/>
+          <p:cNvPr id="31" name="Shape 29"/>
+          <p:cNvSpPr/>
+          <p:nvPr/>
+        </p:nvSpPr>
+        <p:spPr>
+          <a:xfrm>
+            <a:off x="4370832" y="3364992"/>
             <a:ext cx="1645920" cy="475488"/>
           </a:xfrm>
           <a:prstGeom prst="rect">
@@ -26987,13 +27152,13 @@
       </p:sp>
       <p:sp>
         <p:nvSpPr>
-          <p:cNvPr id="29" name="Text 27"/>
-          <p:cNvSpPr/>
-          <p:nvPr/>
-        </p:nvSpPr>
-        <p:spPr>
-          <a:xfrm>
-            <a:off x="5742432" y="3364992"/>
+          <p:cNvPr id="32" name="Text 30"/>
+          <p:cNvSpPr/>
+          <p:nvPr/>
+        </p:nvSpPr>
+        <p:spPr>
+          <a:xfrm>
+            <a:off x="4370832" y="3364992"/>
             <a:ext cx="1645920" cy="475488"/>
           </a:xfrm>
           <a:prstGeom prst="rect">
@@ -27018,7 +27183,7 @@
                 <a:ea typeface="Trebuchet MS" pitchFamily="34" charset="-122"/>
                 <a:cs typeface="Trebuchet MS" pitchFamily="34" charset="-120"/>
               </a:rPr>
-              <a:t>ing</a:t>
+              <a:t>ver</a:t>
             </a:r>
             <a:endParaRPr lang="en-US" sz="1400" dirty="0"/>
           </a:p>
@@ -27026,7 +27191,112 @@
       </p:sp>
       <p:sp>
         <p:nvSpPr>
-          <p:cNvPr id="30" name="Shape 28"/>
+          <p:cNvPr id="33" name="Text 31"/>
+          <p:cNvSpPr/>
+          <p:nvPr/>
+        </p:nvSpPr>
+        <p:spPr>
+          <a:xfrm>
+            <a:off x="6016752" y="3364992"/>
+            <a:ext cx="411480" cy="475488"/>
+          </a:xfrm>
+          <a:prstGeom prst="rect">
+            <a:avLst/>
+          </a:prstGeom>
+          <a:noFill/>
+          <a:ln/>
+        </p:spPr>
+        <p:txBody>
+          <a:bodyPr wrap="square" lIns="0" tIns="0" rIns="0" bIns="0" rtlCol="0" anchor="ctr"/>
+          <a:lstStyle/>
+          <a:p>
+            <a:pPr algn="ctr" indent="0" marL="0">
+              <a:buNone/>
+            </a:pPr>
+            <a:r>
+              <a:rPr lang="en-US" sz="1600" b="1" dirty="0">
+                <a:solidFill>
+                  <a:srgbClr val="0D9488"/>
+                </a:solidFill>
+                <a:latin typeface="Trebuchet MS" pitchFamily="34" charset="0"/>
+                <a:ea typeface="Trebuchet MS" pitchFamily="34" charset="-122"/>
+                <a:cs typeface="Trebuchet MS" pitchFamily="34" charset="-120"/>
+              </a:rPr>
+              <a:t>·</a:t>
+            </a:r>
+            <a:endParaRPr lang="en-US" sz="1600" dirty="0"/>
+          </a:p>
+        </p:txBody>
+      </p:sp>
+      <p:sp>
+        <p:nvSpPr>
+          <p:cNvPr id="34" name="Shape 32"/>
+          <p:cNvSpPr/>
+          <p:nvPr/>
+        </p:nvSpPr>
+        <p:spPr>
+          <a:xfrm>
+            <a:off x="6428232" y="3364992"/>
+            <a:ext cx="1645920" cy="475488"/>
+          </a:xfrm>
+          <a:prstGeom prst="rect">
+            <a:avLst>
+              <a:gd name="adj" fmla="val 9615"/>
+            </a:avLst>
+          </a:prstGeom>
+          <a:solidFill>
+            <a:srgbClr val="FFFFFF"/>
+          </a:solidFill>
+          <a:ln w="12700">
+            <a:solidFill>
+              <a:srgbClr val="0D9488"/>
+            </a:solidFill>
+            <a:prstDash val="solid"/>
+          </a:ln>
+        </p:spPr>
+      </p:sp>
+      <p:sp>
+        <p:nvSpPr>
+          <p:cNvPr id="35" name="Text 33"/>
+          <p:cNvSpPr/>
+          <p:nvPr/>
+        </p:nvSpPr>
+        <p:spPr>
+          <a:xfrm>
+            <a:off x="6428232" y="3364992"/>
+            <a:ext cx="1645920" cy="475488"/>
+          </a:xfrm>
+          <a:prstGeom prst="rect">
+            <a:avLst/>
+          </a:prstGeom>
+          <a:noFill/>
+          <a:ln/>
+        </p:spPr>
+        <p:txBody>
+          <a:bodyPr wrap="square" lIns="0" tIns="0" rIns="0" bIns="0" rtlCol="0" anchor="ctr"/>
+          <a:lstStyle/>
+          <a:p>
+            <a:pPr algn="ctr" indent="0" marL="0">
+              <a:buNone/>
+            </a:pPr>
+            <a:r>
+              <a:rPr lang="en-US" sz="1400" b="1" dirty="0">
+                <a:solidFill>
+                  <a:srgbClr val="0D9488"/>
+                </a:solidFill>
+                <a:latin typeface="Trebuchet MS" pitchFamily="34" charset="0"/>
+                <a:ea typeface="Trebuchet MS" pitchFamily="34" charset="-122"/>
+                <a:cs typeface="Trebuchet MS" pitchFamily="34" charset="-120"/>
+              </a:rPr>
+              <a:t>grown</a:t>
+            </a:r>
+            <a:endParaRPr lang="en-US" sz="1400" dirty="0"/>
+          </a:p>
+        </p:txBody>
+      </p:sp>
+      <p:sp>
+        <p:nvSpPr>
+          <p:cNvPr id="36" name="Shape 34"/>
           <p:cNvSpPr/>
           <p:nvPr/>
         </p:nvSpPr>
@@ -27053,7 +27323,7 @@
       </p:sp>
       <p:sp>
         <p:nvSpPr>
-          <p:cNvPr id="31" name="Text 29"/>
+          <p:cNvPr id="37" name="Text 35"/>
           <p:cNvSpPr/>
           <p:nvPr/>
         </p:nvSpPr>
@@ -27092,7 +27362,7 @@
       </p:sp>
       <p:sp>
         <p:nvSpPr>
-          <p:cNvPr id="32" name="Shape 30"/>
+          <p:cNvPr id="38" name="Shape 36"/>
           <p:cNvSpPr/>
           <p:nvPr/>
         </p:nvSpPr>
@@ -27119,13 +27389,13 @@
       </p:sp>
       <p:sp>
         <p:nvSpPr>
-          <p:cNvPr id="33" name="Shape 31"/>
-          <p:cNvSpPr/>
-          <p:nvPr/>
-        </p:nvSpPr>
-        <p:spPr>
-          <a:xfrm>
-            <a:off x="3033522" y="4169664"/>
+          <p:cNvPr id="39" name="Shape 37"/>
+          <p:cNvSpPr/>
+          <p:nvPr/>
+        </p:nvSpPr>
+        <p:spPr>
+          <a:xfrm>
+            <a:off x="2254649" y="4169664"/>
             <a:ext cx="685800" cy="475488"/>
           </a:xfrm>
           <a:prstGeom prst="rect">
@@ -27146,13 +27416,13 @@
       </p:sp>
       <p:sp>
         <p:nvSpPr>
-          <p:cNvPr id="34" name="Text 32"/>
-          <p:cNvSpPr/>
-          <p:nvPr/>
-        </p:nvSpPr>
-        <p:spPr>
-          <a:xfrm>
-            <a:off x="3033522" y="4169664"/>
+          <p:cNvPr id="40" name="Text 38"/>
+          <p:cNvSpPr/>
+          <p:nvPr/>
+        </p:nvSpPr>
+        <p:spPr>
+          <a:xfrm>
+            <a:off x="2254649" y="4169664"/>
             <a:ext cx="685800" cy="475488"/>
           </a:xfrm>
           <a:prstGeom prst="rect">
@@ -27169,7 +27439,7 @@
               <a:buNone/>
             </a:pPr>
             <a:r>
-              <a:rPr lang="en-US" sz="1000" b="1" dirty="0">
+              <a:rPr lang="en-US" sz="900" b="1" dirty="0">
                 <a:solidFill>
                   <a:srgbClr val="9D174D"/>
                 </a:solidFill>
@@ -27177,21 +27447,21 @@
                 <a:ea typeface="Trebuchet MS" pitchFamily="34" charset="-122"/>
                 <a:cs typeface="Trebuchet MS" pitchFamily="34" charset="-120"/>
               </a:rPr>
-              <a:t>gr</a:t>
-            </a:r>
-            <a:endParaRPr lang="en-US" sz="1000" dirty="0"/>
-          </a:p>
-        </p:txBody>
-      </p:sp>
-      <p:sp>
-        <p:nvSpPr>
-          <p:cNvPr id="35" name="Shape 33"/>
-          <p:cNvSpPr/>
-          <p:nvPr/>
-        </p:nvSpPr>
-        <p:spPr>
-          <a:xfrm>
-            <a:off x="4850892" y="4169664"/>
+              <a:t>o</a:t>
+            </a:r>
+            <a:endParaRPr lang="en-US" sz="900" dirty="0"/>
+          </a:p>
+        </p:txBody>
+      </p:sp>
+      <p:sp>
+        <p:nvSpPr>
+          <p:cNvPr id="41" name="Shape 39"/>
+          <p:cNvSpPr/>
+          <p:nvPr/>
+        </p:nvSpPr>
+        <p:spPr>
+          <a:xfrm>
+            <a:off x="3293146" y="4169664"/>
             <a:ext cx="685800" cy="475488"/>
           </a:xfrm>
           <a:prstGeom prst="rect">
@@ -27212,13 +27482,13 @@
       </p:sp>
       <p:sp>
         <p:nvSpPr>
-          <p:cNvPr id="36" name="Text 34"/>
-          <p:cNvSpPr/>
-          <p:nvPr/>
-        </p:nvSpPr>
-        <p:spPr>
-          <a:xfrm>
-            <a:off x="4850892" y="4169664"/>
+          <p:cNvPr id="42" name="Text 40"/>
+          <p:cNvSpPr/>
+          <p:nvPr/>
+        </p:nvSpPr>
+        <p:spPr>
+          <a:xfrm>
+            <a:off x="3293146" y="4169664"/>
             <a:ext cx="685800" cy="475488"/>
           </a:xfrm>
           <a:prstGeom prst="rect">
@@ -27235,7 +27505,7 @@
               <a:buNone/>
             </a:pPr>
             <a:r>
-              <a:rPr lang="en-US" sz="1000" b="1" dirty="0">
+              <a:rPr lang="en-US" sz="900" b="1" dirty="0">
                 <a:solidFill>
                   <a:srgbClr val="9D174D"/>
                 </a:solidFill>
@@ -27243,21 +27513,21 @@
                 <a:ea typeface="Trebuchet MS" pitchFamily="34" charset="-122"/>
                 <a:cs typeface="Trebuchet MS" pitchFamily="34" charset="-120"/>
               </a:rPr>
-              <a:t>ow</a:t>
-            </a:r>
-            <a:endParaRPr lang="en-US" sz="1000" dirty="0"/>
-          </a:p>
-        </p:txBody>
-      </p:sp>
-      <p:sp>
-        <p:nvSpPr>
-          <p:cNvPr id="37" name="Shape 35"/>
-          <p:cNvSpPr/>
-          <p:nvPr/>
-        </p:nvSpPr>
-        <p:spPr>
-          <a:xfrm>
-            <a:off x="6668262" y="4169664"/>
+              <a:t>v</a:t>
+            </a:r>
+            <a:endParaRPr lang="en-US" sz="900" dirty="0"/>
+          </a:p>
+        </p:txBody>
+      </p:sp>
+      <p:sp>
+        <p:nvSpPr>
+          <p:cNvPr id="43" name="Shape 41"/>
+          <p:cNvSpPr/>
+          <p:nvPr/>
+        </p:nvSpPr>
+        <p:spPr>
+          <a:xfrm>
+            <a:off x="4331643" y="4169664"/>
             <a:ext cx="685800" cy="475488"/>
           </a:xfrm>
           <a:prstGeom prst="rect">
@@ -27278,13 +27548,13 @@
       </p:sp>
       <p:sp>
         <p:nvSpPr>
-          <p:cNvPr id="38" name="Text 36"/>
-          <p:cNvSpPr/>
-          <p:nvPr/>
-        </p:nvSpPr>
-        <p:spPr>
-          <a:xfrm>
-            <a:off x="6668262" y="4169664"/>
+          <p:cNvPr id="44" name="Text 42"/>
+          <p:cNvSpPr/>
+          <p:nvPr/>
+        </p:nvSpPr>
+        <p:spPr>
+          <a:xfrm>
+            <a:off x="4331643" y="4169664"/>
             <a:ext cx="685800" cy="475488"/>
           </a:xfrm>
           <a:prstGeom prst="rect">
@@ -27301,7 +27571,7 @@
               <a:buNone/>
             </a:pPr>
             <a:r>
-              <a:rPr lang="en-US" sz="1000" b="1" dirty="0">
+              <a:rPr lang="en-US" sz="900" b="1" dirty="0">
                 <a:solidFill>
                   <a:srgbClr val="9D174D"/>
                 </a:solidFill>
@@ -27309,9 +27579,207 @@
                 <a:ea typeface="Trebuchet MS" pitchFamily="34" charset="-122"/>
                 <a:cs typeface="Trebuchet MS" pitchFamily="34" charset="-120"/>
               </a:rPr>
-              <a:t>ing</a:t>
-            </a:r>
-            <a:endParaRPr lang="en-US" sz="1000" dirty="0"/>
+              <a:t>er</a:t>
+            </a:r>
+            <a:endParaRPr lang="en-US" sz="900" dirty="0"/>
+          </a:p>
+        </p:txBody>
+      </p:sp>
+      <p:sp>
+        <p:nvSpPr>
+          <p:cNvPr id="45" name="Shape 43"/>
+          <p:cNvSpPr/>
+          <p:nvPr/>
+        </p:nvSpPr>
+        <p:spPr>
+          <a:xfrm>
+            <a:off x="5370141" y="4169664"/>
+            <a:ext cx="685800" cy="475488"/>
+          </a:xfrm>
+          <a:prstGeom prst="rect">
+            <a:avLst>
+              <a:gd name="adj" fmla="val 7692"/>
+            </a:avLst>
+          </a:prstGeom>
+          <a:solidFill>
+            <a:srgbClr val="FFFFFF"/>
+          </a:solidFill>
+          <a:ln w="12700">
+            <a:solidFill>
+              <a:srgbClr val="DB2777"/>
+            </a:solidFill>
+            <a:prstDash val="solid"/>
+          </a:ln>
+        </p:spPr>
+      </p:sp>
+      <p:sp>
+        <p:nvSpPr>
+          <p:cNvPr id="46" name="Text 44"/>
+          <p:cNvSpPr/>
+          <p:nvPr/>
+        </p:nvSpPr>
+        <p:spPr>
+          <a:xfrm>
+            <a:off x="5370141" y="4169664"/>
+            <a:ext cx="685800" cy="475488"/>
+          </a:xfrm>
+          <a:prstGeom prst="rect">
+            <a:avLst/>
+          </a:prstGeom>
+          <a:noFill/>
+          <a:ln/>
+        </p:spPr>
+        <p:txBody>
+          <a:bodyPr wrap="square" lIns="0" tIns="0" rIns="0" bIns="0" rtlCol="0" anchor="ctr"/>
+          <a:lstStyle/>
+          <a:p>
+            <a:pPr algn="ctr" indent="0" marL="0">
+              <a:buNone/>
+            </a:pPr>
+            <a:r>
+              <a:rPr lang="en-US" sz="900" b="1" dirty="0">
+                <a:solidFill>
+                  <a:srgbClr val="9D174D"/>
+                </a:solidFill>
+                <a:latin typeface="Trebuchet MS" pitchFamily="34" charset="0"/>
+                <a:ea typeface="Trebuchet MS" pitchFamily="34" charset="-122"/>
+                <a:cs typeface="Trebuchet MS" pitchFamily="34" charset="-120"/>
+              </a:rPr>
+              <a:t>gr</a:t>
+            </a:r>
+            <a:endParaRPr lang="en-US" sz="900" dirty="0"/>
+          </a:p>
+        </p:txBody>
+      </p:sp>
+      <p:sp>
+        <p:nvSpPr>
+          <p:cNvPr id="47" name="Shape 45"/>
+          <p:cNvSpPr/>
+          <p:nvPr/>
+        </p:nvSpPr>
+        <p:spPr>
+          <a:xfrm>
+            <a:off x="6408638" y="4169664"/>
+            <a:ext cx="685800" cy="475488"/>
+          </a:xfrm>
+          <a:prstGeom prst="rect">
+            <a:avLst>
+              <a:gd name="adj" fmla="val 7692"/>
+            </a:avLst>
+          </a:prstGeom>
+          <a:solidFill>
+            <a:srgbClr val="FFFFFF"/>
+          </a:solidFill>
+          <a:ln w="12700">
+            <a:solidFill>
+              <a:srgbClr val="DB2777"/>
+            </a:solidFill>
+            <a:prstDash val="solid"/>
+          </a:ln>
+        </p:spPr>
+      </p:sp>
+      <p:sp>
+        <p:nvSpPr>
+          <p:cNvPr id="48" name="Text 46"/>
+          <p:cNvSpPr/>
+          <p:nvPr/>
+        </p:nvSpPr>
+        <p:spPr>
+          <a:xfrm>
+            <a:off x="6408638" y="4169664"/>
+            <a:ext cx="685800" cy="475488"/>
+          </a:xfrm>
+          <a:prstGeom prst="rect">
+            <a:avLst/>
+          </a:prstGeom>
+          <a:noFill/>
+          <a:ln/>
+        </p:spPr>
+        <p:txBody>
+          <a:bodyPr wrap="square" lIns="0" tIns="0" rIns="0" bIns="0" rtlCol="0" anchor="ctr"/>
+          <a:lstStyle/>
+          <a:p>
+            <a:pPr algn="ctr" indent="0" marL="0">
+              <a:buNone/>
+            </a:pPr>
+            <a:r>
+              <a:rPr lang="en-US" sz="900" b="1" dirty="0">
+                <a:solidFill>
+                  <a:srgbClr val="9D174D"/>
+                </a:solidFill>
+                <a:latin typeface="Trebuchet MS" pitchFamily="34" charset="0"/>
+                <a:ea typeface="Trebuchet MS" pitchFamily="34" charset="-122"/>
+                <a:cs typeface="Trebuchet MS" pitchFamily="34" charset="-120"/>
+              </a:rPr>
+              <a:t>ow</a:t>
+            </a:r>
+            <a:endParaRPr lang="en-US" sz="900" dirty="0"/>
+          </a:p>
+        </p:txBody>
+      </p:sp>
+      <p:sp>
+        <p:nvSpPr>
+          <p:cNvPr id="49" name="Shape 47"/>
+          <p:cNvSpPr/>
+          <p:nvPr/>
+        </p:nvSpPr>
+        <p:spPr>
+          <a:xfrm>
+            <a:off x="7447135" y="4169664"/>
+            <a:ext cx="685800" cy="475488"/>
+          </a:xfrm>
+          <a:prstGeom prst="rect">
+            <a:avLst>
+              <a:gd name="adj" fmla="val 7692"/>
+            </a:avLst>
+          </a:prstGeom>
+          <a:solidFill>
+            <a:srgbClr val="FFFFFF"/>
+          </a:solidFill>
+          <a:ln w="12700">
+            <a:solidFill>
+              <a:srgbClr val="DB2777"/>
+            </a:solidFill>
+            <a:prstDash val="solid"/>
+          </a:ln>
+        </p:spPr>
+      </p:sp>
+      <p:sp>
+        <p:nvSpPr>
+          <p:cNvPr id="50" name="Text 48"/>
+          <p:cNvSpPr/>
+          <p:nvPr/>
+        </p:nvSpPr>
+        <p:spPr>
+          <a:xfrm>
+            <a:off x="7447135" y="4169664"/>
+            <a:ext cx="685800" cy="475488"/>
+          </a:xfrm>
+          <a:prstGeom prst="rect">
+            <a:avLst/>
+          </a:prstGeom>
+          <a:noFill/>
+          <a:ln/>
+        </p:spPr>
+        <p:txBody>
+          <a:bodyPr wrap="square" lIns="0" tIns="0" rIns="0" bIns="0" rtlCol="0" anchor="ctr"/>
+          <a:lstStyle/>
+          <a:p>
+            <a:pPr algn="ctr" indent="0" marL="0">
+              <a:buNone/>
+            </a:pPr>
+            <a:r>
+              <a:rPr lang="en-US" sz="900" b="1" dirty="0">
+                <a:solidFill>
+                  <a:srgbClr val="9D174D"/>
+                </a:solidFill>
+                <a:latin typeface="Trebuchet MS" pitchFamily="34" charset="0"/>
+                <a:ea typeface="Trebuchet MS" pitchFamily="34" charset="-122"/>
+                <a:cs typeface="Trebuchet MS" pitchFamily="34" charset="-120"/>
+              </a:rPr>
+              <a:t>n</a:t>
+            </a:r>
+            <a:endParaRPr lang="en-US" sz="900" dirty="0"/>
           </a:p>
         </p:txBody>
       </p:sp>
@@ -27740,7 +28208,7 @@
                 <a:ea typeface="Trebuchet MS" pitchFamily="34" charset="-122"/>
                 <a:cs typeface="Trebuchet MS" pitchFamily="34" charset="-120"/>
               </a:rPr>
-              <a:t>regrowth</a:t>
+              <a:t>growing</a:t>
             </a:r>
             <a:endParaRPr lang="en-US" sz="2800" dirty="0"/>
           </a:p>
@@ -28567,7 +29035,7 @@
                 <a:ea typeface="Trebuchet MS" pitchFamily="34" charset="-122"/>
                 <a:cs typeface="Trebuchet MS" pitchFamily="34" charset="-120"/>
               </a:rPr>
-              <a:t>regrowth</a:t>
+              <a:t>growing</a:t>
             </a:r>
             <a:endParaRPr lang="en-US" sz="2800" dirty="0"/>
           </a:p>
@@ -28647,7 +29115,7 @@
         </p:nvSpPr>
         <p:spPr>
           <a:xfrm>
-            <a:off x="2221992" y="2258568"/>
+            <a:off x="2938272" y="2258568"/>
             <a:ext cx="1828800" cy="292608"/>
           </a:xfrm>
           <a:prstGeom prst="rect">
@@ -28656,11 +29124,11 @@
             </a:avLst>
           </a:prstGeom>
           <a:solidFill>
-            <a:srgbClr val="DDD6FE"/>
+            <a:srgbClr val="CCFBF1"/>
           </a:solidFill>
           <a:ln w="19050">
             <a:solidFill>
-              <a:srgbClr val="7C3AED"/>
+              <a:srgbClr val="0D9488"/>
             </a:solidFill>
             <a:prstDash val="solid"/>
           </a:ln>
@@ -28681,7 +29149,7 @@
         </p:nvSpPr>
         <p:spPr>
           <a:xfrm>
-            <a:off x="2221992" y="2258568"/>
+            <a:off x="2938272" y="2258568"/>
             <a:ext cx="1828800" cy="292608"/>
           </a:xfrm>
           <a:prstGeom prst="rect">
@@ -28700,13 +29168,13 @@
             <a:r>
               <a:rPr lang="en-US" sz="1300" b="1" dirty="0">
                 <a:solidFill>
-                  <a:srgbClr val="4C1D95"/>
+                  <a:srgbClr val="0F766E"/>
                 </a:solidFill>
                 <a:latin typeface="Trebuchet MS" pitchFamily="34" charset="0"/>
                 <a:ea typeface="Trebuchet MS" pitchFamily="34" charset="-122"/>
                 <a:cs typeface="Trebuchet MS" pitchFamily="34" charset="-120"/>
               </a:rPr>
-              <a:t>re</a:t>
+              <a:t>grow</a:t>
             </a:r>
             <a:endParaRPr lang="en-US" sz="1300" dirty="0"/>
           </a:p>
@@ -28720,7 +29188,7 @@
         </p:nvSpPr>
         <p:spPr>
           <a:xfrm>
-            <a:off x="2221992" y="2569464"/>
+            <a:off x="2938272" y="2569464"/>
             <a:ext cx="1828800" cy="201168"/>
           </a:xfrm>
           <a:prstGeom prst="rect">
@@ -28745,7 +29213,7 @@
                 <a:ea typeface="Calibri" pitchFamily="34" charset="-122"/>
                 <a:cs typeface="Calibri" pitchFamily="34" charset="-120"/>
               </a:rPr>
-              <a:t>again</a:t>
+              <a:t>to increase in size</a:t>
             </a:r>
             <a:endParaRPr lang="en-US" sz="850" dirty="0"/>
           </a:p>
@@ -28759,7 +29227,7 @@
         </p:nvSpPr>
         <p:spPr>
           <a:xfrm>
-            <a:off x="4370832" y="2258568"/>
+            <a:off x="5803392" y="2258568"/>
             <a:ext cx="1828800" cy="292608"/>
           </a:xfrm>
           <a:prstGeom prst="rect">
@@ -28768,11 +29236,11 @@
             </a:avLst>
           </a:prstGeom>
           <a:solidFill>
-            <a:srgbClr val="CCFBF1"/>
+            <a:srgbClr val="FCE7F3"/>
           </a:solidFill>
           <a:ln w="19050">
             <a:solidFill>
-              <a:srgbClr val="0D9488"/>
+              <a:srgbClr val="DB2777"/>
             </a:solidFill>
             <a:prstDash val="solid"/>
           </a:ln>
@@ -28793,7 +29261,7 @@
         </p:nvSpPr>
         <p:spPr>
           <a:xfrm>
-            <a:off x="4370832" y="2258568"/>
+            <a:off x="5803392" y="2258568"/>
             <a:ext cx="1828800" cy="292608"/>
           </a:xfrm>
           <a:prstGeom prst="rect">
@@ -28812,13 +29280,13 @@
             <a:r>
               <a:rPr lang="en-US" sz="1300" b="1" dirty="0">
                 <a:solidFill>
-                  <a:srgbClr val="0F766E"/>
+                  <a:srgbClr val="9D174D"/>
                 </a:solidFill>
                 <a:latin typeface="Trebuchet MS" pitchFamily="34" charset="0"/>
                 <a:ea typeface="Trebuchet MS" pitchFamily="34" charset="-122"/>
                 <a:cs typeface="Trebuchet MS" pitchFamily="34" charset="-120"/>
               </a:rPr>
-              <a:t>grow</a:t>
+              <a:t>ing</a:t>
             </a:r>
             <a:endParaRPr lang="en-US" sz="1300" dirty="0"/>
           </a:p>
@@ -28832,7 +29300,7 @@
         </p:nvSpPr>
         <p:spPr>
           <a:xfrm>
-            <a:off x="4370832" y="2569464"/>
+            <a:off x="5803392" y="2569464"/>
             <a:ext cx="1828800" cy="201168"/>
           </a:xfrm>
           <a:prstGeom prst="rect">
@@ -28857,7 +29325,7 @@
                 <a:ea typeface="Calibri" pitchFamily="34" charset="-122"/>
                 <a:cs typeface="Calibri" pitchFamily="34" charset="-120"/>
               </a:rPr>
-              <a:t>to increase in size</a:t>
+              <a:t>happening right now</a:t>
             </a:r>
             <a:endParaRPr lang="en-US" sz="850" dirty="0"/>
           </a:p>
@@ -28871,30 +29339,23 @@
         </p:nvSpPr>
         <p:spPr>
           <a:xfrm>
-            <a:off x="6519672" y="2258568"/>
-            <a:ext cx="1828800" cy="292608"/>
+            <a:off x="365760" y="3273552"/>
+            <a:ext cx="1371600" cy="658368"/>
           </a:xfrm>
           <a:prstGeom prst="rect">
             <a:avLst>
-              <a:gd name="adj" fmla="val 25000"/>
+              <a:gd name="adj" fmla="val 8333"/>
             </a:avLst>
           </a:prstGeom>
           <a:solidFill>
-            <a:srgbClr val="FCE7F3"/>
-          </a:solidFill>
-          <a:ln w="19050">
-            <a:solidFill>
-              <a:srgbClr val="DB2777"/>
-            </a:solidFill>
-            <a:prstDash val="solid"/>
-          </a:ln>
-          <a:effectLst>
-            <a:outerShdw sx="100000" sy="100000" kx="0" ky="0" algn="bl" rotWithShape="0" blurRad="101600" dist="38100" dir="8100000">
-              <a:srgbClr val="000000">
-                <a:alpha val="12000"/>
-              </a:srgbClr>
-            </a:outerShdw>
-          </a:effectLst>
+            <a:srgbClr val="E2E8F0"/>
+          </a:solidFill>
+          <a:ln w="12700">
+            <a:solidFill>
+              <a:srgbClr val="E2E8F0"/>
+            </a:solidFill>
+            <a:prstDash val="solid"/>
+          </a:ln>
         </p:spPr>
       </p:sp>
       <p:sp>
@@ -28905,8 +29366,8 @@
         </p:nvSpPr>
         <p:spPr>
           <a:xfrm>
-            <a:off x="6519672" y="2258568"/>
-            <a:ext cx="1828800" cy="292608"/>
+            <a:off x="365760" y="3273552"/>
+            <a:ext cx="1371600" cy="658368"/>
           </a:xfrm>
           <a:prstGeom prst="rect">
             <a:avLst/>
@@ -28922,73 +29383,100 @@
               <a:buNone/>
             </a:pPr>
             <a:r>
-              <a:rPr lang="en-US" sz="1300" b="1" dirty="0">
-                <a:solidFill>
-                  <a:srgbClr val="9D174D"/>
+              <a:rPr lang="en-US" sz="1100" b="1" dirty="0">
+                <a:solidFill>
+                  <a:srgbClr val="475569"/>
                 </a:solidFill>
                 <a:latin typeface="Trebuchet MS" pitchFamily="34" charset="0"/>
                 <a:ea typeface="Trebuchet MS" pitchFamily="34" charset="-122"/>
                 <a:cs typeface="Trebuchet MS" pitchFamily="34" charset="-120"/>
               </a:rPr>
-              <a:t>th</a:t>
-            </a:r>
-            <a:endParaRPr lang="en-US" sz="1300" dirty="0"/>
-          </a:p>
-        </p:txBody>
-      </p:sp>
-      <p:sp>
-        <p:nvSpPr>
-          <p:cNvPr id="24" name="Text 22"/>
-          <p:cNvSpPr/>
-          <p:nvPr/>
-        </p:nvSpPr>
-        <p:spPr>
-          <a:xfrm>
-            <a:off x="6519672" y="2569464"/>
-            <a:ext cx="1828800" cy="201168"/>
-          </a:xfrm>
-          <a:prstGeom prst="rect">
-            <a:avLst/>
-          </a:prstGeom>
-          <a:noFill/>
-          <a:ln/>
-        </p:spPr>
-        <p:txBody>
-          <a:bodyPr wrap="square" lIns="0" tIns="0" rIns="0" bIns="0" rtlCol="0" anchor="t"/>
-          <a:lstStyle/>
-          <a:p>
-            <a:pPr algn="ctr" indent="0" marL="0">
-              <a:buNone/>
-            </a:pPr>
-            <a:r>
-              <a:rPr lang="en-US" sz="850" dirty="0">
-                <a:solidFill>
-                  <a:srgbClr val="475569"/>
+              <a:t>Syllables</a:t>
+            </a:r>
+            <a:endParaRPr lang="en-US" sz="1100" dirty="0"/>
+          </a:p>
+        </p:txBody>
+      </p:sp>
+      <p:sp>
+        <p:nvSpPr>
+          <p:cNvPr id="24" name="Shape 22"/>
+          <p:cNvSpPr/>
+          <p:nvPr/>
+        </p:nvSpPr>
+        <p:spPr>
+          <a:xfrm>
+            <a:off x="1874520" y="3273552"/>
+            <a:ext cx="6903720" cy="658368"/>
+          </a:xfrm>
+          <a:prstGeom prst="rect">
+            <a:avLst>
+              <a:gd name="adj" fmla="val 8333"/>
+            </a:avLst>
+          </a:prstGeom>
+          <a:solidFill>
+            <a:srgbClr val="F8FAFC"/>
+          </a:solidFill>
+          <a:ln w="12700">
+            <a:solidFill>
+              <a:srgbClr val="E2E8F0"/>
+            </a:solidFill>
+            <a:prstDash val="dash"/>
+          </a:ln>
+        </p:spPr>
+      </p:sp>
+      <p:sp>
+        <p:nvSpPr>
+          <p:cNvPr id="25" name="Text 23"/>
+          <p:cNvSpPr/>
+          <p:nvPr/>
+        </p:nvSpPr>
+        <p:spPr>
+          <a:xfrm>
+            <a:off x="1874520" y="3273552"/>
+            <a:ext cx="6903720" cy="658368"/>
+          </a:xfrm>
+          <a:prstGeom prst="rect">
+            <a:avLst/>
+          </a:prstGeom>
+          <a:noFill/>
+          <a:ln/>
+        </p:spPr>
+        <p:txBody>
+          <a:bodyPr wrap="square" rtlCol="0" anchor="ctr"/>
+          <a:lstStyle/>
+          <a:p>
+            <a:pPr algn="ctr" indent="0" marL="0">
+              <a:buNone/>
+            </a:pPr>
+            <a:r>
+              <a:rPr lang="en-US" sz="1100" i="1" dirty="0">
+                <a:solidFill>
+                  <a:srgbClr val="CBD5E1"/>
                 </a:solidFill>
                 <a:latin typeface="Calibri" pitchFamily="34" charset="0"/>
                 <a:ea typeface="Calibri" pitchFamily="34" charset="-122"/>
                 <a:cs typeface="Calibri" pitchFamily="34" charset="-120"/>
               </a:rPr>
-              <a:t>the result or state of</a:t>
-            </a:r>
-            <a:endParaRPr lang="en-US" sz="850" dirty="0"/>
-          </a:p>
-        </p:txBody>
-      </p:sp>
-      <p:sp>
-        <p:nvSpPr>
-          <p:cNvPr id="25" name="Shape 23"/>
-          <p:cNvSpPr/>
-          <p:nvPr/>
-        </p:nvSpPr>
-        <p:spPr>
-          <a:xfrm>
-            <a:off x="365760" y="3273552"/>
-            <a:ext cx="1371600" cy="658368"/>
+              <a:t>Write here...</a:t>
+            </a:r>
+            <a:endParaRPr lang="en-US" sz="1100" dirty="0"/>
+          </a:p>
+        </p:txBody>
+      </p:sp>
+      <p:sp>
+        <p:nvSpPr>
+          <p:cNvPr id="26" name="Shape 24"/>
+          <p:cNvSpPr/>
+          <p:nvPr/>
+        </p:nvSpPr>
+        <p:spPr>
+          <a:xfrm>
+            <a:off x="365760" y="4096512"/>
+            <a:ext cx="1371600" cy="804672"/>
           </a:xfrm>
           <a:prstGeom prst="rect">
             <a:avLst>
-              <a:gd name="adj" fmla="val 8333"/>
+              <a:gd name="adj" fmla="val 6818"/>
             </a:avLst>
           </a:prstGeom>
           <a:solidFill>
@@ -29004,14 +29492,14 @@
       </p:sp>
       <p:sp>
         <p:nvSpPr>
-          <p:cNvPr id="26" name="Text 24"/>
-          <p:cNvSpPr/>
-          <p:nvPr/>
-        </p:nvSpPr>
-        <p:spPr>
-          <a:xfrm>
-            <a:off x="365760" y="3273552"/>
-            <a:ext cx="1371600" cy="658368"/>
+          <p:cNvPr id="27" name="Text 25"/>
+          <p:cNvSpPr/>
+          <p:nvPr/>
+        </p:nvSpPr>
+        <p:spPr>
+          <a:xfrm>
+            <a:off x="365760" y="4096512"/>
+            <a:ext cx="1371600" cy="804672"/>
           </a:xfrm>
           <a:prstGeom prst="rect">
             <a:avLst/>
@@ -29035,7 +29523,7 @@
                 <a:ea typeface="Trebuchet MS" pitchFamily="34" charset="-122"/>
                 <a:cs typeface="Trebuchet MS" pitchFamily="34" charset="-120"/>
               </a:rPr>
-              <a:t>Syllables</a:t>
+              <a:t>Phonemes</a:t>
             </a:r>
             <a:endParaRPr lang="en-US" sz="1100" dirty="0"/>
           </a:p>
@@ -29043,80 +29531,14 @@
       </p:sp>
       <p:sp>
         <p:nvSpPr>
-          <p:cNvPr id="27" name="Shape 25"/>
-          <p:cNvSpPr/>
-          <p:nvPr/>
-        </p:nvSpPr>
-        <p:spPr>
-          <a:xfrm>
-            <a:off x="1874520" y="3273552"/>
-            <a:ext cx="6903720" cy="658368"/>
-          </a:xfrm>
-          <a:prstGeom prst="rect">
-            <a:avLst>
-              <a:gd name="adj" fmla="val 8333"/>
-            </a:avLst>
-          </a:prstGeom>
-          <a:solidFill>
-            <a:srgbClr val="F8FAFC"/>
-          </a:solidFill>
-          <a:ln w="12700">
-            <a:solidFill>
-              <a:srgbClr val="E2E8F0"/>
-            </a:solidFill>
-            <a:prstDash val="dash"/>
-          </a:ln>
-        </p:spPr>
-      </p:sp>
-      <p:sp>
-        <p:nvSpPr>
-          <p:cNvPr id="28" name="Text 26"/>
-          <p:cNvSpPr/>
-          <p:nvPr/>
-        </p:nvSpPr>
-        <p:spPr>
-          <a:xfrm>
-            <a:off x="1874520" y="3273552"/>
-            <a:ext cx="6903720" cy="658368"/>
-          </a:xfrm>
-          <a:prstGeom prst="rect">
-            <a:avLst/>
-          </a:prstGeom>
-          <a:noFill/>
-          <a:ln/>
-        </p:spPr>
-        <p:txBody>
-          <a:bodyPr wrap="square" rtlCol="0" anchor="ctr"/>
-          <a:lstStyle/>
-          <a:p>
-            <a:pPr algn="ctr" indent="0" marL="0">
-              <a:buNone/>
-            </a:pPr>
-            <a:r>
-              <a:rPr lang="en-US" sz="1100" i="1" dirty="0">
-                <a:solidFill>
-                  <a:srgbClr val="CBD5E1"/>
-                </a:solidFill>
-                <a:latin typeface="Calibri" pitchFamily="34" charset="0"/>
-                <a:ea typeface="Calibri" pitchFamily="34" charset="-122"/>
-                <a:cs typeface="Calibri" pitchFamily="34" charset="-120"/>
-              </a:rPr>
-              <a:t>Write here...</a:t>
-            </a:r>
-            <a:endParaRPr lang="en-US" sz="1100" dirty="0"/>
-          </a:p>
-        </p:txBody>
-      </p:sp>
-      <p:sp>
-        <p:nvSpPr>
-          <p:cNvPr id="29" name="Shape 27"/>
-          <p:cNvSpPr/>
-          <p:nvPr/>
-        </p:nvSpPr>
-        <p:spPr>
-          <a:xfrm>
-            <a:off x="365760" y="4096512"/>
-            <a:ext cx="1371600" cy="804672"/>
+          <p:cNvPr id="28" name="Shape 26"/>
+          <p:cNvSpPr/>
+          <p:nvPr/>
+        </p:nvSpPr>
+        <p:spPr>
+          <a:xfrm>
+            <a:off x="1874520" y="4096512"/>
+            <a:ext cx="6903720" cy="804672"/>
           </a:xfrm>
           <a:prstGeom prst="rect">
             <a:avLst>
@@ -29124,85 +29546,19 @@
             </a:avLst>
           </a:prstGeom>
           <a:solidFill>
-            <a:srgbClr val="E2E8F0"/>
+            <a:srgbClr val="F8FAFC"/>
           </a:solidFill>
           <a:ln w="12700">
             <a:solidFill>
               <a:srgbClr val="E2E8F0"/>
             </a:solidFill>
-            <a:prstDash val="solid"/>
-          </a:ln>
-        </p:spPr>
-      </p:sp>
-      <p:sp>
-        <p:nvSpPr>
-          <p:cNvPr id="30" name="Text 28"/>
-          <p:cNvSpPr/>
-          <p:nvPr/>
-        </p:nvSpPr>
-        <p:spPr>
-          <a:xfrm>
-            <a:off x="365760" y="4096512"/>
-            <a:ext cx="1371600" cy="804672"/>
-          </a:xfrm>
-          <a:prstGeom prst="rect">
-            <a:avLst/>
-          </a:prstGeom>
-          <a:noFill/>
-          <a:ln/>
-        </p:spPr>
-        <p:txBody>
-          <a:bodyPr wrap="square" lIns="0" tIns="0" rIns="0" bIns="0" rtlCol="0" anchor="ctr"/>
-          <a:lstStyle/>
-          <a:p>
-            <a:pPr algn="ctr" indent="0" marL="0">
-              <a:buNone/>
-            </a:pPr>
-            <a:r>
-              <a:rPr lang="en-US" sz="1100" b="1" dirty="0">
-                <a:solidFill>
-                  <a:srgbClr val="475569"/>
-                </a:solidFill>
-                <a:latin typeface="Trebuchet MS" pitchFamily="34" charset="0"/>
-                <a:ea typeface="Trebuchet MS" pitchFamily="34" charset="-122"/>
-                <a:cs typeface="Trebuchet MS" pitchFamily="34" charset="-120"/>
-              </a:rPr>
-              <a:t>Phonemes</a:t>
-            </a:r>
-            <a:endParaRPr lang="en-US" sz="1100" dirty="0"/>
-          </a:p>
-        </p:txBody>
-      </p:sp>
-      <p:sp>
-        <p:nvSpPr>
-          <p:cNvPr id="31" name="Shape 29"/>
-          <p:cNvSpPr/>
-          <p:nvPr/>
-        </p:nvSpPr>
-        <p:spPr>
-          <a:xfrm>
-            <a:off x="1874520" y="4096512"/>
-            <a:ext cx="6903720" cy="804672"/>
-          </a:xfrm>
-          <a:prstGeom prst="rect">
-            <a:avLst>
-              <a:gd name="adj" fmla="val 6818"/>
-            </a:avLst>
-          </a:prstGeom>
-          <a:solidFill>
-            <a:srgbClr val="F8FAFC"/>
-          </a:solidFill>
-          <a:ln w="12700">
-            <a:solidFill>
-              <a:srgbClr val="E2E8F0"/>
-            </a:solidFill>
             <a:prstDash val="dash"/>
           </a:ln>
         </p:spPr>
       </p:sp>
       <p:sp>
         <p:nvSpPr>
-          <p:cNvPr id="32" name="Text 30"/>
+          <p:cNvPr id="29" name="Text 27"/>
           <p:cNvSpPr/>
           <p:nvPr/>
         </p:nvSpPr>
@@ -29664,7 +30020,7 @@
                 <a:ea typeface="Trebuchet MS" pitchFamily="34" charset="-122"/>
                 <a:cs typeface="Trebuchet MS" pitchFamily="34" charset="-120"/>
               </a:rPr>
-              <a:t>regrowth</a:t>
+              <a:t>growing</a:t>
             </a:r>
             <a:endParaRPr lang="en-US" sz="2800" dirty="0"/>
           </a:p>
@@ -29744,7 +30100,7 @@
         </p:nvSpPr>
         <p:spPr>
           <a:xfrm>
-            <a:off x="2221992" y="2258568"/>
+            <a:off x="2938272" y="2258568"/>
             <a:ext cx="1828800" cy="292608"/>
           </a:xfrm>
           <a:prstGeom prst="rect">
@@ -29753,11 +30109,11 @@
             </a:avLst>
           </a:prstGeom>
           <a:solidFill>
-            <a:srgbClr val="DDD6FE"/>
+            <a:srgbClr val="CCFBF1"/>
           </a:solidFill>
           <a:ln w="19050">
             <a:solidFill>
-              <a:srgbClr val="7C3AED"/>
+              <a:srgbClr val="0D9488"/>
             </a:solidFill>
             <a:prstDash val="solid"/>
           </a:ln>
@@ -29778,7 +30134,7 @@
         </p:nvSpPr>
         <p:spPr>
           <a:xfrm>
-            <a:off x="2221992" y="2258568"/>
+            <a:off x="2938272" y="2258568"/>
             <a:ext cx="1828800" cy="292608"/>
           </a:xfrm>
           <a:prstGeom prst="rect">
@@ -29797,13 +30153,13 @@
             <a:r>
               <a:rPr lang="en-US" sz="1300" b="1" dirty="0">
                 <a:solidFill>
-                  <a:srgbClr val="4C1D95"/>
+                  <a:srgbClr val="0F766E"/>
                 </a:solidFill>
                 <a:latin typeface="Trebuchet MS" pitchFamily="34" charset="0"/>
                 <a:ea typeface="Trebuchet MS" pitchFamily="34" charset="-122"/>
                 <a:cs typeface="Trebuchet MS" pitchFamily="34" charset="-120"/>
               </a:rPr>
-              <a:t>re</a:t>
+              <a:t>grow</a:t>
             </a:r>
             <a:endParaRPr lang="en-US" sz="1300" dirty="0"/>
           </a:p>
@@ -29817,7 +30173,7 @@
         </p:nvSpPr>
         <p:spPr>
           <a:xfrm>
-            <a:off x="2221992" y="2569464"/>
+            <a:off x="2938272" y="2569464"/>
             <a:ext cx="1828800" cy="201168"/>
           </a:xfrm>
           <a:prstGeom prst="rect">
@@ -29842,7 +30198,7 @@
                 <a:ea typeface="Calibri" pitchFamily="34" charset="-122"/>
                 <a:cs typeface="Calibri" pitchFamily="34" charset="-120"/>
               </a:rPr>
-              <a:t>again</a:t>
+              <a:t>to increase in size</a:t>
             </a:r>
             <a:endParaRPr lang="en-US" sz="850" dirty="0"/>
           </a:p>
@@ -29856,7 +30212,7 @@
         </p:nvSpPr>
         <p:spPr>
           <a:xfrm>
-            <a:off x="4370832" y="2258568"/>
+            <a:off x="5803392" y="2258568"/>
             <a:ext cx="1828800" cy="292608"/>
           </a:xfrm>
           <a:prstGeom prst="rect">
@@ -29865,11 +30221,11 @@
             </a:avLst>
           </a:prstGeom>
           <a:solidFill>
-            <a:srgbClr val="CCFBF1"/>
+            <a:srgbClr val="FCE7F3"/>
           </a:solidFill>
           <a:ln w="19050">
             <a:solidFill>
-              <a:srgbClr val="0D9488"/>
+              <a:srgbClr val="DB2777"/>
             </a:solidFill>
             <a:prstDash val="solid"/>
           </a:ln>
@@ -29890,7 +30246,7 @@
         </p:nvSpPr>
         <p:spPr>
           <a:xfrm>
-            <a:off x="4370832" y="2258568"/>
+            <a:off x="5803392" y="2258568"/>
             <a:ext cx="1828800" cy="292608"/>
           </a:xfrm>
           <a:prstGeom prst="rect">
@@ -29909,13 +30265,13 @@
             <a:r>
               <a:rPr lang="en-US" sz="1300" b="1" dirty="0">
                 <a:solidFill>
-                  <a:srgbClr val="0F766E"/>
+                  <a:srgbClr val="9D174D"/>
                 </a:solidFill>
                 <a:latin typeface="Trebuchet MS" pitchFamily="34" charset="0"/>
                 <a:ea typeface="Trebuchet MS" pitchFamily="34" charset="-122"/>
                 <a:cs typeface="Trebuchet MS" pitchFamily="34" charset="-120"/>
               </a:rPr>
-              <a:t>grow</a:t>
+              <a:t>ing</a:t>
             </a:r>
             <a:endParaRPr lang="en-US" sz="1300" dirty="0"/>
           </a:p>
@@ -29929,7 +30285,7 @@
         </p:nvSpPr>
         <p:spPr>
           <a:xfrm>
-            <a:off x="4370832" y="2569464"/>
+            <a:off x="5803392" y="2569464"/>
             <a:ext cx="1828800" cy="201168"/>
           </a:xfrm>
           <a:prstGeom prst="rect">
@@ -29954,7 +30310,7 @@
                 <a:ea typeface="Calibri" pitchFamily="34" charset="-122"/>
                 <a:cs typeface="Calibri" pitchFamily="34" charset="-120"/>
               </a:rPr>
-              <a:t>to increase in size</a:t>
+              <a:t>happening right now</a:t>
             </a:r>
             <a:endParaRPr lang="en-US" sz="850" dirty="0"/>
           </a:p>
@@ -29968,30 +30324,23 @@
         </p:nvSpPr>
         <p:spPr>
           <a:xfrm>
-            <a:off x="6519672" y="2258568"/>
-            <a:ext cx="1828800" cy="292608"/>
+            <a:off x="365760" y="3273552"/>
+            <a:ext cx="1371600" cy="658368"/>
           </a:xfrm>
           <a:prstGeom prst="rect">
             <a:avLst>
-              <a:gd name="adj" fmla="val 25000"/>
+              <a:gd name="adj" fmla="val 8333"/>
             </a:avLst>
           </a:prstGeom>
           <a:solidFill>
-            <a:srgbClr val="FCE7F3"/>
-          </a:solidFill>
-          <a:ln w="19050">
-            <a:solidFill>
-              <a:srgbClr val="DB2777"/>
-            </a:solidFill>
-            <a:prstDash val="solid"/>
-          </a:ln>
-          <a:effectLst>
-            <a:outerShdw sx="100000" sy="100000" kx="0" ky="0" algn="bl" rotWithShape="0" blurRad="101600" dist="38100" dir="8100000">
-              <a:srgbClr val="000000">
-                <a:alpha val="12000"/>
-              </a:srgbClr>
-            </a:outerShdw>
-          </a:effectLst>
+            <a:srgbClr val="E2E8F0"/>
+          </a:solidFill>
+          <a:ln w="12700">
+            <a:solidFill>
+              <a:srgbClr val="E2E8F0"/>
+            </a:solidFill>
+            <a:prstDash val="solid"/>
+          </a:ln>
         </p:spPr>
       </p:sp>
       <p:sp>
@@ -30002,8 +30351,8 @@
         </p:nvSpPr>
         <p:spPr>
           <a:xfrm>
-            <a:off x="6519672" y="2258568"/>
-            <a:ext cx="1828800" cy="292608"/>
+            <a:off x="365760" y="3273552"/>
+            <a:ext cx="1371600" cy="658368"/>
           </a:xfrm>
           <a:prstGeom prst="rect">
             <a:avLst/>
@@ -30019,69 +30368,30 @@
               <a:buNone/>
             </a:pPr>
             <a:r>
-              <a:rPr lang="en-US" sz="1300" b="1" dirty="0">
-                <a:solidFill>
-                  <a:srgbClr val="9D174D"/>
+              <a:rPr lang="en-US" sz="1100" b="1" dirty="0">
+                <a:solidFill>
+                  <a:srgbClr val="475569"/>
                 </a:solidFill>
                 <a:latin typeface="Trebuchet MS" pitchFamily="34" charset="0"/>
                 <a:ea typeface="Trebuchet MS" pitchFamily="34" charset="-122"/>
                 <a:cs typeface="Trebuchet MS" pitchFamily="34" charset="-120"/>
               </a:rPr>
-              <a:t>th</a:t>
-            </a:r>
-            <a:endParaRPr lang="en-US" sz="1300" dirty="0"/>
-          </a:p>
-        </p:txBody>
-      </p:sp>
-      <p:sp>
-        <p:nvSpPr>
-          <p:cNvPr id="24" name="Text 22"/>
-          <p:cNvSpPr/>
-          <p:nvPr/>
-        </p:nvSpPr>
-        <p:spPr>
-          <a:xfrm>
-            <a:off x="6519672" y="2569464"/>
-            <a:ext cx="1828800" cy="201168"/>
-          </a:xfrm>
-          <a:prstGeom prst="rect">
-            <a:avLst/>
-          </a:prstGeom>
-          <a:noFill/>
-          <a:ln/>
-        </p:spPr>
-        <p:txBody>
-          <a:bodyPr wrap="square" lIns="0" tIns="0" rIns="0" bIns="0" rtlCol="0" anchor="t"/>
-          <a:lstStyle/>
-          <a:p>
-            <a:pPr algn="ctr" indent="0" marL="0">
-              <a:buNone/>
-            </a:pPr>
-            <a:r>
-              <a:rPr lang="en-US" sz="850" dirty="0">
-                <a:solidFill>
-                  <a:srgbClr val="475569"/>
-                </a:solidFill>
-                <a:latin typeface="Calibri" pitchFamily="34" charset="0"/>
-                <a:ea typeface="Calibri" pitchFamily="34" charset="-122"/>
-                <a:cs typeface="Calibri" pitchFamily="34" charset="-120"/>
-              </a:rPr>
-              <a:t>the result or state of</a:t>
-            </a:r>
-            <a:endParaRPr lang="en-US" sz="850" dirty="0"/>
-          </a:p>
-        </p:txBody>
-      </p:sp>
-      <p:sp>
-        <p:nvSpPr>
-          <p:cNvPr id="25" name="Shape 23"/>
-          <p:cNvSpPr/>
-          <p:nvPr/>
-        </p:nvSpPr>
-        <p:spPr>
-          <a:xfrm>
-            <a:off x="365760" y="3273552"/>
-            <a:ext cx="1371600" cy="658368"/>
+              <a:t>Syllables</a:t>
+            </a:r>
+            <a:endParaRPr lang="en-US" sz="1100" dirty="0"/>
+          </a:p>
+        </p:txBody>
+      </p:sp>
+      <p:sp>
+        <p:nvSpPr>
+          <p:cNvPr id="24" name="Shape 22"/>
+          <p:cNvSpPr/>
+          <p:nvPr/>
+        </p:nvSpPr>
+        <p:spPr>
+          <a:xfrm>
+            <a:off x="1874520" y="3273552"/>
+            <a:ext cx="6903720" cy="658368"/>
           </a:xfrm>
           <a:prstGeom prst="rect">
             <a:avLst>
@@ -30089,11 +30399,38 @@
             </a:avLst>
           </a:prstGeom>
           <a:solidFill>
-            <a:srgbClr val="E2E8F0"/>
-          </a:solidFill>
-          <a:ln w="12700">
-            <a:solidFill>
-              <a:srgbClr val="E2E8F0"/>
+            <a:srgbClr val="CCFBF1"/>
+          </a:solidFill>
+          <a:ln w="12700">
+            <a:solidFill>
+              <a:srgbClr val="0D9488"/>
+            </a:solidFill>
+            <a:prstDash val="solid"/>
+          </a:ln>
+        </p:spPr>
+      </p:sp>
+      <p:sp>
+        <p:nvSpPr>
+          <p:cNvPr id="25" name="Shape 23"/>
+          <p:cNvSpPr/>
+          <p:nvPr/>
+        </p:nvSpPr>
+        <p:spPr>
+          <a:xfrm>
+            <a:off x="2999232" y="3364992"/>
+            <a:ext cx="1645920" cy="475488"/>
+          </a:xfrm>
+          <a:prstGeom prst="rect">
+            <a:avLst>
+              <a:gd name="adj" fmla="val 9615"/>
+            </a:avLst>
+          </a:prstGeom>
+          <a:solidFill>
+            <a:srgbClr val="FFFFFF"/>
+          </a:solidFill>
+          <a:ln w="12700">
+            <a:solidFill>
+              <a:srgbClr val="0D9488"/>
             </a:solidFill>
             <a:prstDash val="solid"/>
           </a:ln>
@@ -30107,8 +30444,8 @@
         </p:nvSpPr>
         <p:spPr>
           <a:xfrm>
-            <a:off x="365760" y="3273552"/>
-            <a:ext cx="1371600" cy="658368"/>
+            <a:off x="2999232" y="3364992"/>
+            <a:ext cx="1645920" cy="475488"/>
           </a:xfrm>
           <a:prstGeom prst="rect">
             <a:avLst/>
@@ -30124,46 +30461,58 @@
               <a:buNone/>
             </a:pPr>
             <a:r>
-              <a:rPr lang="en-US" sz="1100" b="1" dirty="0">
-                <a:solidFill>
-                  <a:srgbClr val="475569"/>
+              <a:rPr lang="en-US" sz="1400" b="1" dirty="0">
+                <a:solidFill>
+                  <a:srgbClr val="0D9488"/>
                 </a:solidFill>
                 <a:latin typeface="Trebuchet MS" pitchFamily="34" charset="0"/>
                 <a:ea typeface="Trebuchet MS" pitchFamily="34" charset="-122"/>
                 <a:cs typeface="Trebuchet MS" pitchFamily="34" charset="-120"/>
               </a:rPr>
-              <a:t>Syllables</a:t>
-            </a:r>
-            <a:endParaRPr lang="en-US" sz="1100" dirty="0"/>
-          </a:p>
-        </p:txBody>
-      </p:sp>
-      <p:sp>
-        <p:nvSpPr>
-          <p:cNvPr id="27" name="Shape 25"/>
-          <p:cNvSpPr/>
-          <p:nvPr/>
-        </p:nvSpPr>
-        <p:spPr>
-          <a:xfrm>
-            <a:off x="1874520" y="3273552"/>
-            <a:ext cx="6903720" cy="658368"/>
-          </a:xfrm>
-          <a:prstGeom prst="rect">
-            <a:avLst>
-              <a:gd name="adj" fmla="val 8333"/>
-            </a:avLst>
-          </a:prstGeom>
-          <a:solidFill>
-            <a:srgbClr val="CCFBF1"/>
-          </a:solidFill>
-          <a:ln w="12700">
-            <a:solidFill>
-              <a:srgbClr val="0D9488"/>
-            </a:solidFill>
-            <a:prstDash val="solid"/>
-          </a:ln>
-        </p:spPr>
+              <a:t>grow</a:t>
+            </a:r>
+            <a:endParaRPr lang="en-US" sz="1400" dirty="0"/>
+          </a:p>
+        </p:txBody>
+      </p:sp>
+      <p:sp>
+        <p:nvSpPr>
+          <p:cNvPr id="27" name="Text 25"/>
+          <p:cNvSpPr/>
+          <p:nvPr/>
+        </p:nvSpPr>
+        <p:spPr>
+          <a:xfrm>
+            <a:off x="4645152" y="3364992"/>
+            <a:ext cx="1097280" cy="475488"/>
+          </a:xfrm>
+          <a:prstGeom prst="rect">
+            <a:avLst/>
+          </a:prstGeom>
+          <a:noFill/>
+          <a:ln/>
+        </p:spPr>
+        <p:txBody>
+          <a:bodyPr wrap="square" lIns="0" tIns="0" rIns="0" bIns="0" rtlCol="0" anchor="ctr"/>
+          <a:lstStyle/>
+          <a:p>
+            <a:pPr algn="ctr" indent="0" marL="0">
+              <a:buNone/>
+            </a:pPr>
+            <a:r>
+              <a:rPr lang="en-US" sz="1600" b="1" dirty="0">
+                <a:solidFill>
+                  <a:srgbClr val="0D9488"/>
+                </a:solidFill>
+                <a:latin typeface="Trebuchet MS" pitchFamily="34" charset="0"/>
+                <a:ea typeface="Trebuchet MS" pitchFamily="34" charset="-122"/>
+                <a:cs typeface="Trebuchet MS" pitchFamily="34" charset="-120"/>
+              </a:rPr>
+              <a:t>·</a:t>
+            </a:r>
+            <a:endParaRPr lang="en-US" sz="1600" dirty="0"/>
+          </a:p>
+        </p:txBody>
       </p:sp>
       <p:sp>
         <p:nvSpPr>
@@ -30173,7 +30522,7 @@
         </p:nvSpPr>
         <p:spPr>
           <a:xfrm>
-            <a:off x="2999232" y="3364992"/>
+            <a:off x="5742432" y="3364992"/>
             <a:ext cx="1645920" cy="475488"/>
           </a:xfrm>
           <a:prstGeom prst="rect">
@@ -30200,7 +30549,7 @@
         </p:nvSpPr>
         <p:spPr>
           <a:xfrm>
-            <a:off x="2999232" y="3364992"/>
+            <a:off x="5742432" y="3364992"/>
             <a:ext cx="1645920" cy="475488"/>
           </a:xfrm>
           <a:prstGeom prst="rect">
@@ -30225,7 +30574,7 @@
                 <a:ea typeface="Trebuchet MS" pitchFamily="34" charset="-122"/>
                 <a:cs typeface="Trebuchet MS" pitchFamily="34" charset="-120"/>
               </a:rPr>
-              <a:t>re</a:t>
+              <a:t>ing</a:t>
             </a:r>
             <a:endParaRPr lang="en-US" sz="1400" dirty="0"/>
           </a:p>
@@ -30233,14 +30582,41 @@
       </p:sp>
       <p:sp>
         <p:nvSpPr>
-          <p:cNvPr id="30" name="Text 28"/>
-          <p:cNvSpPr/>
-          <p:nvPr/>
-        </p:nvSpPr>
-        <p:spPr>
-          <a:xfrm>
-            <a:off x="4645152" y="3364992"/>
-            <a:ext cx="1097280" cy="475488"/>
+          <p:cNvPr id="30" name="Shape 28"/>
+          <p:cNvSpPr/>
+          <p:nvPr/>
+        </p:nvSpPr>
+        <p:spPr>
+          <a:xfrm>
+            <a:off x="365760" y="4096512"/>
+            <a:ext cx="1371600" cy="804672"/>
+          </a:xfrm>
+          <a:prstGeom prst="rect">
+            <a:avLst>
+              <a:gd name="adj" fmla="val 6818"/>
+            </a:avLst>
+          </a:prstGeom>
+          <a:solidFill>
+            <a:srgbClr val="E2E8F0"/>
+          </a:solidFill>
+          <a:ln w="12700">
+            <a:solidFill>
+              <a:srgbClr val="E2E8F0"/>
+            </a:solidFill>
+            <a:prstDash val="solid"/>
+          </a:ln>
+        </p:spPr>
+      </p:sp>
+      <p:sp>
+        <p:nvSpPr>
+          <p:cNvPr id="31" name="Text 29"/>
+          <p:cNvSpPr/>
+          <p:nvPr/>
+        </p:nvSpPr>
+        <p:spPr>
+          <a:xfrm>
+            <a:off x="365760" y="4096512"/>
+            <a:ext cx="1371600" cy="804672"/>
           </a:xfrm>
           <a:prstGeom prst="rect">
             <a:avLst/>
@@ -30256,96 +30632,30 @@
               <a:buNone/>
             </a:pPr>
             <a:r>
-              <a:rPr lang="en-US" sz="1600" b="1" dirty="0">
-                <a:solidFill>
-                  <a:srgbClr val="0D9488"/>
+              <a:rPr lang="en-US" sz="1100" b="1" dirty="0">
+                <a:solidFill>
+                  <a:srgbClr val="475569"/>
                 </a:solidFill>
                 <a:latin typeface="Trebuchet MS" pitchFamily="34" charset="0"/>
                 <a:ea typeface="Trebuchet MS" pitchFamily="34" charset="-122"/>
                 <a:cs typeface="Trebuchet MS" pitchFamily="34" charset="-120"/>
               </a:rPr>
-              <a:t>·</a:t>
-            </a:r>
-            <a:endParaRPr lang="en-US" sz="1600" dirty="0"/>
-          </a:p>
-        </p:txBody>
-      </p:sp>
-      <p:sp>
-        <p:nvSpPr>
-          <p:cNvPr id="31" name="Shape 29"/>
-          <p:cNvSpPr/>
-          <p:nvPr/>
-        </p:nvSpPr>
-        <p:spPr>
-          <a:xfrm>
-            <a:off x="5742432" y="3364992"/>
-            <a:ext cx="1645920" cy="475488"/>
-          </a:xfrm>
-          <a:prstGeom prst="rect">
-            <a:avLst>
-              <a:gd name="adj" fmla="val 9615"/>
-            </a:avLst>
-          </a:prstGeom>
-          <a:solidFill>
-            <a:srgbClr val="FFFFFF"/>
-          </a:solidFill>
-          <a:ln w="12700">
-            <a:solidFill>
-              <a:srgbClr val="0D9488"/>
-            </a:solidFill>
-            <a:prstDash val="solid"/>
-          </a:ln>
-        </p:spPr>
-      </p:sp>
-      <p:sp>
-        <p:nvSpPr>
-          <p:cNvPr id="32" name="Text 30"/>
-          <p:cNvSpPr/>
-          <p:nvPr/>
-        </p:nvSpPr>
-        <p:spPr>
-          <a:xfrm>
-            <a:off x="5742432" y="3364992"/>
-            <a:ext cx="1645920" cy="475488"/>
-          </a:xfrm>
-          <a:prstGeom prst="rect">
-            <a:avLst/>
-          </a:prstGeom>
-          <a:noFill/>
-          <a:ln/>
-        </p:spPr>
-        <p:txBody>
-          <a:bodyPr wrap="square" lIns="0" tIns="0" rIns="0" bIns="0" rtlCol="0" anchor="ctr"/>
-          <a:lstStyle/>
-          <a:p>
-            <a:pPr algn="ctr" indent="0" marL="0">
-              <a:buNone/>
-            </a:pPr>
-            <a:r>
-              <a:rPr lang="en-US" sz="1400" b="1" dirty="0">
-                <a:solidFill>
-                  <a:srgbClr val="0D9488"/>
-                </a:solidFill>
-                <a:latin typeface="Trebuchet MS" pitchFamily="34" charset="0"/>
-                <a:ea typeface="Trebuchet MS" pitchFamily="34" charset="-122"/>
-                <a:cs typeface="Trebuchet MS" pitchFamily="34" charset="-120"/>
-              </a:rPr>
-              <a:t>growth</a:t>
-            </a:r>
-            <a:endParaRPr lang="en-US" sz="1400" dirty="0"/>
-          </a:p>
-        </p:txBody>
-      </p:sp>
-      <p:sp>
-        <p:nvSpPr>
-          <p:cNvPr id="33" name="Shape 31"/>
-          <p:cNvSpPr/>
-          <p:nvPr/>
-        </p:nvSpPr>
-        <p:spPr>
-          <a:xfrm>
-            <a:off x="365760" y="4096512"/>
-            <a:ext cx="1371600" cy="804672"/>
+              <a:t>Phonemes</a:t>
+            </a:r>
+            <a:endParaRPr lang="en-US" sz="1100" dirty="0"/>
+          </a:p>
+        </p:txBody>
+      </p:sp>
+      <p:sp>
+        <p:nvSpPr>
+          <p:cNvPr id="32" name="Shape 30"/>
+          <p:cNvSpPr/>
+          <p:nvPr/>
+        </p:nvSpPr>
+        <p:spPr>
+          <a:xfrm>
+            <a:off x="1874520" y="4096512"/>
+            <a:ext cx="6903720" cy="804672"/>
           </a:xfrm>
           <a:prstGeom prst="rect">
             <a:avLst>
@@ -30353,85 +30663,19 @@
             </a:avLst>
           </a:prstGeom>
           <a:solidFill>
-            <a:srgbClr val="E2E8F0"/>
+            <a:srgbClr val="F8FAFC"/>
           </a:solidFill>
           <a:ln w="12700">
             <a:solidFill>
               <a:srgbClr val="E2E8F0"/>
             </a:solidFill>
-            <a:prstDash val="solid"/>
-          </a:ln>
-        </p:spPr>
-      </p:sp>
-      <p:sp>
-        <p:nvSpPr>
-          <p:cNvPr id="34" name="Text 32"/>
-          <p:cNvSpPr/>
-          <p:nvPr/>
-        </p:nvSpPr>
-        <p:spPr>
-          <a:xfrm>
-            <a:off x="365760" y="4096512"/>
-            <a:ext cx="1371600" cy="804672"/>
-          </a:xfrm>
-          <a:prstGeom prst="rect">
-            <a:avLst/>
-          </a:prstGeom>
-          <a:noFill/>
-          <a:ln/>
-        </p:spPr>
-        <p:txBody>
-          <a:bodyPr wrap="square" lIns="0" tIns="0" rIns="0" bIns="0" rtlCol="0" anchor="ctr"/>
-          <a:lstStyle/>
-          <a:p>
-            <a:pPr algn="ctr" indent="0" marL="0">
-              <a:buNone/>
-            </a:pPr>
-            <a:r>
-              <a:rPr lang="en-US" sz="1100" b="1" dirty="0">
-                <a:solidFill>
-                  <a:srgbClr val="475569"/>
-                </a:solidFill>
-                <a:latin typeface="Trebuchet MS" pitchFamily="34" charset="0"/>
-                <a:ea typeface="Trebuchet MS" pitchFamily="34" charset="-122"/>
-                <a:cs typeface="Trebuchet MS" pitchFamily="34" charset="-120"/>
-              </a:rPr>
-              <a:t>Phonemes</a:t>
-            </a:r>
-            <a:endParaRPr lang="en-US" sz="1100" dirty="0"/>
-          </a:p>
-        </p:txBody>
-      </p:sp>
-      <p:sp>
-        <p:nvSpPr>
-          <p:cNvPr id="35" name="Shape 33"/>
-          <p:cNvSpPr/>
-          <p:nvPr/>
-        </p:nvSpPr>
-        <p:spPr>
-          <a:xfrm>
-            <a:off x="1874520" y="4096512"/>
-            <a:ext cx="6903720" cy="804672"/>
-          </a:xfrm>
-          <a:prstGeom prst="rect">
-            <a:avLst>
-              <a:gd name="adj" fmla="val 6818"/>
-            </a:avLst>
-          </a:prstGeom>
-          <a:solidFill>
-            <a:srgbClr val="F8FAFC"/>
-          </a:solidFill>
-          <a:ln w="12700">
-            <a:solidFill>
-              <a:srgbClr val="E2E8F0"/>
-            </a:solidFill>
             <a:prstDash val="dash"/>
           </a:ln>
         </p:spPr>
       </p:sp>
       <p:sp>
         <p:nvSpPr>
-          <p:cNvPr id="36" name="Text 34"/>
+          <p:cNvPr id="33" name="Text 31"/>
           <p:cNvSpPr/>
           <p:nvPr/>
         </p:nvSpPr>
@@ -30893,7 +31137,7 @@
                 <a:ea typeface="Trebuchet MS" pitchFamily="34" charset="-122"/>
                 <a:cs typeface="Trebuchet MS" pitchFamily="34" charset="-120"/>
               </a:rPr>
-              <a:t>regrowth</a:t>
+              <a:t>growing</a:t>
             </a:r>
             <a:endParaRPr lang="en-US" sz="2800" dirty="0"/>
           </a:p>
@@ -30973,7 +31217,7 @@
         </p:nvSpPr>
         <p:spPr>
           <a:xfrm>
-            <a:off x="2221992" y="2258568"/>
+            <a:off x="2938272" y="2258568"/>
             <a:ext cx="1828800" cy="292608"/>
           </a:xfrm>
           <a:prstGeom prst="rect">
@@ -30982,11 +31226,11 @@
             </a:avLst>
           </a:prstGeom>
           <a:solidFill>
-            <a:srgbClr val="DDD6FE"/>
+            <a:srgbClr val="CCFBF1"/>
           </a:solidFill>
           <a:ln w="19050">
             <a:solidFill>
-              <a:srgbClr val="7C3AED"/>
+              <a:srgbClr val="0D9488"/>
             </a:solidFill>
             <a:prstDash val="solid"/>
           </a:ln>
@@ -31007,7 +31251,7 @@
         </p:nvSpPr>
         <p:spPr>
           <a:xfrm>
-            <a:off x="2221992" y="2258568"/>
+            <a:off x="2938272" y="2258568"/>
             <a:ext cx="1828800" cy="292608"/>
           </a:xfrm>
           <a:prstGeom prst="rect">
@@ -31026,13 +31270,13 @@
             <a:r>
               <a:rPr lang="en-US" sz="1300" b="1" dirty="0">
                 <a:solidFill>
-                  <a:srgbClr val="4C1D95"/>
+                  <a:srgbClr val="0F766E"/>
                 </a:solidFill>
                 <a:latin typeface="Trebuchet MS" pitchFamily="34" charset="0"/>
                 <a:ea typeface="Trebuchet MS" pitchFamily="34" charset="-122"/>
                 <a:cs typeface="Trebuchet MS" pitchFamily="34" charset="-120"/>
               </a:rPr>
-              <a:t>re</a:t>
+              <a:t>grow</a:t>
             </a:r>
             <a:endParaRPr lang="en-US" sz="1300" dirty="0"/>
           </a:p>
@@ -31046,7 +31290,7 @@
         </p:nvSpPr>
         <p:spPr>
           <a:xfrm>
-            <a:off x="2221992" y="2569464"/>
+            <a:off x="2938272" y="2569464"/>
             <a:ext cx="1828800" cy="201168"/>
           </a:xfrm>
           <a:prstGeom prst="rect">
@@ -31071,7 +31315,7 @@
                 <a:ea typeface="Calibri" pitchFamily="34" charset="-122"/>
                 <a:cs typeface="Calibri" pitchFamily="34" charset="-120"/>
               </a:rPr>
-              <a:t>again</a:t>
+              <a:t>to increase in size</a:t>
             </a:r>
             <a:endParaRPr lang="en-US" sz="850" dirty="0"/>
           </a:p>
@@ -31085,7 +31329,7 @@
         </p:nvSpPr>
         <p:spPr>
           <a:xfrm>
-            <a:off x="4370832" y="2258568"/>
+            <a:off x="5803392" y="2258568"/>
             <a:ext cx="1828800" cy="292608"/>
           </a:xfrm>
           <a:prstGeom prst="rect">
@@ -31094,11 +31338,11 @@
             </a:avLst>
           </a:prstGeom>
           <a:solidFill>
-            <a:srgbClr val="CCFBF1"/>
+            <a:srgbClr val="FCE7F3"/>
           </a:solidFill>
           <a:ln w="19050">
             <a:solidFill>
-              <a:srgbClr val="0D9488"/>
+              <a:srgbClr val="DB2777"/>
             </a:solidFill>
             <a:prstDash val="solid"/>
           </a:ln>
@@ -31119,7 +31363,7 @@
         </p:nvSpPr>
         <p:spPr>
           <a:xfrm>
-            <a:off x="4370832" y="2258568"/>
+            <a:off x="5803392" y="2258568"/>
             <a:ext cx="1828800" cy="292608"/>
           </a:xfrm>
           <a:prstGeom prst="rect">
@@ -31138,13 +31382,13 @@
             <a:r>
               <a:rPr lang="en-US" sz="1300" b="1" dirty="0">
                 <a:solidFill>
-                  <a:srgbClr val="0F766E"/>
+                  <a:srgbClr val="9D174D"/>
                 </a:solidFill>
                 <a:latin typeface="Trebuchet MS" pitchFamily="34" charset="0"/>
                 <a:ea typeface="Trebuchet MS" pitchFamily="34" charset="-122"/>
                 <a:cs typeface="Trebuchet MS" pitchFamily="34" charset="-120"/>
               </a:rPr>
-              <a:t>grow</a:t>
+              <a:t>ing</a:t>
             </a:r>
             <a:endParaRPr lang="en-US" sz="1300" dirty="0"/>
           </a:p>
@@ -31158,7 +31402,7 @@
         </p:nvSpPr>
         <p:spPr>
           <a:xfrm>
-            <a:off x="4370832" y="2569464"/>
+            <a:off x="5803392" y="2569464"/>
             <a:ext cx="1828800" cy="201168"/>
           </a:xfrm>
           <a:prstGeom prst="rect">
@@ -31183,7 +31427,7 @@
                 <a:ea typeface="Calibri" pitchFamily="34" charset="-122"/>
                 <a:cs typeface="Calibri" pitchFamily="34" charset="-120"/>
               </a:rPr>
-              <a:t>to increase in size</a:t>
+              <a:t>happening right now</a:t>
             </a:r>
             <a:endParaRPr lang="en-US" sz="850" dirty="0"/>
           </a:p>
@@ -31197,30 +31441,23 @@
         </p:nvSpPr>
         <p:spPr>
           <a:xfrm>
-            <a:off x="6519672" y="2258568"/>
-            <a:ext cx="1828800" cy="292608"/>
+            <a:off x="365760" y="3273552"/>
+            <a:ext cx="1371600" cy="658368"/>
           </a:xfrm>
           <a:prstGeom prst="rect">
             <a:avLst>
-              <a:gd name="adj" fmla="val 25000"/>
+              <a:gd name="adj" fmla="val 8333"/>
             </a:avLst>
           </a:prstGeom>
           <a:solidFill>
-            <a:srgbClr val="FCE7F3"/>
-          </a:solidFill>
-          <a:ln w="19050">
-            <a:solidFill>
-              <a:srgbClr val="DB2777"/>
-            </a:solidFill>
-            <a:prstDash val="solid"/>
-          </a:ln>
-          <a:effectLst>
-            <a:outerShdw sx="100000" sy="100000" kx="0" ky="0" algn="bl" rotWithShape="0" blurRad="101600" dist="38100" dir="8100000">
-              <a:srgbClr val="000000">
-                <a:alpha val="12000"/>
-              </a:srgbClr>
-            </a:outerShdw>
-          </a:effectLst>
+            <a:srgbClr val="E2E8F0"/>
+          </a:solidFill>
+          <a:ln w="12700">
+            <a:solidFill>
+              <a:srgbClr val="E2E8F0"/>
+            </a:solidFill>
+            <a:prstDash val="solid"/>
+          </a:ln>
         </p:spPr>
       </p:sp>
       <p:sp>
@@ -31231,8 +31468,8 @@
         </p:nvSpPr>
         <p:spPr>
           <a:xfrm>
-            <a:off x="6519672" y="2258568"/>
-            <a:ext cx="1828800" cy="292608"/>
+            <a:off x="365760" y="3273552"/>
+            <a:ext cx="1371600" cy="658368"/>
           </a:xfrm>
           <a:prstGeom prst="rect">
             <a:avLst/>
@@ -31248,69 +31485,30 @@
               <a:buNone/>
             </a:pPr>
             <a:r>
-              <a:rPr lang="en-US" sz="1300" b="1" dirty="0">
-                <a:solidFill>
-                  <a:srgbClr val="9D174D"/>
+              <a:rPr lang="en-US" sz="1100" b="1" dirty="0">
+                <a:solidFill>
+                  <a:srgbClr val="475569"/>
                 </a:solidFill>
                 <a:latin typeface="Trebuchet MS" pitchFamily="34" charset="0"/>
                 <a:ea typeface="Trebuchet MS" pitchFamily="34" charset="-122"/>
                 <a:cs typeface="Trebuchet MS" pitchFamily="34" charset="-120"/>
               </a:rPr>
-              <a:t>th</a:t>
-            </a:r>
-            <a:endParaRPr lang="en-US" sz="1300" dirty="0"/>
-          </a:p>
-        </p:txBody>
-      </p:sp>
-      <p:sp>
-        <p:nvSpPr>
-          <p:cNvPr id="24" name="Text 22"/>
-          <p:cNvSpPr/>
-          <p:nvPr/>
-        </p:nvSpPr>
-        <p:spPr>
-          <a:xfrm>
-            <a:off x="6519672" y="2569464"/>
-            <a:ext cx="1828800" cy="201168"/>
-          </a:xfrm>
-          <a:prstGeom prst="rect">
-            <a:avLst/>
-          </a:prstGeom>
-          <a:noFill/>
-          <a:ln/>
-        </p:spPr>
-        <p:txBody>
-          <a:bodyPr wrap="square" lIns="0" tIns="0" rIns="0" bIns="0" rtlCol="0" anchor="t"/>
-          <a:lstStyle/>
-          <a:p>
-            <a:pPr algn="ctr" indent="0" marL="0">
-              <a:buNone/>
-            </a:pPr>
-            <a:r>
-              <a:rPr lang="en-US" sz="850" dirty="0">
-                <a:solidFill>
-                  <a:srgbClr val="475569"/>
-                </a:solidFill>
-                <a:latin typeface="Calibri" pitchFamily="34" charset="0"/>
-                <a:ea typeface="Calibri" pitchFamily="34" charset="-122"/>
-                <a:cs typeface="Calibri" pitchFamily="34" charset="-120"/>
-              </a:rPr>
-              <a:t>the result or state of</a:t>
-            </a:r>
-            <a:endParaRPr lang="en-US" sz="850" dirty="0"/>
-          </a:p>
-        </p:txBody>
-      </p:sp>
-      <p:sp>
-        <p:nvSpPr>
-          <p:cNvPr id="25" name="Shape 23"/>
-          <p:cNvSpPr/>
-          <p:nvPr/>
-        </p:nvSpPr>
-        <p:spPr>
-          <a:xfrm>
-            <a:off x="365760" y="3273552"/>
-            <a:ext cx="1371600" cy="658368"/>
+              <a:t>Syllables</a:t>
+            </a:r>
+            <a:endParaRPr lang="en-US" sz="1100" dirty="0"/>
+          </a:p>
+        </p:txBody>
+      </p:sp>
+      <p:sp>
+        <p:nvSpPr>
+          <p:cNvPr id="24" name="Shape 22"/>
+          <p:cNvSpPr/>
+          <p:nvPr/>
+        </p:nvSpPr>
+        <p:spPr>
+          <a:xfrm>
+            <a:off x="1874520" y="3273552"/>
+            <a:ext cx="6903720" cy="658368"/>
           </a:xfrm>
           <a:prstGeom prst="rect">
             <a:avLst>
@@ -31318,11 +31516,38 @@
             </a:avLst>
           </a:prstGeom>
           <a:solidFill>
-            <a:srgbClr val="E2E8F0"/>
-          </a:solidFill>
-          <a:ln w="12700">
-            <a:solidFill>
-              <a:srgbClr val="E2E8F0"/>
+            <a:srgbClr val="CCFBF1"/>
+          </a:solidFill>
+          <a:ln w="12700">
+            <a:solidFill>
+              <a:srgbClr val="0D9488"/>
+            </a:solidFill>
+            <a:prstDash val="solid"/>
+          </a:ln>
+        </p:spPr>
+      </p:sp>
+      <p:sp>
+        <p:nvSpPr>
+          <p:cNvPr id="25" name="Shape 23"/>
+          <p:cNvSpPr/>
+          <p:nvPr/>
+        </p:nvSpPr>
+        <p:spPr>
+          <a:xfrm>
+            <a:off x="2999232" y="3364992"/>
+            <a:ext cx="1645920" cy="475488"/>
+          </a:xfrm>
+          <a:prstGeom prst="rect">
+            <a:avLst>
+              <a:gd name="adj" fmla="val 9615"/>
+            </a:avLst>
+          </a:prstGeom>
+          <a:solidFill>
+            <a:srgbClr val="FFFFFF"/>
+          </a:solidFill>
+          <a:ln w="12700">
+            <a:solidFill>
+              <a:srgbClr val="0D9488"/>
             </a:solidFill>
             <a:prstDash val="solid"/>
           </a:ln>
@@ -31336,8 +31561,8 @@
         </p:nvSpPr>
         <p:spPr>
           <a:xfrm>
-            <a:off x="365760" y="3273552"/>
-            <a:ext cx="1371600" cy="658368"/>
+            <a:off x="2999232" y="3364992"/>
+            <a:ext cx="1645920" cy="475488"/>
           </a:xfrm>
           <a:prstGeom prst="rect">
             <a:avLst/>
@@ -31353,15 +31578,186 @@
               <a:buNone/>
             </a:pPr>
             <a:r>
-              <a:rPr lang="en-US" sz="1100" b="1" dirty="0">
-                <a:solidFill>
-                  <a:srgbClr val="475569"/>
+              <a:rPr lang="en-US" sz="1400" b="1" dirty="0">
+                <a:solidFill>
+                  <a:srgbClr val="0D9488"/>
                 </a:solidFill>
                 <a:latin typeface="Trebuchet MS" pitchFamily="34" charset="0"/>
                 <a:ea typeface="Trebuchet MS" pitchFamily="34" charset="-122"/>
                 <a:cs typeface="Trebuchet MS" pitchFamily="34" charset="-120"/>
               </a:rPr>
-              <a:t>Syllables</a:t>
+              <a:t>grow</a:t>
+            </a:r>
+            <a:endParaRPr lang="en-US" sz="1400" dirty="0"/>
+          </a:p>
+        </p:txBody>
+      </p:sp>
+      <p:sp>
+        <p:nvSpPr>
+          <p:cNvPr id="27" name="Text 25"/>
+          <p:cNvSpPr/>
+          <p:nvPr/>
+        </p:nvSpPr>
+        <p:spPr>
+          <a:xfrm>
+            <a:off x="4645152" y="3364992"/>
+            <a:ext cx="1097280" cy="475488"/>
+          </a:xfrm>
+          <a:prstGeom prst="rect">
+            <a:avLst/>
+          </a:prstGeom>
+          <a:noFill/>
+          <a:ln/>
+        </p:spPr>
+        <p:txBody>
+          <a:bodyPr wrap="square" lIns="0" tIns="0" rIns="0" bIns="0" rtlCol="0" anchor="ctr"/>
+          <a:lstStyle/>
+          <a:p>
+            <a:pPr algn="ctr" indent="0" marL="0">
+              <a:buNone/>
+            </a:pPr>
+            <a:r>
+              <a:rPr lang="en-US" sz="1600" b="1" dirty="0">
+                <a:solidFill>
+                  <a:srgbClr val="0D9488"/>
+                </a:solidFill>
+                <a:latin typeface="Trebuchet MS" pitchFamily="34" charset="0"/>
+                <a:ea typeface="Trebuchet MS" pitchFamily="34" charset="-122"/>
+                <a:cs typeface="Trebuchet MS" pitchFamily="34" charset="-120"/>
+              </a:rPr>
+              <a:t>·</a:t>
+            </a:r>
+            <a:endParaRPr lang="en-US" sz="1600" dirty="0"/>
+          </a:p>
+        </p:txBody>
+      </p:sp>
+      <p:sp>
+        <p:nvSpPr>
+          <p:cNvPr id="28" name="Shape 26"/>
+          <p:cNvSpPr/>
+          <p:nvPr/>
+        </p:nvSpPr>
+        <p:spPr>
+          <a:xfrm>
+            <a:off x="5742432" y="3364992"/>
+            <a:ext cx="1645920" cy="475488"/>
+          </a:xfrm>
+          <a:prstGeom prst="rect">
+            <a:avLst>
+              <a:gd name="adj" fmla="val 9615"/>
+            </a:avLst>
+          </a:prstGeom>
+          <a:solidFill>
+            <a:srgbClr val="FFFFFF"/>
+          </a:solidFill>
+          <a:ln w="12700">
+            <a:solidFill>
+              <a:srgbClr val="0D9488"/>
+            </a:solidFill>
+            <a:prstDash val="solid"/>
+          </a:ln>
+        </p:spPr>
+      </p:sp>
+      <p:sp>
+        <p:nvSpPr>
+          <p:cNvPr id="29" name="Text 27"/>
+          <p:cNvSpPr/>
+          <p:nvPr/>
+        </p:nvSpPr>
+        <p:spPr>
+          <a:xfrm>
+            <a:off x="5742432" y="3364992"/>
+            <a:ext cx="1645920" cy="475488"/>
+          </a:xfrm>
+          <a:prstGeom prst="rect">
+            <a:avLst/>
+          </a:prstGeom>
+          <a:noFill/>
+          <a:ln/>
+        </p:spPr>
+        <p:txBody>
+          <a:bodyPr wrap="square" lIns="0" tIns="0" rIns="0" bIns="0" rtlCol="0" anchor="ctr"/>
+          <a:lstStyle/>
+          <a:p>
+            <a:pPr algn="ctr" indent="0" marL="0">
+              <a:buNone/>
+            </a:pPr>
+            <a:r>
+              <a:rPr lang="en-US" sz="1400" b="1" dirty="0">
+                <a:solidFill>
+                  <a:srgbClr val="0D9488"/>
+                </a:solidFill>
+                <a:latin typeface="Trebuchet MS" pitchFamily="34" charset="0"/>
+                <a:ea typeface="Trebuchet MS" pitchFamily="34" charset="-122"/>
+                <a:cs typeface="Trebuchet MS" pitchFamily="34" charset="-120"/>
+              </a:rPr>
+              <a:t>ing</a:t>
+            </a:r>
+            <a:endParaRPr lang="en-US" sz="1400" dirty="0"/>
+          </a:p>
+        </p:txBody>
+      </p:sp>
+      <p:sp>
+        <p:nvSpPr>
+          <p:cNvPr id="30" name="Shape 28"/>
+          <p:cNvSpPr/>
+          <p:nvPr/>
+        </p:nvSpPr>
+        <p:spPr>
+          <a:xfrm>
+            <a:off x="365760" y="4096512"/>
+            <a:ext cx="1371600" cy="804672"/>
+          </a:xfrm>
+          <a:prstGeom prst="rect">
+            <a:avLst>
+              <a:gd name="adj" fmla="val 6818"/>
+            </a:avLst>
+          </a:prstGeom>
+          <a:solidFill>
+            <a:srgbClr val="E2E8F0"/>
+          </a:solidFill>
+          <a:ln w="12700">
+            <a:solidFill>
+              <a:srgbClr val="E2E8F0"/>
+            </a:solidFill>
+            <a:prstDash val="solid"/>
+          </a:ln>
+        </p:spPr>
+      </p:sp>
+      <p:sp>
+        <p:nvSpPr>
+          <p:cNvPr id="31" name="Text 29"/>
+          <p:cNvSpPr/>
+          <p:nvPr/>
+        </p:nvSpPr>
+        <p:spPr>
+          <a:xfrm>
+            <a:off x="365760" y="4096512"/>
+            <a:ext cx="1371600" cy="804672"/>
+          </a:xfrm>
+          <a:prstGeom prst="rect">
+            <a:avLst/>
+          </a:prstGeom>
+          <a:noFill/>
+          <a:ln/>
+        </p:spPr>
+        <p:txBody>
+          <a:bodyPr wrap="square" lIns="0" tIns="0" rIns="0" bIns="0" rtlCol="0" anchor="ctr"/>
+          <a:lstStyle/>
+          <a:p>
+            <a:pPr algn="ctr" indent="0" marL="0">
+              <a:buNone/>
+            </a:pPr>
+            <a:r>
+              <a:rPr lang="en-US" sz="1100" b="1" dirty="0">
+                <a:solidFill>
+                  <a:srgbClr val="475569"/>
+                </a:solidFill>
+                <a:latin typeface="Trebuchet MS" pitchFamily="34" charset="0"/>
+                <a:ea typeface="Trebuchet MS" pitchFamily="34" charset="-122"/>
+                <a:cs typeface="Trebuchet MS" pitchFamily="34" charset="-120"/>
+              </a:rPr>
+              <a:t>Phonemes</a:t>
             </a:r>
             <a:endParaRPr lang="en-US" sz="1100" dirty="0"/>
           </a:p>
@@ -31369,13 +31765,13 @@
       </p:sp>
       <p:sp>
         <p:nvSpPr>
-          <p:cNvPr id="27" name="Shape 25"/>
-          <p:cNvSpPr/>
-          <p:nvPr/>
-        </p:nvSpPr>
-        <p:spPr>
-          <a:xfrm>
-            <a:off x="1874520" y="3273552"/>
+          <p:cNvPr id="32" name="Shape 30"/>
+          <p:cNvSpPr/>
+          <p:nvPr/>
+        </p:nvSpPr>
+        <p:spPr>
+          <a:xfrm>
+            <a:off x="1874520" y="4096512"/>
             <a:ext cx="6903720" cy="658368"/>
           </a:xfrm>
           <a:prstGeom prst="rect">
@@ -31384,30 +31780,30 @@
             </a:avLst>
           </a:prstGeom>
           <a:solidFill>
-            <a:srgbClr val="CCFBF1"/>
-          </a:solidFill>
-          <a:ln w="12700">
-            <a:solidFill>
-              <a:srgbClr val="0D9488"/>
-            </a:solidFill>
-            <a:prstDash val="solid"/>
-          </a:ln>
-        </p:spPr>
-      </p:sp>
-      <p:sp>
-        <p:nvSpPr>
-          <p:cNvPr id="28" name="Shape 26"/>
-          <p:cNvSpPr/>
-          <p:nvPr/>
-        </p:nvSpPr>
-        <p:spPr>
-          <a:xfrm>
-            <a:off x="2999232" y="3364992"/>
-            <a:ext cx="1645920" cy="475488"/>
+            <a:srgbClr val="FCE7F3"/>
+          </a:solidFill>
+          <a:ln w="12700">
+            <a:solidFill>
+              <a:srgbClr val="DB2777"/>
+            </a:solidFill>
+            <a:prstDash val="solid"/>
+          </a:ln>
+        </p:spPr>
+      </p:sp>
+      <p:sp>
+        <p:nvSpPr>
+          <p:cNvPr id="33" name="Shape 31"/>
+          <p:cNvSpPr/>
+          <p:nvPr/>
+        </p:nvSpPr>
+        <p:spPr>
+          <a:xfrm>
+            <a:off x="3033522" y="4169664"/>
+            <a:ext cx="685800" cy="475488"/>
           </a:xfrm>
           <a:prstGeom prst="rect">
             <a:avLst>
-              <a:gd name="adj" fmla="val 9615"/>
+              <a:gd name="adj" fmla="val 7692"/>
             </a:avLst>
           </a:prstGeom>
           <a:solidFill>
@@ -31415,22 +31811,22 @@
           </a:solidFill>
           <a:ln w="12700">
             <a:solidFill>
-              <a:srgbClr val="0D9488"/>
-            </a:solidFill>
-            <a:prstDash val="solid"/>
-          </a:ln>
-        </p:spPr>
-      </p:sp>
-      <p:sp>
-        <p:nvSpPr>
-          <p:cNvPr id="29" name="Text 27"/>
-          <p:cNvSpPr/>
-          <p:nvPr/>
-        </p:nvSpPr>
-        <p:spPr>
-          <a:xfrm>
-            <a:off x="2999232" y="3364992"/>
-            <a:ext cx="1645920" cy="475488"/>
+              <a:srgbClr val="DB2777"/>
+            </a:solidFill>
+            <a:prstDash val="solid"/>
+          </a:ln>
+        </p:spPr>
+      </p:sp>
+      <p:sp>
+        <p:nvSpPr>
+          <p:cNvPr id="34" name="Text 32"/>
+          <p:cNvSpPr/>
+          <p:nvPr/>
+        </p:nvSpPr>
+        <p:spPr>
+          <a:xfrm>
+            <a:off x="3033522" y="4169664"/>
+            <a:ext cx="685800" cy="475488"/>
           </a:xfrm>
           <a:prstGeom prst="rect">
             <a:avLst/>
@@ -31446,30 +31842,57 @@
               <a:buNone/>
             </a:pPr>
             <a:r>
-              <a:rPr lang="en-US" sz="1400" b="1" dirty="0">
-                <a:solidFill>
-                  <a:srgbClr val="0D9488"/>
+              <a:rPr lang="en-US" sz="1000" b="1" dirty="0">
+                <a:solidFill>
+                  <a:srgbClr val="9D174D"/>
                 </a:solidFill>
                 <a:latin typeface="Trebuchet MS" pitchFamily="34" charset="0"/>
                 <a:ea typeface="Trebuchet MS" pitchFamily="34" charset="-122"/>
                 <a:cs typeface="Trebuchet MS" pitchFamily="34" charset="-120"/>
               </a:rPr>
-              <a:t>re</a:t>
-            </a:r>
-            <a:endParaRPr lang="en-US" sz="1400" dirty="0"/>
-          </a:p>
-        </p:txBody>
-      </p:sp>
-      <p:sp>
-        <p:nvSpPr>
-          <p:cNvPr id="30" name="Text 28"/>
-          <p:cNvSpPr/>
-          <p:nvPr/>
-        </p:nvSpPr>
-        <p:spPr>
-          <a:xfrm>
-            <a:off x="4645152" y="3364992"/>
-            <a:ext cx="1097280" cy="475488"/>
+              <a:t>gr</a:t>
+            </a:r>
+            <a:endParaRPr lang="en-US" sz="1000" dirty="0"/>
+          </a:p>
+        </p:txBody>
+      </p:sp>
+      <p:sp>
+        <p:nvSpPr>
+          <p:cNvPr id="35" name="Shape 33"/>
+          <p:cNvSpPr/>
+          <p:nvPr/>
+        </p:nvSpPr>
+        <p:spPr>
+          <a:xfrm>
+            <a:off x="4850892" y="4169664"/>
+            <a:ext cx="685800" cy="475488"/>
+          </a:xfrm>
+          <a:prstGeom prst="rect">
+            <a:avLst>
+              <a:gd name="adj" fmla="val 7692"/>
+            </a:avLst>
+          </a:prstGeom>
+          <a:solidFill>
+            <a:srgbClr val="FFFFFF"/>
+          </a:solidFill>
+          <a:ln w="12700">
+            <a:solidFill>
+              <a:srgbClr val="DB2777"/>
+            </a:solidFill>
+            <a:prstDash val="solid"/>
+          </a:ln>
+        </p:spPr>
+      </p:sp>
+      <p:sp>
+        <p:nvSpPr>
+          <p:cNvPr id="36" name="Text 34"/>
+          <p:cNvSpPr/>
+          <p:nvPr/>
+        </p:nvSpPr>
+        <p:spPr>
+          <a:xfrm>
+            <a:off x="4850892" y="4169664"/>
+            <a:ext cx="685800" cy="475488"/>
           </a:xfrm>
           <a:prstGeom prst="rect">
             <a:avLst/>
@@ -31485,34 +31908,34 @@
               <a:buNone/>
             </a:pPr>
             <a:r>
-              <a:rPr lang="en-US" sz="1600" b="1" dirty="0">
-                <a:solidFill>
-                  <a:srgbClr val="0D9488"/>
+              <a:rPr lang="en-US" sz="1000" b="1" dirty="0">
+                <a:solidFill>
+                  <a:srgbClr val="9D174D"/>
                 </a:solidFill>
                 <a:latin typeface="Trebuchet MS" pitchFamily="34" charset="0"/>
                 <a:ea typeface="Trebuchet MS" pitchFamily="34" charset="-122"/>
                 <a:cs typeface="Trebuchet MS" pitchFamily="34" charset="-120"/>
               </a:rPr>
-              <a:t>·</a:t>
-            </a:r>
-            <a:endParaRPr lang="en-US" sz="1600" dirty="0"/>
-          </a:p>
-        </p:txBody>
-      </p:sp>
-      <p:sp>
-        <p:nvSpPr>
-          <p:cNvPr id="31" name="Shape 29"/>
-          <p:cNvSpPr/>
-          <p:nvPr/>
-        </p:nvSpPr>
-        <p:spPr>
-          <a:xfrm>
-            <a:off x="5742432" y="3364992"/>
-            <a:ext cx="1645920" cy="475488"/>
+              <a:t>ow</a:t>
+            </a:r>
+            <a:endParaRPr lang="en-US" sz="1000" dirty="0"/>
+          </a:p>
+        </p:txBody>
+      </p:sp>
+      <p:sp>
+        <p:nvSpPr>
+          <p:cNvPr id="37" name="Shape 35"/>
+          <p:cNvSpPr/>
+          <p:nvPr/>
+        </p:nvSpPr>
+        <p:spPr>
+          <a:xfrm>
+            <a:off x="6668262" y="4169664"/>
+            <a:ext cx="685800" cy="475488"/>
           </a:xfrm>
           <a:prstGeom prst="rect">
             <a:avLst>
-              <a:gd name="adj" fmla="val 9615"/>
+              <a:gd name="adj" fmla="val 7692"/>
             </a:avLst>
           </a:prstGeom>
           <a:solidFill>
@@ -31520,22 +31943,22 @@
           </a:solidFill>
           <a:ln w="12700">
             <a:solidFill>
-              <a:srgbClr val="0D9488"/>
-            </a:solidFill>
-            <a:prstDash val="solid"/>
-          </a:ln>
-        </p:spPr>
-      </p:sp>
-      <p:sp>
-        <p:nvSpPr>
-          <p:cNvPr id="32" name="Text 30"/>
-          <p:cNvSpPr/>
-          <p:nvPr/>
-        </p:nvSpPr>
-        <p:spPr>
-          <a:xfrm>
-            <a:off x="5742432" y="3364992"/>
-            <a:ext cx="1645920" cy="475488"/>
+              <a:srgbClr val="DB2777"/>
+            </a:solidFill>
+            <a:prstDash val="solid"/>
+          </a:ln>
+        </p:spPr>
+      </p:sp>
+      <p:sp>
+        <p:nvSpPr>
+          <p:cNvPr id="38" name="Text 36"/>
+          <p:cNvSpPr/>
+          <p:nvPr/>
+        </p:nvSpPr>
+        <p:spPr>
+          <a:xfrm>
+            <a:off x="6668262" y="4169664"/>
+            <a:ext cx="685800" cy="475488"/>
           </a:xfrm>
           <a:prstGeom prst="rect">
             <a:avLst/>
@@ -31551,440 +31974,17 @@
               <a:buNone/>
             </a:pPr>
             <a:r>
-              <a:rPr lang="en-US" sz="1400" b="1" dirty="0">
-                <a:solidFill>
-                  <a:srgbClr val="0D9488"/>
+              <a:rPr lang="en-US" sz="1000" b="1" dirty="0">
+                <a:solidFill>
+                  <a:srgbClr val="9D174D"/>
                 </a:solidFill>
                 <a:latin typeface="Trebuchet MS" pitchFamily="34" charset="0"/>
                 <a:ea typeface="Trebuchet MS" pitchFamily="34" charset="-122"/>
                 <a:cs typeface="Trebuchet MS" pitchFamily="34" charset="-120"/>
               </a:rPr>
-              <a:t>growth</a:t>
-            </a:r>
-            <a:endParaRPr lang="en-US" sz="1400" dirty="0"/>
-          </a:p>
-        </p:txBody>
-      </p:sp>
-      <p:sp>
-        <p:nvSpPr>
-          <p:cNvPr id="33" name="Shape 31"/>
-          <p:cNvSpPr/>
-          <p:nvPr/>
-        </p:nvSpPr>
-        <p:spPr>
-          <a:xfrm>
-            <a:off x="365760" y="4096512"/>
-            <a:ext cx="1371600" cy="804672"/>
-          </a:xfrm>
-          <a:prstGeom prst="rect">
-            <a:avLst>
-              <a:gd name="adj" fmla="val 6818"/>
-            </a:avLst>
-          </a:prstGeom>
-          <a:solidFill>
-            <a:srgbClr val="E2E8F0"/>
-          </a:solidFill>
-          <a:ln w="12700">
-            <a:solidFill>
-              <a:srgbClr val="E2E8F0"/>
-            </a:solidFill>
-            <a:prstDash val="solid"/>
-          </a:ln>
-        </p:spPr>
-      </p:sp>
-      <p:sp>
-        <p:nvSpPr>
-          <p:cNvPr id="34" name="Text 32"/>
-          <p:cNvSpPr/>
-          <p:nvPr/>
-        </p:nvSpPr>
-        <p:spPr>
-          <a:xfrm>
-            <a:off x="365760" y="4096512"/>
-            <a:ext cx="1371600" cy="804672"/>
-          </a:xfrm>
-          <a:prstGeom prst="rect">
-            <a:avLst/>
-          </a:prstGeom>
-          <a:noFill/>
-          <a:ln/>
-        </p:spPr>
-        <p:txBody>
-          <a:bodyPr wrap="square" lIns="0" tIns="0" rIns="0" bIns="0" rtlCol="0" anchor="ctr"/>
-          <a:lstStyle/>
-          <a:p>
-            <a:pPr algn="ctr" indent="0" marL="0">
-              <a:buNone/>
-            </a:pPr>
-            <a:r>
-              <a:rPr lang="en-US" sz="1100" b="1" dirty="0">
-                <a:solidFill>
-                  <a:srgbClr val="475569"/>
-                </a:solidFill>
-                <a:latin typeface="Trebuchet MS" pitchFamily="34" charset="0"/>
-                <a:ea typeface="Trebuchet MS" pitchFamily="34" charset="-122"/>
-                <a:cs typeface="Trebuchet MS" pitchFamily="34" charset="-120"/>
-              </a:rPr>
-              <a:t>Phonemes</a:t>
-            </a:r>
-            <a:endParaRPr lang="en-US" sz="1100" dirty="0"/>
-          </a:p>
-        </p:txBody>
-      </p:sp>
-      <p:sp>
-        <p:nvSpPr>
-          <p:cNvPr id="35" name="Shape 33"/>
-          <p:cNvSpPr/>
-          <p:nvPr/>
-        </p:nvSpPr>
-        <p:spPr>
-          <a:xfrm>
-            <a:off x="1874520" y="4096512"/>
-            <a:ext cx="6903720" cy="658368"/>
-          </a:xfrm>
-          <a:prstGeom prst="rect">
-            <a:avLst>
-              <a:gd name="adj" fmla="val 8333"/>
-            </a:avLst>
-          </a:prstGeom>
-          <a:solidFill>
-            <a:srgbClr val="FCE7F3"/>
-          </a:solidFill>
-          <a:ln w="12700">
-            <a:solidFill>
-              <a:srgbClr val="DB2777"/>
-            </a:solidFill>
-            <a:prstDash val="solid"/>
-          </a:ln>
-        </p:spPr>
-      </p:sp>
-      <p:sp>
-        <p:nvSpPr>
-          <p:cNvPr id="36" name="Shape 34"/>
-          <p:cNvSpPr/>
-          <p:nvPr/>
-        </p:nvSpPr>
-        <p:spPr>
-          <a:xfrm>
-            <a:off x="2427732" y="4169664"/>
-            <a:ext cx="685800" cy="475488"/>
-          </a:xfrm>
-          <a:prstGeom prst="rect">
-            <a:avLst>
-              <a:gd name="adj" fmla="val 7692"/>
-            </a:avLst>
-          </a:prstGeom>
-          <a:solidFill>
-            <a:srgbClr val="FFFFFF"/>
-          </a:solidFill>
-          <a:ln w="12700">
-            <a:solidFill>
-              <a:srgbClr val="DB2777"/>
-            </a:solidFill>
-            <a:prstDash val="solid"/>
-          </a:ln>
-        </p:spPr>
-      </p:sp>
-      <p:sp>
-        <p:nvSpPr>
-          <p:cNvPr id="37" name="Text 35"/>
-          <p:cNvSpPr/>
-          <p:nvPr/>
-        </p:nvSpPr>
-        <p:spPr>
-          <a:xfrm>
-            <a:off x="2427732" y="4169664"/>
-            <a:ext cx="685800" cy="475488"/>
-          </a:xfrm>
-          <a:prstGeom prst="rect">
-            <a:avLst/>
-          </a:prstGeom>
-          <a:noFill/>
-          <a:ln/>
-        </p:spPr>
-        <p:txBody>
-          <a:bodyPr wrap="square" lIns="0" tIns="0" rIns="0" bIns="0" rtlCol="0" anchor="ctr"/>
-          <a:lstStyle/>
-          <a:p>
-            <a:pPr algn="ctr" indent="0" marL="0">
-              <a:buNone/>
-            </a:pPr>
-            <a:r>
-              <a:rPr lang="en-US" sz="900" b="1" dirty="0">
-                <a:solidFill>
-                  <a:srgbClr val="9D174D"/>
-                </a:solidFill>
-                <a:latin typeface="Trebuchet MS" pitchFamily="34" charset="0"/>
-                <a:ea typeface="Trebuchet MS" pitchFamily="34" charset="-122"/>
-                <a:cs typeface="Trebuchet MS" pitchFamily="34" charset="-120"/>
-              </a:rPr>
-              <a:t>r</a:t>
-            </a:r>
-            <a:endParaRPr lang="en-US" sz="900" dirty="0"/>
-          </a:p>
-        </p:txBody>
-      </p:sp>
-      <p:sp>
-        <p:nvSpPr>
-          <p:cNvPr id="38" name="Shape 36"/>
-          <p:cNvSpPr/>
-          <p:nvPr/>
-        </p:nvSpPr>
-        <p:spPr>
-          <a:xfrm>
-            <a:off x="3639312" y="4169664"/>
-            <a:ext cx="685800" cy="475488"/>
-          </a:xfrm>
-          <a:prstGeom prst="rect">
-            <a:avLst>
-              <a:gd name="adj" fmla="val 7692"/>
-            </a:avLst>
-          </a:prstGeom>
-          <a:solidFill>
-            <a:srgbClr val="FFFFFF"/>
-          </a:solidFill>
-          <a:ln w="12700">
-            <a:solidFill>
-              <a:srgbClr val="DB2777"/>
-            </a:solidFill>
-            <a:prstDash val="solid"/>
-          </a:ln>
-        </p:spPr>
-      </p:sp>
-      <p:sp>
-        <p:nvSpPr>
-          <p:cNvPr id="39" name="Text 37"/>
-          <p:cNvSpPr/>
-          <p:nvPr/>
-        </p:nvSpPr>
-        <p:spPr>
-          <a:xfrm>
-            <a:off x="3639312" y="4169664"/>
-            <a:ext cx="685800" cy="475488"/>
-          </a:xfrm>
-          <a:prstGeom prst="rect">
-            <a:avLst/>
-          </a:prstGeom>
-          <a:noFill/>
-          <a:ln/>
-        </p:spPr>
-        <p:txBody>
-          <a:bodyPr wrap="square" lIns="0" tIns="0" rIns="0" bIns="0" rtlCol="0" anchor="ctr"/>
-          <a:lstStyle/>
-          <a:p>
-            <a:pPr algn="ctr" indent="0" marL="0">
-              <a:buNone/>
-            </a:pPr>
-            <a:r>
-              <a:rPr lang="en-US" sz="900" b="1" dirty="0">
-                <a:solidFill>
-                  <a:srgbClr val="9D174D"/>
-                </a:solidFill>
-                <a:latin typeface="Trebuchet MS" pitchFamily="34" charset="0"/>
-                <a:ea typeface="Trebuchet MS" pitchFamily="34" charset="-122"/>
-                <a:cs typeface="Trebuchet MS" pitchFamily="34" charset="-120"/>
-              </a:rPr>
-              <a:t>e</a:t>
-            </a:r>
-            <a:endParaRPr lang="en-US" sz="900" dirty="0"/>
-          </a:p>
-        </p:txBody>
-      </p:sp>
-      <p:sp>
-        <p:nvSpPr>
-          <p:cNvPr id="40" name="Shape 38"/>
-          <p:cNvSpPr/>
-          <p:nvPr/>
-        </p:nvSpPr>
-        <p:spPr>
-          <a:xfrm>
-            <a:off x="4850892" y="4169664"/>
-            <a:ext cx="685800" cy="475488"/>
-          </a:xfrm>
-          <a:prstGeom prst="rect">
-            <a:avLst>
-              <a:gd name="adj" fmla="val 7692"/>
-            </a:avLst>
-          </a:prstGeom>
-          <a:solidFill>
-            <a:srgbClr val="FFFFFF"/>
-          </a:solidFill>
-          <a:ln w="12700">
-            <a:solidFill>
-              <a:srgbClr val="DB2777"/>
-            </a:solidFill>
-            <a:prstDash val="solid"/>
-          </a:ln>
-        </p:spPr>
-      </p:sp>
-      <p:sp>
-        <p:nvSpPr>
-          <p:cNvPr id="41" name="Text 39"/>
-          <p:cNvSpPr/>
-          <p:nvPr/>
-        </p:nvSpPr>
-        <p:spPr>
-          <a:xfrm>
-            <a:off x="4850892" y="4169664"/>
-            <a:ext cx="685800" cy="475488"/>
-          </a:xfrm>
-          <a:prstGeom prst="rect">
-            <a:avLst/>
-          </a:prstGeom>
-          <a:noFill/>
-          <a:ln/>
-        </p:spPr>
-        <p:txBody>
-          <a:bodyPr wrap="square" lIns="0" tIns="0" rIns="0" bIns="0" rtlCol="0" anchor="ctr"/>
-          <a:lstStyle/>
-          <a:p>
-            <a:pPr algn="ctr" indent="0" marL="0">
-              <a:buNone/>
-            </a:pPr>
-            <a:r>
-              <a:rPr lang="en-US" sz="900" b="1" dirty="0">
-                <a:solidFill>
-                  <a:srgbClr val="9D174D"/>
-                </a:solidFill>
-                <a:latin typeface="Trebuchet MS" pitchFamily="34" charset="0"/>
-                <a:ea typeface="Trebuchet MS" pitchFamily="34" charset="-122"/>
-                <a:cs typeface="Trebuchet MS" pitchFamily="34" charset="-120"/>
-              </a:rPr>
-              <a:t>gr</a:t>
-            </a:r>
-            <a:endParaRPr lang="en-US" sz="900" dirty="0"/>
-          </a:p>
-        </p:txBody>
-      </p:sp>
-      <p:sp>
-        <p:nvSpPr>
-          <p:cNvPr id="42" name="Shape 40"/>
-          <p:cNvSpPr/>
-          <p:nvPr/>
-        </p:nvSpPr>
-        <p:spPr>
-          <a:xfrm>
-            <a:off x="6062472" y="4169664"/>
-            <a:ext cx="685800" cy="475488"/>
-          </a:xfrm>
-          <a:prstGeom prst="rect">
-            <a:avLst>
-              <a:gd name="adj" fmla="val 7692"/>
-            </a:avLst>
-          </a:prstGeom>
-          <a:solidFill>
-            <a:srgbClr val="FFFFFF"/>
-          </a:solidFill>
-          <a:ln w="12700">
-            <a:solidFill>
-              <a:srgbClr val="DB2777"/>
-            </a:solidFill>
-            <a:prstDash val="solid"/>
-          </a:ln>
-        </p:spPr>
-      </p:sp>
-      <p:sp>
-        <p:nvSpPr>
-          <p:cNvPr id="43" name="Text 41"/>
-          <p:cNvSpPr/>
-          <p:nvPr/>
-        </p:nvSpPr>
-        <p:spPr>
-          <a:xfrm>
-            <a:off x="6062472" y="4169664"/>
-            <a:ext cx="685800" cy="475488"/>
-          </a:xfrm>
-          <a:prstGeom prst="rect">
-            <a:avLst/>
-          </a:prstGeom>
-          <a:noFill/>
-          <a:ln/>
-        </p:spPr>
-        <p:txBody>
-          <a:bodyPr wrap="square" lIns="0" tIns="0" rIns="0" bIns="0" rtlCol="0" anchor="ctr"/>
-          <a:lstStyle/>
-          <a:p>
-            <a:pPr algn="ctr" indent="0" marL="0">
-              <a:buNone/>
-            </a:pPr>
-            <a:r>
-              <a:rPr lang="en-US" sz="900" b="1" dirty="0">
-                <a:solidFill>
-                  <a:srgbClr val="9D174D"/>
-                </a:solidFill>
-                <a:latin typeface="Trebuchet MS" pitchFamily="34" charset="0"/>
-                <a:ea typeface="Trebuchet MS" pitchFamily="34" charset="-122"/>
-                <a:cs typeface="Trebuchet MS" pitchFamily="34" charset="-120"/>
-              </a:rPr>
-              <a:t>ow</a:t>
-            </a:r>
-            <a:endParaRPr lang="en-US" sz="900" dirty="0"/>
-          </a:p>
-        </p:txBody>
-      </p:sp>
-      <p:sp>
-        <p:nvSpPr>
-          <p:cNvPr id="44" name="Shape 42"/>
-          <p:cNvSpPr/>
-          <p:nvPr/>
-        </p:nvSpPr>
-        <p:spPr>
-          <a:xfrm>
-            <a:off x="7274052" y="4169664"/>
-            <a:ext cx="685800" cy="475488"/>
-          </a:xfrm>
-          <a:prstGeom prst="rect">
-            <a:avLst>
-              <a:gd name="adj" fmla="val 7692"/>
-            </a:avLst>
-          </a:prstGeom>
-          <a:solidFill>
-            <a:srgbClr val="FFFFFF"/>
-          </a:solidFill>
-          <a:ln w="12700">
-            <a:solidFill>
-              <a:srgbClr val="DB2777"/>
-            </a:solidFill>
-            <a:prstDash val="solid"/>
-          </a:ln>
-        </p:spPr>
-      </p:sp>
-      <p:sp>
-        <p:nvSpPr>
-          <p:cNvPr id="45" name="Text 43"/>
-          <p:cNvSpPr/>
-          <p:nvPr/>
-        </p:nvSpPr>
-        <p:spPr>
-          <a:xfrm>
-            <a:off x="7274052" y="4169664"/>
-            <a:ext cx="685800" cy="475488"/>
-          </a:xfrm>
-          <a:prstGeom prst="rect">
-            <a:avLst/>
-          </a:prstGeom>
-          <a:noFill/>
-          <a:ln/>
-        </p:spPr>
-        <p:txBody>
-          <a:bodyPr wrap="square" lIns="0" tIns="0" rIns="0" bIns="0" rtlCol="0" anchor="ctr"/>
-          <a:lstStyle/>
-          <a:p>
-            <a:pPr algn="ctr" indent="0" marL="0">
-              <a:buNone/>
-            </a:pPr>
-            <a:r>
-              <a:rPr lang="en-US" sz="900" b="1" dirty="0">
-                <a:solidFill>
-                  <a:srgbClr val="9D174D"/>
-                </a:solidFill>
-                <a:latin typeface="Trebuchet MS" pitchFamily="34" charset="0"/>
-                <a:ea typeface="Trebuchet MS" pitchFamily="34" charset="-122"/>
-                <a:cs typeface="Trebuchet MS" pitchFamily="34" charset="-120"/>
-              </a:rPr>
-              <a:t>th</a:t>
-            </a:r>
-            <a:endParaRPr lang="en-US" sz="900" dirty="0"/>
+              <a:t>ing</a:t>
+            </a:r>
+            <a:endParaRPr lang="en-US" sz="1000" dirty="0"/>
           </a:p>
         </p:txBody>
       </p:sp>
@@ -34655,7 +34655,7 @@
                 <a:ea typeface="Trebuchet MS" pitchFamily="34" charset="-122"/>
                 <a:cs typeface="Trebuchet MS" pitchFamily="34" charset="-120"/>
               </a:rPr>
-              <a:t>grower</a:t>
+              <a:t>grown</a:t>
             </a:r>
             <a:endParaRPr lang="en-US" sz="1200" dirty="0"/>
           </a:p>
@@ -34721,7 +34721,7 @@
                 <a:ea typeface="Trebuchet MS" pitchFamily="34" charset="-122"/>
                 <a:cs typeface="Trebuchet MS" pitchFamily="34" charset="-120"/>
               </a:rPr>
-              <a:t>growth</a:t>
+              <a:t>grower</a:t>
             </a:r>
             <a:endParaRPr lang="en-US" sz="1200" dirty="0"/>
           </a:p>
@@ -34787,7 +34787,7 @@
                 <a:ea typeface="Trebuchet MS" pitchFamily="34" charset="-122"/>
                 <a:cs typeface="Trebuchet MS" pitchFamily="34" charset="-120"/>
               </a:rPr>
-              <a:t>grown</a:t>
+              <a:t>growth</a:t>
             </a:r>
             <a:endParaRPr lang="en-US" sz="1200" dirty="0"/>
           </a:p>
@@ -36239,7 +36239,7 @@
                 <a:ea typeface="Calibri" pitchFamily="34" charset="-122"/>
                 <a:cs typeface="Calibri" pitchFamily="34" charset="-120"/>
               </a:rPr>
-              <a:t>1.  The word 'outgrow' means to become too big for something.</a:t>
+              <a:t>1.  The prefix 'out-' in 'outgrow' means 'beyond' or 'more than'.</a:t>
             </a:r>
             <a:endParaRPr lang="en-US" sz="1300" dirty="0"/>
           </a:p>
@@ -36378,7 +36378,7 @@
                 <a:ea typeface="Calibri" pitchFamily="34" charset="-122"/>
                 <a:cs typeface="Calibri" pitchFamily="34" charset="-120"/>
               </a:rPr>
-              <a:t>2.  The root 'grow' comes from the Latin language.</a:t>
+              <a:t>2.  The word 'outgrow' contains the root 'grow'.</a:t>
             </a:r>
             <a:endParaRPr lang="en-US" sz="1300" dirty="0"/>
           </a:p>
@@ -36401,11 +36401,11 @@
             </a:avLst>
           </a:prstGeom>
           <a:solidFill>
-            <a:srgbClr val="FEE2E2"/>
-          </a:solidFill>
-          <a:ln w="12700">
-            <a:solidFill>
-              <a:srgbClr val="DC2626"/>
+            <a:srgbClr val="DCFCE7"/>
+          </a:solidFill>
+          <a:ln w="12700">
+            <a:solidFill>
+              <a:srgbClr val="16A34A"/>
             </a:solidFill>
             <a:prstDash val="solid"/>
           </a:ln>
@@ -36438,13 +36438,13 @@
             <a:r>
               <a:rPr lang="en-US" sz="1100" b="1" dirty="0">
                 <a:solidFill>
-                  <a:srgbClr val="DC2626"/>
+                  <a:srgbClr val="16A34A"/>
                 </a:solidFill>
                 <a:latin typeface="Trebuchet MS" pitchFamily="34" charset="0"/>
                 <a:ea typeface="Trebuchet MS" pitchFamily="34" charset="-122"/>
                 <a:cs typeface="Trebuchet MS" pitchFamily="34" charset="-120"/>
               </a:rPr>
-              <a:t>FALSE</a:t>
+              <a:t>TRUE</a:t>
             </a:r>
             <a:endParaRPr lang="en-US" sz="1100" dirty="0"/>
           </a:p>
@@ -36517,7 +36517,7 @@
                 <a:ea typeface="Calibri" pitchFamily="34" charset="-122"/>
                 <a:cs typeface="Calibri" pitchFamily="34" charset="-120"/>
               </a:rPr>
-              <a:t>3.  The word 'growth' contains the root 'grow' plus the suffix '-th'.</a:t>
+              <a:t>3.  Adding '-th' to 'grow' makes the word 'growth'.</a:t>
             </a:r>
             <a:endParaRPr lang="en-US" sz="1300" dirty="0"/>
           </a:p>
@@ -36656,7 +36656,7 @@
                 <a:ea typeface="Calibri" pitchFamily="34" charset="-122"/>
                 <a:cs typeface="Calibri" pitchFamily="34" charset="-120"/>
               </a:rPr>
-              <a:t>4.  A 'grower' is someone who grows plants or crops.</a:t>
+              <a:t>4.  The root 'grow' comes from a French word meaning 'to shrink'.</a:t>
             </a:r>
             <a:endParaRPr lang="en-US" sz="1300" dirty="0"/>
           </a:p>
@@ -36679,11 +36679,11 @@
             </a:avLst>
           </a:prstGeom>
           <a:solidFill>
-            <a:srgbClr val="DCFCE7"/>
-          </a:solidFill>
-          <a:ln w="12700">
-            <a:solidFill>
-              <a:srgbClr val="16A34A"/>
+            <a:srgbClr val="FEE2E2"/>
+          </a:solidFill>
+          <a:ln w="12700">
+            <a:solidFill>
+              <a:srgbClr val="DC2626"/>
             </a:solidFill>
             <a:prstDash val="solid"/>
           </a:ln>
@@ -36716,13 +36716,13 @@
             <a:r>
               <a:rPr lang="en-US" sz="1100" b="1" dirty="0">
                 <a:solidFill>
-                  <a:srgbClr val="16A34A"/>
+                  <a:srgbClr val="DC2626"/>
                 </a:solidFill>
                 <a:latin typeface="Trebuchet MS" pitchFamily="34" charset="0"/>
                 <a:ea typeface="Trebuchet MS" pitchFamily="34" charset="-122"/>
                 <a:cs typeface="Trebuchet MS" pitchFamily="34" charset="-120"/>
               </a:rPr>
-              <a:t>TRUE</a:t>
+              <a:t>FALSE</a:t>
             </a:r>
             <a:endParaRPr lang="en-US" sz="1100" dirty="0"/>
           </a:p>
@@ -36795,7 +36795,7 @@
                 <a:ea typeface="Calibri" pitchFamily="34" charset="-122"/>
                 <a:cs typeface="Calibri" pitchFamily="34" charset="-120"/>
               </a:rPr>
-              <a:t>5.  The word 'regrow' means to stop growing completely.</a:t>
+              <a:t>5.  The word 'grower' means something that stops plants from growing.</a:t>
             </a:r>
             <a:endParaRPr lang="en-US" sz="1300" dirty="0"/>
           </a:p>
@@ -37329,7 +37329,7 @@
                 <a:ea typeface="Calibri" pitchFamily="34" charset="-122"/>
                 <a:cs typeface="Calibri" pitchFamily="34" charset="-120"/>
               </a:rPr>
-              <a:t>Origin: Old English: growan</a:t>
+              <a:t>Origin: Latin: crescere</a:t>
             </a:r>
             <a:endParaRPr lang="en-US" sz="1100" dirty="0"/>
           </a:p>
@@ -37500,7 +37500,7 @@
                 <a:ea typeface="Trebuchet MS" pitchFamily="34" charset="-122"/>
                 <a:cs typeface="Trebuchet MS" pitchFamily="34" charset="-120"/>
               </a:rPr>
-              <a:t>grower</a:t>
+              <a:t>grown</a:t>
             </a:r>
             <a:endParaRPr lang="en-US" sz="1300" dirty="0"/>
           </a:p>
@@ -37566,7 +37566,7 @@
                 <a:ea typeface="Trebuchet MS" pitchFamily="34" charset="-122"/>
                 <a:cs typeface="Trebuchet MS" pitchFamily="34" charset="-120"/>
               </a:rPr>
-              <a:t>growth</a:t>
+              <a:t>grower</a:t>
             </a:r>
             <a:endParaRPr lang="en-US" sz="1300" dirty="0"/>
           </a:p>
@@ -37632,7 +37632,7 @@
                 <a:ea typeface="Trebuchet MS" pitchFamily="34" charset="-122"/>
                 <a:cs typeface="Trebuchet MS" pitchFamily="34" charset="-120"/>
               </a:rPr>
-              <a:t>grown</a:t>
+              <a:t>growth</a:t>
             </a:r>
             <a:endParaRPr lang="en-US" sz="1300" dirty="0"/>
           </a:p>
@@ -40147,7 +40147,7 @@
                 <a:ea typeface="Trebuchet MS" pitchFamily="34" charset="-122"/>
                 <a:cs typeface="Trebuchet MS" pitchFamily="34" charset="-120"/>
               </a:rPr>
-              <a:t>grower</a:t>
+              <a:t>grown</a:t>
             </a:r>
             <a:endParaRPr lang="en-US" sz="1200" dirty="0"/>
           </a:p>
@@ -40213,7 +40213,7 @@
                 <a:ea typeface="Calibri" pitchFamily="34" charset="-122"/>
                 <a:cs typeface="Calibri" pitchFamily="34" charset="-120"/>
               </a:rPr>
-              <a:t>The process of becoming bigger or more developed.</a:t>
+              <a:t>A person or thing that grows plants or crops.</a:t>
             </a:r>
             <a:endParaRPr lang="en-US" sz="1200" dirty="0"/>
           </a:p>
@@ -40286,7 +40286,7 @@
                 <a:ea typeface="Trebuchet MS" pitchFamily="34" charset="-122"/>
                 <a:cs typeface="Trebuchet MS" pitchFamily="34" charset="-120"/>
               </a:rPr>
-              <a:t>growth</a:t>
+              <a:t>grower</a:t>
             </a:r>
             <a:endParaRPr lang="en-US" sz="1200" dirty="0"/>
           </a:p>
@@ -40352,7 +40352,7 @@
                 <a:ea typeface="Calibri" pitchFamily="34" charset="-122"/>
                 <a:cs typeface="Calibri" pitchFamily="34" charset="-120"/>
               </a:rPr>
-              <a:t>To get too big for something, like clothes or shoes.</a:t>
+              <a:t>To grow too big for something, like clothes or shoes.</a:t>
             </a:r>
             <a:endParaRPr lang="en-US" sz="1200" dirty="0"/>
           </a:p>
@@ -40425,7 +40425,7 @@
                 <a:ea typeface="Trebuchet MS" pitchFamily="34" charset="-122"/>
                 <a:cs typeface="Trebuchet MS" pitchFamily="34" charset="-120"/>
               </a:rPr>
-              <a:t>grown</a:t>
+              <a:t>growth</a:t>
             </a:r>
             <a:endParaRPr lang="en-US" sz="1200" dirty="0"/>
           </a:p>
@@ -40491,7 +40491,7 @@
                 <a:ea typeface="Calibri" pitchFamily="34" charset="-122"/>
                 <a:cs typeface="Calibri" pitchFamily="34" charset="-120"/>
               </a:rPr>
-              <a:t>Covered with plants or weeds that have grown too much.</a:t>
+              <a:t>Covered with plants that have grown too much and become wild.</a:t>
             </a:r>
             <a:endParaRPr lang="en-US" sz="1200" dirty="0"/>
           </a:p>
@@ -40630,7 +40630,7 @@
                 <a:ea typeface="Calibri" pitchFamily="34" charset="-122"/>
                 <a:cs typeface="Calibri" pitchFamily="34" charset="-120"/>
               </a:rPr>
-              <a:t>Having fully developed or reached an adult size.</a:t>
+              <a:t>The process of getting bigger or developing.</a:t>
             </a:r>
             <a:endParaRPr lang="en-US" sz="1200" dirty="0"/>
           </a:p>
@@ -40769,7 +40769,7 @@
                 <a:ea typeface="Calibri" pitchFamily="34" charset="-122"/>
                 <a:cs typeface="Calibri" pitchFamily="34" charset="-120"/>
               </a:rPr>
-              <a:t>Getting bigger or developing over time.</a:t>
+              <a:t>Getting bigger or taller over time.</a:t>
             </a:r>
             <a:endParaRPr lang="en-US" sz="1200" dirty="0"/>
           </a:p>
@@ -40908,7 +40908,7 @@
                 <a:ea typeface="Calibri" pitchFamily="34" charset="-122"/>
                 <a:cs typeface="Calibri" pitchFamily="34" charset="-120"/>
               </a:rPr>
-              <a:t>A person or thing that grows plants or crops.</a:t>
+              <a:t>Fully developed or no longer a child.</a:t>
             </a:r>
             <a:endParaRPr lang="en-US" sz="1200" dirty="0"/>
           </a:p>
@@ -41403,7 +41403,7 @@
                 <a:ea typeface="Calibri" pitchFamily="34" charset="-122"/>
                 <a:cs typeface="Calibri" pitchFamily="34" charset="-120"/>
               </a:rPr>
-              <a:t>The scientist studied the growth of the seedlings in the greenhouse over six weeks.</a:t>
+              <a:t>The scientist studied the growth of the seedlings over several weeks.</a:t>
             </a:r>
             <a:endParaRPr lang="en-US" sz="1500" dirty="0"/>
           </a:p>
@@ -41567,7 +41567,7 @@
                 <a:ea typeface="Calibri" pitchFamily="34" charset="-122"/>
                 <a:cs typeface="Calibri" pitchFamily="34" charset="-120"/>
               </a:rPr>
-              <a:t>Jack had outgrown his school shoes again, so his mum had to buy a new pair.</a:t>
+              <a:t>Maya had outgrown her school shoes by the end of Term 1.</a:t>
             </a:r>
             <a:endParaRPr lang="en-US" sz="1500" dirty="0"/>
           </a:p>
@@ -41731,7 +41731,7 @@
                 <a:ea typeface="Calibri" pitchFamily="34" charset="-122"/>
                 <a:cs typeface="Calibri" pitchFamily="34" charset="-120"/>
               </a:rPr>
-              <a:t>After the bushfire, the bush began to regrow and animals slowly returned to the area.</a:t>
+              <a:t>The garden was overgrown with weeds after the long summer holidays.</a:t>
             </a:r>
             <a:endParaRPr lang="en-US" sz="1500" dirty="0"/>
           </a:p>
